--- a/dist/초3/사회·역사/지역과공간/초3_사회·역사_지역과공간_02_그림과기호로나타내기_학생용.pptx
+++ b/dist/초3/사회·역사/지역과공간/초3_사회·역사_지역과공간_02_그림과기호로나타내기_학생용.pptx
@@ -120,13 +120,13 @@
   <p:extLst>
     <p:ext uri="{521415D9-36F7-43E2-AB2F-B90AF26B5E84}">
       <p14:sectionLst xmlns:p14="http://schemas.microsoft.com/office/powerpoint/2010/main">
-        <p14:section name="도입" id="{ad7621cc-91dd-06f7-fb69-f070e7b3fa57}">
+        <p14:section name="도입" id="{91508586-537e-f47b-3460-bc1d6cbee6a8}">
           <p14:sldIdLst>
             <p14:sldId id="256"/>
             <p14:sldId id="257"/>
           </p14:sldIdLst>
         </p14:section>
-        <p14:section name="개념" id="{f65ac103-6e8c-9aa1-81b3-d7d0b0d354df}">
+        <p14:section name="개념" id="{522e87c9-a762-b778-411c-70e762e55b7a}">
           <p14:sldIdLst>
             <p14:sldId id="258"/>
             <p14:sldId id="259"/>
@@ -134,7 +134,7 @@
             <p14:sldId id="263"/>
           </p14:sldIdLst>
         </p14:section>
-        <p14:section name="연습" id="{ec31ca94-b01f-54ff-f9c2-3674665b9e41}">
+        <p14:section name="연습" id="{d6eb29f0-27cc-33ce-c91d-0e0ee86e7534}">
           <p14:sldIdLst>
             <p14:sldId id="260"/>
             <p14:sldId id="261"/>
@@ -142,24 +142,24 @@
             <p14:sldId id="265"/>
           </p14:sldIdLst>
         </p14:section>
-        <p14:section name="개념" id="{15e1c49a-307d-0f42-6683-4735dad3aadb}">
+        <p14:section name="개념" id="{98c39451-00e0-91bd-eade-1e7d82f85929}">
           <p14:sldIdLst/>
         </p14:section>
-        <p14:section name="연습" id="{1058d2ff-7c62-3cb7-2b57-403d361de377}">
+        <p14:section name="연습" id="{4af59148-69d0-b314-bfc9-43a7dfdfbe6a}">
           <p14:sldIdLst/>
         </p14:section>
-        <p14:section name="확인" id="{24cf4e4e-e6db-3af9-1d5c-d32e83b7dff0}">
+        <p14:section name="확인" id="{b494bd0b-822d-d0b8-72db-0d9a7042e054}">
           <p14:sldIdLst>
             <p14:sldId id="266"/>
             <p14:sldId id="267"/>
           </p14:sldIdLst>
         </p14:section>
-        <p14:section name="정리" id="{2743cd8d-cf52-2e80-02c3-90548c64a3a6}">
+        <p14:section name="정리" id="{e271db91-d810-bb68-e4de-680071af044e}">
           <p14:sldIdLst>
             <p14:sldId id="268"/>
           </p14:sldIdLst>
         </p14:section>
-        <p14:section name="보충" id="{88e29451-9549-463d-a944-d54460d2fae7}">
+        <p14:section name="보충" id="{b17c545d-5843-632a-c876-9a677fd5a1fa}">
           <p14:sldIdLst>
             <p14:sldId id="269"/>
           </p14:sldIdLst>
@@ -3105,7 +3105,7 @@
                 <a:ea typeface="맑은 고딕" pitchFamily="34" charset="-122"/>
                 <a:cs typeface="맑은 고딕" pitchFamily="34" charset="-120"/>
               </a:rPr>
-              <a:t>동서남북은 내가 보는 쪽에 따라 바뀔까요?</a:t>
+              <a:t>두 친구가 동서남북을 두고 말했어요.</a:t>
             </a:r>
             <a:endParaRPr lang="ko-KR" sz="3000" dirty="0"/>
           </a:p>
@@ -3617,7 +3617,7 @@
         </p:nvSpPr>
         <p:spPr>
           <a:xfrm>
-            <a:off x="2372639" y="3622853"/>
+            <a:off x="2570418" y="3622853"/>
             <a:ext cx="551383" cy="551383"/>
           </a:xfrm>
           <a:custGeom>
@@ -3658,7 +3658,7 @@
         </p:nvSpPr>
         <p:spPr>
           <a:xfrm>
-            <a:off x="2372639" y="3071470"/>
+            <a:off x="2570418" y="3071470"/>
             <a:ext cx="551383" cy="551383"/>
           </a:xfrm>
           <a:custGeom>
@@ -3699,7 +3699,7 @@
         </p:nvSpPr>
         <p:spPr>
           <a:xfrm>
-            <a:off x="2372639" y="2520086"/>
+            <a:off x="2570418" y="2520086"/>
             <a:ext cx="551383" cy="551383"/>
           </a:xfrm>
           <a:custGeom>
@@ -3740,7 +3740,7 @@
         </p:nvSpPr>
         <p:spPr>
           <a:xfrm>
-            <a:off x="2372639" y="1968703"/>
+            <a:off x="2570418" y="1968703"/>
             <a:ext cx="551383" cy="551383"/>
           </a:xfrm>
           <a:custGeom>
@@ -3781,7 +3781,7 @@
         </p:nvSpPr>
         <p:spPr>
           <a:xfrm>
-            <a:off x="2372639" y="1417320"/>
+            <a:off x="2570418" y="1417320"/>
             <a:ext cx="551383" cy="551383"/>
           </a:xfrm>
           <a:custGeom>
@@ -3822,7 +3822,7 @@
         </p:nvSpPr>
         <p:spPr>
           <a:xfrm>
-            <a:off x="900446" y="2608308"/>
+            <a:off x="1097985" y="2608308"/>
             <a:ext cx="187470" cy="143360"/>
           </a:xfrm>
           <a:custGeom>
@@ -3837,19 +3837,19 @@
                   <a:pt x="187470" y="143360"/>
                 </a:moveTo>
                 <a:lnTo>
-                  <a:pt x="174788" y="71680"/>
-                </a:lnTo>
-                <a:lnTo>
-                  <a:pt x="140603" y="19298"/>
-                </a:lnTo>
-                <a:lnTo>
-                  <a:pt x="93735" y="0"/>
-                </a:lnTo>
-                <a:lnTo>
-                  <a:pt x="46868" y="19298"/>
-                </a:lnTo>
-                <a:lnTo>
-                  <a:pt x="12682" y="71680"/>
+                  <a:pt x="175004" y="71920"/>
+                </a:lnTo>
+                <a:lnTo>
+                  <a:pt x="140962" y="19179"/>
+                </a:lnTo>
+                <a:lnTo>
+                  <a:pt x="93975" y="0"/>
+                </a:lnTo>
+                <a:lnTo>
+                  <a:pt x="46987" y="19179"/>
+                </a:lnTo>
+                <a:lnTo>
+                  <a:pt x="12946" y="71920"/>
                 </a:lnTo>
                 <a:lnTo>
                   <a:pt x="0" y="143360"/>
@@ -3874,7 +3874,7 @@
         </p:nvSpPr>
         <p:spPr>
           <a:xfrm>
-            <a:off x="812225" y="2751667"/>
+            <a:off x="1009764" y="2751667"/>
             <a:ext cx="363913" cy="242609"/>
           </a:xfrm>
           <a:custGeom>
@@ -3920,7 +3920,7 @@
         </p:nvSpPr>
         <p:spPr>
           <a:xfrm>
-            <a:off x="1975643" y="2597280"/>
+            <a:off x="2173422" y="2597280"/>
             <a:ext cx="297747" cy="176443"/>
           </a:xfrm>
           <a:custGeom>
@@ -3963,8 +3963,8 @@
         </p:nvSpPr>
         <p:spPr>
           <a:xfrm>
-            <a:off x="2058351" y="2310561"/>
-            <a:ext cx="77194" cy="143360"/>
+            <a:off x="2256369" y="2310561"/>
+            <a:ext cx="76714" cy="143360"/>
           </a:xfrm>
           <a:custGeom>
             <a:avLst/>
@@ -3973,15 +3973,15 @@
             <a:cxnLst/>
             <a:rect l="l" t="t" r="r" b="b"/>
             <a:pathLst>
-              <a:path w="77194" h="143360">
+              <a:path w="76714" h="143360">
                 <a:moveTo>
                   <a:pt x="0" y="143360"/>
                 </a:moveTo>
                 <a:lnTo>
-                  <a:pt x="77194" y="143360"/>
-                </a:lnTo>
-                <a:lnTo>
-                  <a:pt x="77194" y="0"/>
+                  <a:pt x="76714" y="143360"/>
+                </a:lnTo>
+                <a:lnTo>
+                  <a:pt x="76714" y="0"/>
                 </a:lnTo>
                 <a:lnTo>
                   <a:pt x="0" y="0"/>
@@ -4009,7 +4009,7 @@
         </p:nvSpPr>
         <p:spPr>
           <a:xfrm>
-            <a:off x="1920505" y="2023842"/>
+            <a:off x="2118284" y="2023842"/>
             <a:ext cx="352885" cy="286719"/>
           </a:xfrm>
           <a:custGeom>
@@ -4052,7 +4052,7 @@
         </p:nvSpPr>
         <p:spPr>
           <a:xfrm>
-            <a:off x="3552599" y="2619335"/>
+            <a:off x="3750378" y="2619335"/>
             <a:ext cx="198498" cy="341858"/>
           </a:xfrm>
           <a:custGeom>
@@ -4098,7 +4098,7 @@
         </p:nvSpPr>
         <p:spPr>
           <a:xfrm>
-            <a:off x="3751097" y="2619335"/>
+            <a:off x="3948876" y="2619335"/>
             <a:ext cx="198498" cy="341858"/>
           </a:xfrm>
           <a:custGeom>
@@ -4144,7 +4144,7 @@
         </p:nvSpPr>
         <p:spPr>
           <a:xfrm>
-            <a:off x="3569141" y="3716588"/>
+            <a:off x="3767159" y="3716828"/>
             <a:ext cx="363913" cy="363913"/>
           </a:xfrm>
           <a:custGeom>
@@ -4156,40 +4156,40 @@
             <a:pathLst>
               <a:path w="363913" h="363913">
                 <a:moveTo>
-                  <a:pt x="126818" y="363913"/>
+                  <a:pt x="126578" y="363913"/>
                 </a:moveTo>
                 <a:lnTo>
-                  <a:pt x="237095" y="363913"/>
-                </a:lnTo>
-                <a:lnTo>
-                  <a:pt x="237095" y="237095"/>
-                </a:lnTo>
-                <a:lnTo>
-                  <a:pt x="363913" y="237095"/>
-                </a:lnTo>
-                <a:lnTo>
-                  <a:pt x="363913" y="126818"/>
-                </a:lnTo>
-                <a:lnTo>
-                  <a:pt x="237095" y="126818"/>
-                </a:lnTo>
-                <a:lnTo>
-                  <a:pt x="237095" y="0"/>
-                </a:lnTo>
-                <a:lnTo>
-                  <a:pt x="126818" y="0"/>
-                </a:lnTo>
-                <a:lnTo>
-                  <a:pt x="126818" y="126818"/>
-                </a:lnTo>
-                <a:lnTo>
-                  <a:pt x="0" y="126818"/>
-                </a:lnTo>
-                <a:lnTo>
-                  <a:pt x="0" y="237095"/>
-                </a:lnTo>
-                <a:lnTo>
-                  <a:pt x="126818" y="237095"/>
+                  <a:pt x="236855" y="363913"/>
+                </a:lnTo>
+                <a:lnTo>
+                  <a:pt x="236855" y="236855"/>
+                </a:lnTo>
+                <a:lnTo>
+                  <a:pt x="363913" y="236855"/>
+                </a:lnTo>
+                <a:lnTo>
+                  <a:pt x="363913" y="126578"/>
+                </a:lnTo>
+                <a:lnTo>
+                  <a:pt x="236855" y="126578"/>
+                </a:lnTo>
+                <a:lnTo>
+                  <a:pt x="236855" y="0"/>
+                </a:lnTo>
+                <a:lnTo>
+                  <a:pt x="126578" y="0"/>
+                </a:lnTo>
+                <a:lnTo>
+                  <a:pt x="126578" y="126578"/>
+                </a:lnTo>
+                <a:lnTo>
+                  <a:pt x="0" y="126578"/>
+                </a:lnTo>
+                <a:lnTo>
+                  <a:pt x="0" y="236855"/>
+                </a:lnTo>
+                <a:lnTo>
+                  <a:pt x="126578" y="236855"/>
                 </a:lnTo>
                 <a:close/>
               </a:path>
@@ -4214,7 +4214,7 @@
         </p:nvSpPr>
         <p:spPr>
           <a:xfrm>
-            <a:off x="718490" y="1417320"/>
+            <a:off x="916269" y="1417320"/>
             <a:ext cx="4411066" cy="2756916"/>
           </a:xfrm>
           <a:custGeom>
@@ -4258,8 +4258,8 @@
         </p:nvSpPr>
         <p:spPr>
           <a:xfrm>
-            <a:off x="7279950" y="1417320"/>
-            <a:ext cx="4190512" cy="1984980"/>
+            <a:off x="7197242" y="1932743"/>
+            <a:ext cx="4075441" cy="1726069"/>
           </a:xfrm>
           <a:custGeom>
             <a:avLst/>
@@ -4268,15 +4268,15 @@
             <a:cxnLst/>
             <a:rect l="l" t="t" r="r" b="b"/>
             <a:pathLst>
-              <a:path w="4190512" h="1984980">
+              <a:path w="4075441" h="1726069">
                 <a:moveTo>
-                  <a:pt x="0" y="1984980"/>
+                  <a:pt x="0" y="1726069"/>
                 </a:moveTo>
                 <a:lnTo>
-                  <a:pt x="4190512" y="1984980"/>
-                </a:lnTo>
-                <a:lnTo>
-                  <a:pt x="4190512" y="0"/>
+                  <a:pt x="4075441" y="1726069"/>
+                </a:lnTo>
+                <a:lnTo>
+                  <a:pt x="4075441" y="0"/>
                 </a:lnTo>
                 <a:lnTo>
                   <a:pt x="0" y="0"/>
@@ -4304,8 +4304,8 @@
         </p:nvSpPr>
         <p:spPr>
           <a:xfrm>
-            <a:off x="7279950" y="1417320"/>
-            <a:ext cx="4190512" cy="413537"/>
+            <a:off x="7197242" y="1932743"/>
+            <a:ext cx="4075441" cy="359598"/>
           </a:xfrm>
           <a:custGeom>
             <a:avLst/>
@@ -4314,15 +4314,15 @@
             <a:cxnLst/>
             <a:rect l="l" t="t" r="r" b="b"/>
             <a:pathLst>
-              <a:path w="4190512" h="413537">
+              <a:path w="4075441" h="359598">
                 <a:moveTo>
-                  <a:pt x="0" y="413537"/>
+                  <a:pt x="0" y="359598"/>
                 </a:moveTo>
                 <a:lnTo>
-                  <a:pt x="4190512" y="413537"/>
-                </a:lnTo>
-                <a:lnTo>
-                  <a:pt x="4190512" y="0"/>
+                  <a:pt x="4075441" y="359598"/>
+                </a:lnTo>
+                <a:lnTo>
+                  <a:pt x="4075441" y="0"/>
                 </a:lnTo>
                 <a:lnTo>
                   <a:pt x="0" y="0"/>
@@ -4350,8 +4350,8 @@
         </p:nvSpPr>
         <p:spPr>
           <a:xfrm>
-            <a:off x="7584313" y="1861735"/>
-            <a:ext cx="267972" cy="158798"/>
+            <a:off x="7437933" y="2319191"/>
+            <a:ext cx="233019" cy="138086"/>
           </a:xfrm>
           <a:custGeom>
             <a:avLst/>
@@ -4360,15 +4360,15 @@
             <a:cxnLst/>
             <a:rect l="l" t="t" r="r" b="b"/>
             <a:pathLst>
-              <a:path w="267972" h="158798">
+              <a:path w="233019" h="138086">
                 <a:moveTo>
                   <a:pt x="0" y="0"/>
                 </a:moveTo>
                 <a:lnTo>
-                  <a:pt x="267972" y="79399"/>
-                </a:lnTo>
-                <a:lnTo>
-                  <a:pt x="0" y="158798"/>
+                  <a:pt x="233019" y="69043"/>
+                </a:lnTo>
+                <a:lnTo>
+                  <a:pt x="0" y="138086"/>
                 </a:lnTo>
                 <a:close/>
               </a:path>
@@ -4393,8 +4393,8 @@
         </p:nvSpPr>
         <p:spPr>
           <a:xfrm>
-            <a:off x="9624983" y="1876622"/>
-            <a:ext cx="327522" cy="327522"/>
+            <a:off x="9404214" y="2332137"/>
+            <a:ext cx="284801" cy="284801"/>
           </a:xfrm>
           <a:custGeom>
             <a:avLst/>
@@ -4403,42 +4403,42 @@
             <a:cxnLst/>
             <a:rect l="l" t="t" r="r" b="b"/>
             <a:pathLst>
-              <a:path w="327522" h="327522">
+              <a:path w="284801" h="284801">
                 <a:moveTo>
-                  <a:pt x="114136" y="327522"/>
+                  <a:pt x="99249" y="284801"/>
                 </a:moveTo>
                 <a:lnTo>
-                  <a:pt x="213385" y="327522"/>
-                </a:lnTo>
-                <a:lnTo>
-                  <a:pt x="213385" y="213385"/>
-                </a:lnTo>
-                <a:lnTo>
-                  <a:pt x="327522" y="213385"/>
-                </a:lnTo>
-                <a:lnTo>
-                  <a:pt x="327522" y="114136"/>
-                </a:lnTo>
-                <a:lnTo>
-                  <a:pt x="213385" y="114136"/>
-                </a:lnTo>
-                <a:lnTo>
-                  <a:pt x="213385" y="0"/>
-                </a:lnTo>
-                <a:lnTo>
-                  <a:pt x="114136" y="0"/>
-                </a:lnTo>
-                <a:lnTo>
-                  <a:pt x="114136" y="114136"/>
-                </a:lnTo>
-                <a:lnTo>
-                  <a:pt x="0" y="114136"/>
-                </a:lnTo>
-                <a:lnTo>
-                  <a:pt x="0" y="213385"/>
-                </a:lnTo>
-                <a:lnTo>
-                  <a:pt x="114136" y="213385"/>
+                  <a:pt x="185552" y="284801"/>
+                </a:lnTo>
+                <a:lnTo>
+                  <a:pt x="185552" y="185552"/>
+                </a:lnTo>
+                <a:lnTo>
+                  <a:pt x="284801" y="185552"/>
+                </a:lnTo>
+                <a:lnTo>
+                  <a:pt x="284801" y="99249"/>
+                </a:lnTo>
+                <a:lnTo>
+                  <a:pt x="185552" y="99249"/>
+                </a:lnTo>
+                <a:lnTo>
+                  <a:pt x="185552" y="0"/>
+                </a:lnTo>
+                <a:lnTo>
+                  <a:pt x="99249" y="0"/>
+                </a:lnTo>
+                <a:lnTo>
+                  <a:pt x="99249" y="99249"/>
+                </a:lnTo>
+                <a:lnTo>
+                  <a:pt x="0" y="99249"/>
+                </a:lnTo>
+                <a:lnTo>
+                  <a:pt x="0" y="185552"/>
+                </a:lnTo>
+                <a:lnTo>
+                  <a:pt x="99249" y="185552"/>
                 </a:lnTo>
                 <a:close/>
               </a:path>
@@ -4463,8 +4463,8 @@
         </p:nvSpPr>
         <p:spPr>
           <a:xfrm>
-            <a:off x="7658750" y="2596177"/>
-            <a:ext cx="69474" cy="129024"/>
+            <a:off x="7502661" y="2957837"/>
+            <a:ext cx="60412" cy="112194"/>
           </a:xfrm>
           <a:custGeom>
             <a:avLst/>
@@ -4473,15 +4473,15 @@
             <a:cxnLst/>
             <a:rect l="l" t="t" r="r" b="b"/>
             <a:pathLst>
-              <a:path w="69474" h="129024">
+              <a:path w="60412" h="112194">
                 <a:moveTo>
-                  <a:pt x="0" y="129024"/>
+                  <a:pt x="0" y="112194"/>
                 </a:moveTo>
                 <a:lnTo>
-                  <a:pt x="69474" y="129024"/>
-                </a:lnTo>
-                <a:lnTo>
-                  <a:pt x="69474" y="0"/>
+                  <a:pt x="60412" y="112194"/>
+                </a:lnTo>
+                <a:lnTo>
+                  <a:pt x="60412" y="0"/>
                 </a:lnTo>
                 <a:lnTo>
                   <a:pt x="0" y="0"/>
@@ -4509,8 +4509,8 @@
         </p:nvSpPr>
         <p:spPr>
           <a:xfrm>
-            <a:off x="7534689" y="2338130"/>
-            <a:ext cx="317597" cy="258047"/>
+            <a:off x="7394781" y="2733448"/>
+            <a:ext cx="276171" cy="224389"/>
           </a:xfrm>
           <a:custGeom>
             <a:avLst/>
@@ -4519,15 +4519,15 @@
             <a:cxnLst/>
             <a:rect l="l" t="t" r="r" b="b"/>
             <a:pathLst>
-              <a:path w="317597" h="258047">
+              <a:path w="276171" h="224389">
                 <a:moveTo>
-                  <a:pt x="0" y="258047"/>
+                  <a:pt x="0" y="224389"/>
                 </a:moveTo>
                 <a:lnTo>
-                  <a:pt x="317597" y="258047"/>
-                </a:lnTo>
-                <a:lnTo>
-                  <a:pt x="158798" y="0"/>
+                  <a:pt x="276171" y="224389"/>
+                </a:lnTo>
+                <a:lnTo>
+                  <a:pt x="138086" y="0"/>
                 </a:lnTo>
                 <a:close/>
               </a:path>
@@ -4552,8 +4552,8 @@
         </p:nvSpPr>
         <p:spPr>
           <a:xfrm>
-            <a:off x="9610095" y="2377830"/>
-            <a:ext cx="178648" cy="307672"/>
+            <a:off x="9391268" y="2767969"/>
+            <a:ext cx="155346" cy="267541"/>
           </a:xfrm>
           <a:custGeom>
             <a:avLst/>
@@ -4562,15 +4562,15 @@
             <a:cxnLst/>
             <a:rect l="l" t="t" r="r" b="b"/>
             <a:pathLst>
-              <a:path w="178648" h="307672">
+              <a:path w="155346" h="267541">
                 <a:moveTo>
-                  <a:pt x="0" y="267972"/>
+                  <a:pt x="0" y="233019"/>
                 </a:moveTo>
                 <a:lnTo>
-                  <a:pt x="178648" y="307672"/>
-                </a:lnTo>
-                <a:lnTo>
-                  <a:pt x="178648" y="39700"/>
+                  <a:pt x="155346" y="267541"/>
+                </a:lnTo>
+                <a:lnTo>
+                  <a:pt x="155346" y="34521"/>
                 </a:lnTo>
                 <a:lnTo>
                   <a:pt x="0" y="0"/>
@@ -4598,8 +4598,8 @@
         </p:nvSpPr>
         <p:spPr>
           <a:xfrm>
-            <a:off x="9788743" y="2377830"/>
-            <a:ext cx="178648" cy="307672"/>
+            <a:off x="9546614" y="2767969"/>
+            <a:ext cx="155346" cy="267541"/>
           </a:xfrm>
           <a:custGeom>
             <a:avLst/>
@@ -4608,18 +4608,18 @@
             <a:cxnLst/>
             <a:rect l="l" t="t" r="r" b="b"/>
             <a:pathLst>
-              <a:path w="178648" h="307672">
+              <a:path w="155346" h="267541">
                 <a:moveTo>
-                  <a:pt x="178648" y="267972"/>
+                  <a:pt x="155346" y="233019"/>
                 </a:moveTo>
                 <a:lnTo>
-                  <a:pt x="0" y="307672"/>
-                </a:lnTo>
-                <a:lnTo>
-                  <a:pt x="0" y="39700"/>
-                </a:lnTo>
-                <a:lnTo>
-                  <a:pt x="178648" y="0"/>
+                  <a:pt x="0" y="267541"/>
+                </a:lnTo>
+                <a:lnTo>
+                  <a:pt x="0" y="34521"/>
+                </a:lnTo>
+                <a:lnTo>
+                  <a:pt x="155346" y="0"/>
                 </a:lnTo>
                 <a:close/>
               </a:path>
@@ -4644,8 +4644,8 @@
         </p:nvSpPr>
         <p:spPr>
           <a:xfrm>
-            <a:off x="9704382" y="2864150"/>
-            <a:ext cx="168723" cy="129024"/>
+            <a:off x="9473256" y="3190856"/>
+            <a:ext cx="146716" cy="112194"/>
           </a:xfrm>
           <a:custGeom>
             <a:avLst/>
@@ -4654,27 +4654,27 @@
             <a:cxnLst/>
             <a:rect l="l" t="t" r="r" b="b"/>
             <a:pathLst>
-              <a:path w="168723" h="129024">
+              <a:path w="146716" h="112194">
                 <a:moveTo>
-                  <a:pt x="168723" y="129024"/>
+                  <a:pt x="146716" y="112194"/>
                 </a:moveTo>
                 <a:lnTo>
-                  <a:pt x="157696" y="64512"/>
-                </a:lnTo>
-                <a:lnTo>
-                  <a:pt x="126267" y="17093"/>
-                </a:lnTo>
-                <a:lnTo>
-                  <a:pt x="84362" y="0"/>
-                </a:lnTo>
-                <a:lnTo>
-                  <a:pt x="41905" y="17093"/>
-                </a:lnTo>
-                <a:lnTo>
-                  <a:pt x="11028" y="64512"/>
-                </a:lnTo>
-                <a:lnTo>
-                  <a:pt x="0" y="129024"/>
+                  <a:pt x="137127" y="56097"/>
+                </a:lnTo>
+                <a:lnTo>
+                  <a:pt x="109797" y="14863"/>
+                </a:lnTo>
+                <a:lnTo>
+                  <a:pt x="73358" y="0"/>
+                </a:lnTo>
+                <a:lnTo>
+                  <a:pt x="36919" y="14863"/>
+                </a:lnTo>
+                <a:lnTo>
+                  <a:pt x="9589" y="56097"/>
+                </a:lnTo>
+                <a:lnTo>
+                  <a:pt x="0" y="112194"/>
                 </a:lnTo>
               </a:path>
             </a:pathLst>
@@ -4696,8 +4696,8 @@
         </p:nvSpPr>
         <p:spPr>
           <a:xfrm>
-            <a:off x="9624983" y="2993173"/>
-            <a:ext cx="327522" cy="218348"/>
+            <a:off x="9404214" y="3303051"/>
+            <a:ext cx="284801" cy="189868"/>
           </a:xfrm>
           <a:custGeom>
             <a:avLst/>
@@ -4706,18 +4706,18 @@
             <a:cxnLst/>
             <a:rect l="l" t="t" r="r" b="b"/>
             <a:pathLst>
-              <a:path w="327522" h="218348">
+              <a:path w="284801" h="189868">
                 <a:moveTo>
                   <a:pt x="0" y="0"/>
                 </a:moveTo>
                 <a:lnTo>
-                  <a:pt x="327522" y="0"/>
-                </a:lnTo>
-                <a:lnTo>
-                  <a:pt x="287822" y="218348"/>
-                </a:lnTo>
-                <a:lnTo>
-                  <a:pt x="39700" y="218348"/>
+                  <a:pt x="284801" y="0"/>
+                </a:lnTo>
+                <a:lnTo>
+                  <a:pt x="250280" y="189868"/>
+                </a:lnTo>
+                <a:lnTo>
+                  <a:pt x="34521" y="189868"/>
                 </a:lnTo>
                 <a:close/>
               </a:path>
@@ -4742,8 +4742,8 @@
         </p:nvSpPr>
         <p:spPr>
           <a:xfrm>
-            <a:off x="4120524" y="1511055"/>
-            <a:ext cx="363913" cy="363913"/>
+            <a:off x="4318063" y="1510815"/>
+            <a:ext cx="364392" cy="364392"/>
           </a:xfrm>
           <a:prstGeom prst="ellipse">
             <a:avLst/>
@@ -4767,7 +4767,7 @@
         </p:nvSpPr>
         <p:spPr>
           <a:xfrm>
-            <a:off x="4225287" y="1615818"/>
+            <a:off x="4423066" y="1615818"/>
             <a:ext cx="154387" cy="154387"/>
           </a:xfrm>
           <a:prstGeom prst="ellipse">
@@ -4792,8 +4792,8 @@
         </p:nvSpPr>
         <p:spPr>
           <a:xfrm>
-            <a:off x="7529726" y="2869112"/>
-            <a:ext cx="327522" cy="327522"/>
+            <a:off x="7390466" y="3195171"/>
+            <a:ext cx="284801" cy="284801"/>
           </a:xfrm>
           <a:prstGeom prst="ellipse">
             <a:avLst/>
@@ -4817,8 +4817,8 @@
         </p:nvSpPr>
         <p:spPr>
           <a:xfrm>
-            <a:off x="7624013" y="2963398"/>
-            <a:ext cx="138949" cy="138949"/>
+            <a:off x="7472455" y="3277160"/>
+            <a:ext cx="120825" cy="120825"/>
           </a:xfrm>
           <a:prstGeom prst="ellipse">
             <a:avLst/>
@@ -4842,7 +4842,7 @@
         </p:nvSpPr>
         <p:spPr>
           <a:xfrm flipV="1">
-            <a:off x="1975643" y="2597280"/>
+            <a:off x="2173422" y="2597280"/>
             <a:ext cx="0" cy="396996"/>
           </a:xfrm>
           <a:prstGeom prst="line">
@@ -4865,7 +4865,7 @@
         </p:nvSpPr>
         <p:spPr>
           <a:xfrm flipV="1">
-            <a:off x="718490" y="1417320"/>
+            <a:off x="916269" y="1417320"/>
             <a:ext cx="0" cy="2756916"/>
           </a:xfrm>
           <a:prstGeom prst="line">
@@ -4888,7 +4888,7 @@
         </p:nvSpPr>
         <p:spPr>
           <a:xfrm flipV="1">
-            <a:off x="1269873" y="1417320"/>
+            <a:off x="1467652" y="1417320"/>
             <a:ext cx="0" cy="2756916"/>
           </a:xfrm>
           <a:prstGeom prst="line">
@@ -4911,7 +4911,7 @@
         </p:nvSpPr>
         <p:spPr>
           <a:xfrm flipV="1">
-            <a:off x="1821256" y="1417320"/>
+            <a:off x="2019035" y="1417320"/>
             <a:ext cx="0" cy="2756916"/>
           </a:xfrm>
           <a:prstGeom prst="line">
@@ -4934,7 +4934,7 @@
         </p:nvSpPr>
         <p:spPr>
           <a:xfrm flipV="1">
-            <a:off x="2372639" y="1417320"/>
+            <a:off x="2570418" y="1417320"/>
             <a:ext cx="0" cy="2756916"/>
           </a:xfrm>
           <a:prstGeom prst="line">
@@ -4957,7 +4957,7 @@
         </p:nvSpPr>
         <p:spPr>
           <a:xfrm flipV="1">
-            <a:off x="2924023" y="1417320"/>
+            <a:off x="3121801" y="1417320"/>
             <a:ext cx="0" cy="2756916"/>
           </a:xfrm>
           <a:prstGeom prst="line">
@@ -4980,7 +4980,7 @@
         </p:nvSpPr>
         <p:spPr>
           <a:xfrm flipV="1">
-            <a:off x="3475406" y="1417320"/>
+            <a:off x="3673185" y="1417320"/>
             <a:ext cx="0" cy="2756916"/>
           </a:xfrm>
           <a:prstGeom prst="line">
@@ -5003,7 +5003,7 @@
         </p:nvSpPr>
         <p:spPr>
           <a:xfrm flipV="1">
-            <a:off x="4026789" y="1417320"/>
+            <a:off x="4224568" y="1417320"/>
             <a:ext cx="0" cy="2756916"/>
           </a:xfrm>
           <a:prstGeom prst="line">
@@ -5026,7 +5026,7 @@
         </p:nvSpPr>
         <p:spPr>
           <a:xfrm flipV="1">
-            <a:off x="4578172" y="1417320"/>
+            <a:off x="4775951" y="1417320"/>
             <a:ext cx="0" cy="2756916"/>
           </a:xfrm>
           <a:prstGeom prst="line">
@@ -5049,7 +5049,7 @@
         </p:nvSpPr>
         <p:spPr>
           <a:xfrm flipV="1">
-            <a:off x="5129555" y="1417320"/>
+            <a:off x="5327334" y="1417320"/>
             <a:ext cx="0" cy="2756916"/>
           </a:xfrm>
           <a:prstGeom prst="line">
@@ -5072,7 +5072,7 @@
         </p:nvSpPr>
         <p:spPr>
           <a:xfrm>
-            <a:off x="718490" y="4174236"/>
+            <a:off x="916269" y="4174236"/>
             <a:ext cx="4411066" cy="0"/>
           </a:xfrm>
           <a:prstGeom prst="line">
@@ -5095,7 +5095,7 @@
         </p:nvSpPr>
         <p:spPr>
           <a:xfrm>
-            <a:off x="718490" y="3622853"/>
+            <a:off x="916269" y="3622853"/>
             <a:ext cx="4411066" cy="0"/>
           </a:xfrm>
           <a:prstGeom prst="line">
@@ -5118,7 +5118,7 @@
         </p:nvSpPr>
         <p:spPr>
           <a:xfrm>
-            <a:off x="718490" y="3071470"/>
+            <a:off x="916269" y="3071470"/>
             <a:ext cx="4411066" cy="0"/>
           </a:xfrm>
           <a:prstGeom prst="line">
@@ -5141,7 +5141,7 @@
         </p:nvSpPr>
         <p:spPr>
           <a:xfrm>
-            <a:off x="718490" y="2520086"/>
+            <a:off x="916269" y="2520086"/>
             <a:ext cx="4411066" cy="0"/>
           </a:xfrm>
           <a:prstGeom prst="line">
@@ -5164,7 +5164,7 @@
         </p:nvSpPr>
         <p:spPr>
           <a:xfrm>
-            <a:off x="718490" y="1968703"/>
+            <a:off x="916269" y="1968703"/>
             <a:ext cx="4411066" cy="0"/>
           </a:xfrm>
           <a:prstGeom prst="line">
@@ -5187,7 +5187,7 @@
         </p:nvSpPr>
         <p:spPr>
           <a:xfrm>
-            <a:off x="718490" y="1417320"/>
+            <a:off x="916269" y="1417320"/>
             <a:ext cx="4411066" cy="0"/>
           </a:xfrm>
           <a:prstGeom prst="line">
@@ -5210,8 +5210,8 @@
         </p:nvSpPr>
         <p:spPr>
           <a:xfrm flipV="1">
-            <a:off x="6177183" y="2327102"/>
-            <a:ext cx="0" cy="937351"/>
+            <a:off x="6238315" y="2388234"/>
+            <a:ext cx="0" cy="815088"/>
           </a:xfrm>
           <a:prstGeom prst="line">
             <a:avLst/>
@@ -5234,8 +5234,8 @@
         </p:nvSpPr>
         <p:spPr>
           <a:xfrm>
-            <a:off x="5708508" y="2795778"/>
-            <a:ext cx="937351" cy="0"/>
+            <a:off x="5830771" y="2795778"/>
+            <a:ext cx="815088" cy="0"/>
           </a:xfrm>
           <a:prstGeom prst="line">
             <a:avLst/>
@@ -5257,8 +5257,8 @@
         </p:nvSpPr>
         <p:spPr>
           <a:xfrm flipV="1">
-            <a:off x="7584313" y="1861735"/>
-            <a:ext cx="0" cy="357296"/>
+            <a:off x="7437933" y="2319191"/>
+            <a:ext cx="0" cy="310692"/>
           </a:xfrm>
           <a:prstGeom prst="line">
             <a:avLst/>
@@ -5280,7 +5280,7 @@
         </p:nvSpPr>
         <p:spPr>
           <a:xfrm>
-            <a:off x="5972967" y="1888480"/>
+            <a:off x="6034099" y="1981975"/>
             <a:ext cx="408432" cy="381000"/>
           </a:xfrm>
           <a:prstGeom prst="rect">
@@ -5319,7 +5319,7 @@
         </p:nvSpPr>
         <p:spPr>
           <a:xfrm>
-            <a:off x="5972967" y="3322076"/>
+            <a:off x="6034099" y="3228581"/>
             <a:ext cx="408432" cy="381000"/>
           </a:xfrm>
           <a:prstGeom prst="rect">
@@ -5358,7 +5358,7 @@
         </p:nvSpPr>
         <p:spPr>
           <a:xfrm>
-            <a:off x="6689766" y="2605278"/>
+            <a:off x="6657402" y="2605278"/>
             <a:ext cx="408432" cy="381000"/>
           </a:xfrm>
           <a:prstGeom prst="rect">
@@ -5397,7 +5397,7 @@
         </p:nvSpPr>
         <p:spPr>
           <a:xfrm>
-            <a:off x="5256169" y="2605278"/>
+            <a:off x="5410796" y="2605278"/>
             <a:ext cx="408432" cy="381000"/>
           </a:xfrm>
           <a:prstGeom prst="rect">
@@ -5436,7 +5436,7 @@
         </p:nvSpPr>
         <p:spPr>
           <a:xfrm>
-            <a:off x="9021638" y="1433589"/>
+            <a:off x="8881395" y="1922042"/>
             <a:ext cx="707136" cy="381000"/>
           </a:xfrm>
           <a:prstGeom prst="rect">
@@ -5475,7 +5475,7 @@
         </p:nvSpPr>
         <p:spPr>
           <a:xfrm>
-            <a:off x="8249702" y="1849883"/>
+            <a:off x="8138226" y="2284037"/>
             <a:ext cx="707136" cy="381000"/>
           </a:xfrm>
           <a:prstGeom prst="rect">
@@ -5514,7 +5514,7 @@
         </p:nvSpPr>
         <p:spPr>
           <a:xfrm>
-            <a:off x="10344958" y="1849883"/>
+            <a:off x="10151974" y="2284037"/>
             <a:ext cx="707136" cy="381000"/>
           </a:xfrm>
           <a:prstGeom prst="rect">
@@ -5553,7 +5553,7 @@
         </p:nvSpPr>
         <p:spPr>
           <a:xfrm>
-            <a:off x="8249702" y="2346128"/>
+            <a:off x="8138226" y="2715555"/>
             <a:ext cx="707136" cy="381000"/>
           </a:xfrm>
           <a:prstGeom prst="rect">
@@ -5592,7 +5592,7 @@
         </p:nvSpPr>
         <p:spPr>
           <a:xfrm>
-            <a:off x="10195606" y="2346128"/>
+            <a:off x="10002622" y="2715555"/>
             <a:ext cx="1005840" cy="381000"/>
           </a:xfrm>
           <a:prstGeom prst="rect">
@@ -5631,7 +5631,7 @@
         </p:nvSpPr>
         <p:spPr>
           <a:xfrm>
-            <a:off x="7950998" y="2842373"/>
+            <a:off x="7839522" y="3147072"/>
             <a:ext cx="1304544" cy="381000"/>
           </a:xfrm>
           <a:prstGeom prst="rect">
@@ -5670,7 +5670,7 @@
         </p:nvSpPr>
         <p:spPr>
           <a:xfrm>
-            <a:off x="10344958" y="2842373"/>
+            <a:off x="10151974" y="3147072"/>
             <a:ext cx="707136" cy="381000"/>
           </a:xfrm>
           <a:prstGeom prst="rect">
@@ -5972,7 +5972,7 @@
         </p:nvSpPr>
         <p:spPr>
           <a:xfrm>
-            <a:off x="548640" y="2092452"/>
+            <a:off x="548640" y="2237232"/>
             <a:ext cx="548640" cy="548640"/>
           </a:xfrm>
           <a:prstGeom prst="ellipse">
@@ -6017,8 +6017,8 @@
         </p:nvSpPr>
         <p:spPr>
           <a:xfrm>
-            <a:off x="1325880" y="2046732"/>
-            <a:ext cx="5122012" cy="929640"/>
+            <a:off x="1325880" y="2237232"/>
+            <a:ext cx="5122012" cy="548640"/>
           </a:xfrm>
           <a:prstGeom prst="rect">
             <a:avLst/>
@@ -6042,7 +6042,7 @@
                 <a:ea typeface="맑은 고딕" pitchFamily="34" charset="-122"/>
                 <a:cs typeface="맑은 고딕" pitchFamily="34" charset="-120"/>
               </a:rPr>
-              <a:t>방위표를 그려요(위쪽이 북쪽).</a:t>
+              <a:t>방위표부터 그려요.</a:t>
             </a:r>
             <a:endParaRPr lang="ko-KR" sz="3000" dirty="0"/>
           </a:p>
@@ -6056,7 +6056,7 @@
         </p:nvSpPr>
         <p:spPr>
           <a:xfrm>
-            <a:off x="548640" y="3186684"/>
+            <a:off x="548640" y="2996184"/>
             <a:ext cx="548640" cy="548640"/>
           </a:xfrm>
           <a:prstGeom prst="ellipse">
@@ -6101,7 +6101,7 @@
         </p:nvSpPr>
         <p:spPr>
           <a:xfrm>
-            <a:off x="1325880" y="3140964"/>
+            <a:off x="1325880" y="2950464"/>
             <a:ext cx="5122012" cy="929640"/>
           </a:xfrm>
           <a:prstGeom prst="rect">
@@ -6140,7 +6140,7 @@
         </p:nvSpPr>
         <p:spPr>
           <a:xfrm>
-            <a:off x="548640" y="4235196"/>
+            <a:off x="548640" y="4044696"/>
             <a:ext cx="548640" cy="548640"/>
           </a:xfrm>
           <a:prstGeom prst="ellipse">
@@ -6185,7 +6185,7 @@
         </p:nvSpPr>
         <p:spPr>
           <a:xfrm>
-            <a:off x="1325880" y="4235196"/>
+            <a:off x="1325880" y="4044696"/>
             <a:ext cx="5122012" cy="548640"/>
           </a:xfrm>
           <a:prstGeom prst="rect">
@@ -6224,7 +6224,7 @@
         </p:nvSpPr>
         <p:spPr>
           <a:xfrm>
-            <a:off x="548640" y="4948428"/>
+            <a:off x="548640" y="4757928"/>
             <a:ext cx="548640" cy="548640"/>
           </a:xfrm>
           <a:prstGeom prst="ellipse">
@@ -6269,7 +6269,7 @@
         </p:nvSpPr>
         <p:spPr>
           <a:xfrm>
-            <a:off x="1325880" y="4948428"/>
+            <a:off x="1325880" y="4757928"/>
             <a:ext cx="5122012" cy="548640"/>
           </a:xfrm>
           <a:prstGeom prst="rect">
@@ -9974,8 +9974,8 @@
         </p:nvSpPr>
         <p:spPr>
           <a:xfrm>
-            <a:off x="640080" y="3197891"/>
-            <a:ext cx="507386" cy="507386"/>
+            <a:off x="640080" y="3223260"/>
+            <a:ext cx="578497" cy="578497"/>
           </a:xfrm>
           <a:custGeom>
             <a:avLst/>
@@ -9984,15 +9984,15 @@
             <a:cxnLst/>
             <a:rect l="l" t="t" r="r" b="b"/>
             <a:pathLst>
-              <a:path w="507386" h="507386">
+              <a:path w="578497" h="578497">
                 <a:moveTo>
-                  <a:pt x="0" y="507386"/>
+                  <a:pt x="0" y="578497"/>
                 </a:moveTo>
                 <a:lnTo>
-                  <a:pt x="507386" y="507386"/>
-                </a:lnTo>
-                <a:lnTo>
-                  <a:pt x="507386" y="0"/>
+                  <a:pt x="578497" y="578497"/>
+                </a:lnTo>
+                <a:lnTo>
+                  <a:pt x="578497" y="0"/>
                 </a:lnTo>
                 <a:lnTo>
                   <a:pt x="0" y="0"/>
@@ -10015,8 +10015,8 @@
         </p:nvSpPr>
         <p:spPr>
           <a:xfrm>
-            <a:off x="1147466" y="3197891"/>
-            <a:ext cx="507386" cy="507386"/>
+            <a:off x="1218577" y="3223260"/>
+            <a:ext cx="578497" cy="578497"/>
           </a:xfrm>
           <a:custGeom>
             <a:avLst/>
@@ -10025,15 +10025,15 @@
             <a:cxnLst/>
             <a:rect l="l" t="t" r="r" b="b"/>
             <a:pathLst>
-              <a:path w="507386" h="507386">
+              <a:path w="578497" h="578497">
                 <a:moveTo>
-                  <a:pt x="0" y="507386"/>
+                  <a:pt x="0" y="578497"/>
                 </a:moveTo>
                 <a:lnTo>
-                  <a:pt x="507386" y="507386"/>
-                </a:lnTo>
-                <a:lnTo>
-                  <a:pt x="507386" y="0"/>
+                  <a:pt x="578497" y="578497"/>
+                </a:lnTo>
+                <a:lnTo>
+                  <a:pt x="578497" y="0"/>
                 </a:lnTo>
                 <a:lnTo>
                   <a:pt x="0" y="0"/>
@@ -10056,8 +10056,8 @@
         </p:nvSpPr>
         <p:spPr>
           <a:xfrm>
-            <a:off x="1654851" y="3197891"/>
-            <a:ext cx="507386" cy="507386"/>
+            <a:off x="1797073" y="3223260"/>
+            <a:ext cx="578497" cy="578497"/>
           </a:xfrm>
           <a:custGeom>
             <a:avLst/>
@@ -10066,15 +10066,15 @@
             <a:cxnLst/>
             <a:rect l="l" t="t" r="r" b="b"/>
             <a:pathLst>
-              <a:path w="507386" h="507386">
+              <a:path w="578497" h="578497">
                 <a:moveTo>
-                  <a:pt x="0" y="507386"/>
+                  <a:pt x="0" y="578497"/>
                 </a:moveTo>
                 <a:lnTo>
-                  <a:pt x="507386" y="507386"/>
-                </a:lnTo>
-                <a:lnTo>
-                  <a:pt x="507386" y="0"/>
+                  <a:pt x="578497" y="578497"/>
+                </a:lnTo>
+                <a:lnTo>
+                  <a:pt x="578497" y="0"/>
                 </a:lnTo>
                 <a:lnTo>
                   <a:pt x="0" y="0"/>
@@ -10097,8 +10097,8 @@
         </p:nvSpPr>
         <p:spPr>
           <a:xfrm>
-            <a:off x="2162237" y="3197891"/>
-            <a:ext cx="507386" cy="507386"/>
+            <a:off x="2375570" y="3223260"/>
+            <a:ext cx="578497" cy="578497"/>
           </a:xfrm>
           <a:custGeom>
             <a:avLst/>
@@ -10107,15 +10107,15 @@
             <a:cxnLst/>
             <a:rect l="l" t="t" r="r" b="b"/>
             <a:pathLst>
-              <a:path w="507386" h="507386">
+              <a:path w="578497" h="578497">
                 <a:moveTo>
-                  <a:pt x="0" y="507386"/>
+                  <a:pt x="0" y="578497"/>
                 </a:moveTo>
                 <a:lnTo>
-                  <a:pt x="507386" y="507386"/>
-                </a:lnTo>
-                <a:lnTo>
-                  <a:pt x="507386" y="0"/>
+                  <a:pt x="578497" y="578497"/>
+                </a:lnTo>
+                <a:lnTo>
+                  <a:pt x="578497" y="0"/>
                 </a:lnTo>
                 <a:lnTo>
                   <a:pt x="0" y="0"/>
@@ -10138,8 +10138,8 @@
         </p:nvSpPr>
         <p:spPr>
           <a:xfrm>
-            <a:off x="2669623" y="3197891"/>
-            <a:ext cx="507386" cy="507386"/>
+            <a:off x="2954066" y="3223260"/>
+            <a:ext cx="578497" cy="578497"/>
           </a:xfrm>
           <a:custGeom>
             <a:avLst/>
@@ -10148,15 +10148,15 @@
             <a:cxnLst/>
             <a:rect l="l" t="t" r="r" b="b"/>
             <a:pathLst>
-              <a:path w="507386" h="507386">
+              <a:path w="578497" h="578497">
                 <a:moveTo>
-                  <a:pt x="0" y="507386"/>
+                  <a:pt x="0" y="578497"/>
                 </a:moveTo>
                 <a:lnTo>
-                  <a:pt x="507386" y="507386"/>
-                </a:lnTo>
-                <a:lnTo>
-                  <a:pt x="507386" y="0"/>
+                  <a:pt x="578497" y="578497"/>
+                </a:lnTo>
+                <a:lnTo>
+                  <a:pt x="578497" y="0"/>
                 </a:lnTo>
                 <a:lnTo>
                   <a:pt x="0" y="0"/>
@@ -10179,8 +10179,8 @@
         </p:nvSpPr>
         <p:spPr>
           <a:xfrm>
-            <a:off x="3177008" y="3197891"/>
-            <a:ext cx="507386" cy="507386"/>
+            <a:off x="3532563" y="3223260"/>
+            <a:ext cx="578497" cy="578497"/>
           </a:xfrm>
           <a:custGeom>
             <a:avLst/>
@@ -10189,15 +10189,15 @@
             <a:cxnLst/>
             <a:rect l="l" t="t" r="r" b="b"/>
             <a:pathLst>
-              <a:path w="507386" h="507386">
+              <a:path w="578497" h="578497">
                 <a:moveTo>
-                  <a:pt x="0" y="507386"/>
+                  <a:pt x="0" y="578497"/>
                 </a:moveTo>
                 <a:lnTo>
-                  <a:pt x="507386" y="507386"/>
-                </a:lnTo>
-                <a:lnTo>
-                  <a:pt x="507386" y="0"/>
+                  <a:pt x="578497" y="578497"/>
+                </a:lnTo>
+                <a:lnTo>
+                  <a:pt x="578497" y="0"/>
                 </a:lnTo>
                 <a:lnTo>
                   <a:pt x="0" y="0"/>
@@ -10220,8 +10220,8 @@
         </p:nvSpPr>
         <p:spPr>
           <a:xfrm>
-            <a:off x="3684394" y="3197891"/>
-            <a:ext cx="507386" cy="507386"/>
+            <a:off x="4111059" y="3223260"/>
+            <a:ext cx="578497" cy="578497"/>
           </a:xfrm>
           <a:custGeom>
             <a:avLst/>
@@ -10230,15 +10230,15 @@
             <a:cxnLst/>
             <a:rect l="l" t="t" r="r" b="b"/>
             <a:pathLst>
-              <a:path w="507386" h="507386">
+              <a:path w="578497" h="578497">
                 <a:moveTo>
-                  <a:pt x="0" y="507386"/>
+                  <a:pt x="0" y="578497"/>
                 </a:moveTo>
                 <a:lnTo>
-                  <a:pt x="507386" y="507386"/>
-                </a:lnTo>
-                <a:lnTo>
-                  <a:pt x="507386" y="0"/>
+                  <a:pt x="578497" y="578497"/>
+                </a:lnTo>
+                <a:lnTo>
+                  <a:pt x="578497" y="0"/>
                 </a:lnTo>
                 <a:lnTo>
                   <a:pt x="0" y="0"/>
@@ -10261,8 +10261,8 @@
         </p:nvSpPr>
         <p:spPr>
           <a:xfrm>
-            <a:off x="4191780" y="3197891"/>
-            <a:ext cx="507386" cy="507386"/>
+            <a:off x="4689556" y="3223260"/>
+            <a:ext cx="578497" cy="578497"/>
           </a:xfrm>
           <a:custGeom>
             <a:avLst/>
@@ -10271,15 +10271,15 @@
             <a:cxnLst/>
             <a:rect l="l" t="t" r="r" b="b"/>
             <a:pathLst>
-              <a:path w="507386" h="507386">
+              <a:path w="578497" h="578497">
                 <a:moveTo>
-                  <a:pt x="0" y="507386"/>
+                  <a:pt x="0" y="578497"/>
                 </a:moveTo>
                 <a:lnTo>
-                  <a:pt x="507386" y="507386"/>
-                </a:lnTo>
-                <a:lnTo>
-                  <a:pt x="507386" y="0"/>
+                  <a:pt x="578497" y="578497"/>
+                </a:lnTo>
+                <a:lnTo>
+                  <a:pt x="578497" y="0"/>
                 </a:lnTo>
                 <a:lnTo>
                   <a:pt x="0" y="0"/>
@@ -10302,8 +10302,8 @@
         </p:nvSpPr>
         <p:spPr>
           <a:xfrm>
-            <a:off x="4699165" y="3197891"/>
-            <a:ext cx="507386" cy="507386"/>
+            <a:off x="5268052" y="3223260"/>
+            <a:ext cx="578497" cy="578497"/>
           </a:xfrm>
           <a:custGeom>
             <a:avLst/>
@@ -10312,15 +10312,15 @@
             <a:cxnLst/>
             <a:rect l="l" t="t" r="r" b="b"/>
             <a:pathLst>
-              <a:path w="507386" h="507386">
+              <a:path w="578497" h="578497">
                 <a:moveTo>
-                  <a:pt x="0" y="507386"/>
+                  <a:pt x="0" y="578497"/>
                 </a:moveTo>
                 <a:lnTo>
-                  <a:pt x="507386" y="507386"/>
-                </a:lnTo>
-                <a:lnTo>
-                  <a:pt x="507386" y="0"/>
+                  <a:pt x="578497" y="578497"/>
+                </a:lnTo>
+                <a:lnTo>
+                  <a:pt x="578497" y="0"/>
                 </a:lnTo>
                 <a:lnTo>
                   <a:pt x="0" y="0"/>
@@ -10343,8 +10343,8 @@
         </p:nvSpPr>
         <p:spPr>
           <a:xfrm>
-            <a:off x="5206551" y="3197891"/>
-            <a:ext cx="507386" cy="507386"/>
+            <a:off x="5846549" y="3223260"/>
+            <a:ext cx="578497" cy="578497"/>
           </a:xfrm>
           <a:custGeom>
             <a:avLst/>
@@ -10353,15 +10353,15 @@
             <a:cxnLst/>
             <a:rect l="l" t="t" r="r" b="b"/>
             <a:pathLst>
-              <a:path w="507386" h="507386">
+              <a:path w="578497" h="578497">
                 <a:moveTo>
-                  <a:pt x="0" y="507386"/>
+                  <a:pt x="0" y="578497"/>
                 </a:moveTo>
                 <a:lnTo>
-                  <a:pt x="507386" y="507386"/>
-                </a:lnTo>
-                <a:lnTo>
-                  <a:pt x="507386" y="0"/>
+                  <a:pt x="578497" y="578497"/>
+                </a:lnTo>
+                <a:lnTo>
+                  <a:pt x="578497" y="0"/>
                 </a:lnTo>
                 <a:lnTo>
                   <a:pt x="0" y="0"/>
@@ -10384,8 +10384,8 @@
         </p:nvSpPr>
         <p:spPr>
           <a:xfrm>
-            <a:off x="1218500" y="2781834"/>
-            <a:ext cx="182659" cy="314579"/>
+            <a:off x="1299566" y="2748893"/>
+            <a:ext cx="208259" cy="358668"/>
           </a:xfrm>
           <a:custGeom>
             <a:avLst/>
@@ -10394,15 +10394,15 @@
             <a:cxnLst/>
             <a:rect l="l" t="t" r="r" b="b"/>
             <a:pathLst>
-              <a:path w="182659" h="314579">
+              <a:path w="208259" h="358668">
                 <a:moveTo>
-                  <a:pt x="0" y="273988"/>
+                  <a:pt x="0" y="312388"/>
                 </a:moveTo>
                 <a:lnTo>
-                  <a:pt x="182659" y="314579"/>
-                </a:lnTo>
-                <a:lnTo>
-                  <a:pt x="182659" y="40591"/>
+                  <a:pt x="208259" y="358668"/>
+                </a:lnTo>
+                <a:lnTo>
+                  <a:pt x="208259" y="46280"/>
                 </a:lnTo>
                 <a:lnTo>
                   <a:pt x="0" y="0"/>
@@ -10430,8 +10430,8 @@
         </p:nvSpPr>
         <p:spPr>
           <a:xfrm>
-            <a:off x="1401159" y="2781834"/>
-            <a:ext cx="182659" cy="314579"/>
+            <a:off x="1507825" y="2748893"/>
+            <a:ext cx="208259" cy="358668"/>
           </a:xfrm>
           <a:custGeom>
             <a:avLst/>
@@ -10440,18 +10440,18 @@
             <a:cxnLst/>
             <a:rect l="l" t="t" r="r" b="b"/>
             <a:pathLst>
-              <a:path w="182659" h="314579">
+              <a:path w="208259" h="358668">
                 <a:moveTo>
-                  <a:pt x="182659" y="273988"/>
+                  <a:pt x="208259" y="312388"/>
                 </a:moveTo>
                 <a:lnTo>
-                  <a:pt x="0" y="314579"/>
-                </a:lnTo>
-                <a:lnTo>
-                  <a:pt x="0" y="40591"/>
-                </a:lnTo>
-                <a:lnTo>
-                  <a:pt x="182659" y="0"/>
+                  <a:pt x="0" y="358668"/>
+                </a:lnTo>
+                <a:lnTo>
+                  <a:pt x="0" y="46280"/>
+                </a:lnTo>
+                <a:lnTo>
+                  <a:pt x="208259" y="0"/>
                 </a:lnTo>
                 <a:close/>
               </a:path>
@@ -10476,8 +10476,8 @@
         </p:nvSpPr>
         <p:spPr>
           <a:xfrm>
-            <a:off x="2811691" y="2761539"/>
-            <a:ext cx="273988" cy="162363"/>
+            <a:off x="3116045" y="2725753"/>
+            <a:ext cx="312388" cy="185119"/>
           </a:xfrm>
           <a:custGeom>
             <a:avLst/>
@@ -10486,15 +10486,15 @@
             <a:cxnLst/>
             <a:rect l="l" t="t" r="r" b="b"/>
             <a:pathLst>
-              <a:path w="273988" h="162363">
+              <a:path w="312388" h="185119">
                 <a:moveTo>
                   <a:pt x="0" y="0"/>
                 </a:moveTo>
                 <a:lnTo>
-                  <a:pt x="273988" y="81182"/>
-                </a:lnTo>
-                <a:lnTo>
-                  <a:pt x="0" y="162363"/>
+                  <a:pt x="312388" y="92559"/>
+                </a:lnTo>
+                <a:lnTo>
+                  <a:pt x="0" y="185119"/>
                 </a:lnTo>
                 <a:close/>
               </a:path>
@@ -10519,8 +10519,8 @@
         </p:nvSpPr>
         <p:spPr>
           <a:xfrm>
-            <a:off x="2887799" y="2497698"/>
-            <a:ext cx="71034" cy="131920"/>
+            <a:off x="3202820" y="2424935"/>
+            <a:ext cx="80990" cy="150409"/>
           </a:xfrm>
           <a:custGeom>
             <a:avLst/>
@@ -10529,15 +10529,15 @@
             <a:cxnLst/>
             <a:rect l="l" t="t" r="r" b="b"/>
             <a:pathLst>
-              <a:path w="71034" h="131920">
+              <a:path w="80990" h="150409">
                 <a:moveTo>
-                  <a:pt x="0" y="131920"/>
+                  <a:pt x="0" y="150409"/>
                 </a:moveTo>
                 <a:lnTo>
-                  <a:pt x="71034" y="131920"/>
-                </a:lnTo>
-                <a:lnTo>
-                  <a:pt x="71034" y="0"/>
+                  <a:pt x="80990" y="150409"/>
+                </a:lnTo>
+                <a:lnTo>
+                  <a:pt x="80990" y="0"/>
                 </a:lnTo>
                 <a:lnTo>
                   <a:pt x="0" y="0"/>
@@ -10565,8 +10565,8 @@
         </p:nvSpPr>
         <p:spPr>
           <a:xfrm>
-            <a:off x="2760952" y="2233858"/>
-            <a:ext cx="324727" cy="263841"/>
+            <a:off x="3058196" y="2124117"/>
+            <a:ext cx="370238" cy="300818"/>
           </a:xfrm>
           <a:custGeom>
             <a:avLst/>
@@ -10575,15 +10575,15 @@
             <a:cxnLst/>
             <a:rect l="l" t="t" r="r" b="b"/>
             <a:pathLst>
-              <a:path w="324727" h="263841">
+              <a:path w="370238" h="300818">
                 <a:moveTo>
-                  <a:pt x="0" y="263841"/>
+                  <a:pt x="0" y="300818"/>
                 </a:moveTo>
                 <a:lnTo>
-                  <a:pt x="324727" y="263841"/>
-                </a:lnTo>
-                <a:lnTo>
-                  <a:pt x="162363" y="0"/>
+                  <a:pt x="370238" y="300818"/>
+                </a:lnTo>
+                <a:lnTo>
+                  <a:pt x="185119" y="0"/>
                 </a:lnTo>
                 <a:close/>
               </a:path>
@@ -10608,8 +10608,8 @@
         </p:nvSpPr>
         <p:spPr>
           <a:xfrm>
-            <a:off x="2329674" y="3786458"/>
-            <a:ext cx="172511" cy="131920"/>
+            <a:off x="2566473" y="3894316"/>
+            <a:ext cx="196689" cy="150409"/>
           </a:xfrm>
           <a:custGeom>
             <a:avLst/>
@@ -10618,27 +10618,27 @@
             <a:cxnLst/>
             <a:rect l="l" t="t" r="r" b="b"/>
             <a:pathLst>
-              <a:path w="172511" h="131920">
+              <a:path w="196689" h="150409">
                 <a:moveTo>
-                  <a:pt x="172511" y="131920"/>
+                  <a:pt x="196689" y="150409"/>
                 </a:moveTo>
                 <a:lnTo>
-                  <a:pt x="160841" y="65960"/>
-                </a:lnTo>
-                <a:lnTo>
-                  <a:pt x="129383" y="17758"/>
-                </a:lnTo>
-                <a:lnTo>
-                  <a:pt x="86256" y="0"/>
-                </a:lnTo>
-                <a:lnTo>
-                  <a:pt x="43128" y="17758"/>
-                </a:lnTo>
-                <a:lnTo>
-                  <a:pt x="11670" y="65960"/>
-                </a:lnTo>
-                <a:lnTo>
-                  <a:pt x="0" y="131920"/>
+                  <a:pt x="183466" y="75205"/>
+                </a:lnTo>
+                <a:lnTo>
+                  <a:pt x="147517" y="20247"/>
+                </a:lnTo>
+                <a:lnTo>
+                  <a:pt x="98344" y="0"/>
+                </a:lnTo>
+                <a:lnTo>
+                  <a:pt x="49172" y="20247"/>
+                </a:lnTo>
+                <a:lnTo>
+                  <a:pt x="13223" y="75205"/>
+                </a:lnTo>
+                <a:lnTo>
+                  <a:pt x="0" y="150409"/>
                 </a:lnTo>
               </a:path>
             </a:pathLst>
@@ -10660,8 +10660,8 @@
         </p:nvSpPr>
         <p:spPr>
           <a:xfrm>
-            <a:off x="2248493" y="3918378"/>
-            <a:ext cx="334875" cy="223250"/>
+            <a:off x="2473914" y="4044725"/>
+            <a:ext cx="381808" cy="254538"/>
           </a:xfrm>
           <a:custGeom>
             <a:avLst/>
@@ -10670,18 +10670,18 @@
             <a:cxnLst/>
             <a:rect l="l" t="t" r="r" b="b"/>
             <a:pathLst>
-              <a:path w="334875" h="223250">
+              <a:path w="381808" h="254538">
                 <a:moveTo>
                   <a:pt x="0" y="0"/>
                 </a:moveTo>
                 <a:lnTo>
-                  <a:pt x="334875" y="0"/>
-                </a:lnTo>
-                <a:lnTo>
-                  <a:pt x="294284" y="223250"/>
-                </a:lnTo>
-                <a:lnTo>
-                  <a:pt x="40591" y="223250"/>
+                  <a:pt x="381808" y="0"/>
+                </a:lnTo>
+                <a:lnTo>
+                  <a:pt x="335528" y="254538"/>
+                </a:lnTo>
+                <a:lnTo>
+                  <a:pt x="46280" y="254538"/>
                 </a:lnTo>
                 <a:close/>
               </a:path>
@@ -10706,8 +10706,8 @@
         </p:nvSpPr>
         <p:spPr>
           <a:xfrm>
-            <a:off x="2771100" y="3766163"/>
-            <a:ext cx="304431" cy="375465"/>
+            <a:off x="3069765" y="3871176"/>
+            <a:ext cx="347098" cy="428087"/>
           </a:xfrm>
           <a:custGeom>
             <a:avLst/>
@@ -10716,21 +10716,21 @@
             <a:cxnLst/>
             <a:rect l="l" t="t" r="r" b="b"/>
             <a:pathLst>
-              <a:path w="304431" h="375465">
+              <a:path w="347098" h="428087">
                 <a:moveTo>
-                  <a:pt x="0" y="375465"/>
+                  <a:pt x="0" y="428087"/>
                 </a:moveTo>
                 <a:lnTo>
-                  <a:pt x="304431" y="375465"/>
-                </a:lnTo>
-                <a:lnTo>
-                  <a:pt x="304431" y="172511"/>
-                </a:lnTo>
-                <a:lnTo>
-                  <a:pt x="152216" y="0"/>
-                </a:lnTo>
-                <a:lnTo>
-                  <a:pt x="0" y="172511"/>
+                  <a:pt x="347098" y="428087"/>
+                </a:lnTo>
+                <a:lnTo>
+                  <a:pt x="347098" y="196689"/>
+                </a:lnTo>
+                <a:lnTo>
+                  <a:pt x="173549" y="0"/>
+                </a:lnTo>
+                <a:lnTo>
+                  <a:pt x="0" y="196689"/>
                 </a:lnTo>
                 <a:close/>
               </a:path>
@@ -10755,8 +10755,8 @@
         </p:nvSpPr>
         <p:spPr>
           <a:xfrm>
-            <a:off x="4785421" y="3791532"/>
-            <a:ext cx="334875" cy="334875"/>
+            <a:off x="5366397" y="3900101"/>
+            <a:ext cx="381808" cy="381808"/>
           </a:xfrm>
           <a:custGeom>
             <a:avLst/>
@@ -10765,42 +10765,42 @@
             <a:cxnLst/>
             <a:rect l="l" t="t" r="r" b="b"/>
             <a:pathLst>
-              <a:path w="334875" h="334875">
+              <a:path w="381808" h="381808">
                 <a:moveTo>
-                  <a:pt x="116699" y="334875"/>
+                  <a:pt x="133054" y="381808"/>
                 </a:moveTo>
                 <a:lnTo>
-                  <a:pt x="218176" y="334875"/>
-                </a:lnTo>
-                <a:lnTo>
-                  <a:pt x="218176" y="218176"/>
-                </a:lnTo>
-                <a:lnTo>
-                  <a:pt x="334875" y="218176"/>
-                </a:lnTo>
-                <a:lnTo>
-                  <a:pt x="334875" y="116699"/>
-                </a:lnTo>
-                <a:lnTo>
-                  <a:pt x="218176" y="116699"/>
-                </a:lnTo>
-                <a:lnTo>
-                  <a:pt x="218176" y="0"/>
-                </a:lnTo>
-                <a:lnTo>
-                  <a:pt x="116699" y="0"/>
-                </a:lnTo>
-                <a:lnTo>
-                  <a:pt x="116699" y="116699"/>
-                </a:lnTo>
-                <a:lnTo>
-                  <a:pt x="0" y="116699"/>
-                </a:lnTo>
-                <a:lnTo>
-                  <a:pt x="0" y="218176"/>
-                </a:lnTo>
-                <a:lnTo>
-                  <a:pt x="116699" y="218176"/>
+                  <a:pt x="248754" y="381808"/>
+                </a:lnTo>
+                <a:lnTo>
+                  <a:pt x="248754" y="248754"/>
+                </a:lnTo>
+                <a:lnTo>
+                  <a:pt x="381808" y="248754"/>
+                </a:lnTo>
+                <a:lnTo>
+                  <a:pt x="381808" y="133054"/>
+                </a:lnTo>
+                <a:lnTo>
+                  <a:pt x="248754" y="133054"/>
+                </a:lnTo>
+                <a:lnTo>
+                  <a:pt x="248754" y="0"/>
+                </a:lnTo>
+                <a:lnTo>
+                  <a:pt x="133054" y="0"/>
+                </a:lnTo>
+                <a:lnTo>
+                  <a:pt x="133054" y="133054"/>
+                </a:lnTo>
+                <a:lnTo>
+                  <a:pt x="0" y="133054"/>
+                </a:lnTo>
+                <a:lnTo>
+                  <a:pt x="0" y="248754"/>
+                </a:lnTo>
+                <a:lnTo>
+                  <a:pt x="133054" y="248754"/>
                 </a:lnTo>
                 <a:close/>
               </a:path>
@@ -10825,8 +10825,8 @@
         </p:nvSpPr>
         <p:spPr>
           <a:xfrm>
-            <a:off x="640080" y="2183119"/>
-            <a:ext cx="5073857" cy="2029543"/>
+            <a:off x="640080" y="2066267"/>
+            <a:ext cx="5784965" cy="2313986"/>
           </a:xfrm>
           <a:custGeom>
             <a:avLst/>
@@ -10835,15 +10835,15 @@
             <a:cxnLst/>
             <a:rect l="l" t="t" r="r" b="b"/>
             <a:pathLst>
-              <a:path w="5073857" h="2029543">
+              <a:path w="5784965" h="2313986">
                 <a:moveTo>
-                  <a:pt x="0" y="2029543"/>
+                  <a:pt x="0" y="2313986"/>
                 </a:moveTo>
                 <a:lnTo>
-                  <a:pt x="5073857" y="2029543"/>
-                </a:lnTo>
-                <a:lnTo>
-                  <a:pt x="5073857" y="0"/>
+                  <a:pt x="5784965" y="2313986"/>
+                </a:lnTo>
+                <a:lnTo>
+                  <a:pt x="5784965" y="0"/>
                 </a:lnTo>
                 <a:lnTo>
                   <a:pt x="0" y="0"/>
@@ -10869,8 +10869,8 @@
         </p:nvSpPr>
         <p:spPr>
           <a:xfrm>
-            <a:off x="7692741" y="2081642"/>
-            <a:ext cx="3856131" cy="2283236"/>
+            <a:off x="8036572" y="2293533"/>
+            <a:ext cx="3512300" cy="1859453"/>
           </a:xfrm>
           <a:custGeom>
             <a:avLst/>
@@ -10879,15 +10879,15 @@
             <a:cxnLst/>
             <a:rect l="l" t="t" r="r" b="b"/>
             <a:pathLst>
-              <a:path w="3856131" h="2283236">
+              <a:path w="3512300" h="1859453">
                 <a:moveTo>
-                  <a:pt x="0" y="2283236"/>
+                  <a:pt x="0" y="1859453"/>
                 </a:moveTo>
                 <a:lnTo>
-                  <a:pt x="3856131" y="2283236"/>
-                </a:lnTo>
-                <a:lnTo>
-                  <a:pt x="3856131" y="0"/>
+                  <a:pt x="3512300" y="1859453"/>
+                </a:lnTo>
+                <a:lnTo>
+                  <a:pt x="3512300" y="0"/>
                 </a:lnTo>
                 <a:lnTo>
                   <a:pt x="0" y="0"/>
@@ -10915,8 +10915,8 @@
         </p:nvSpPr>
         <p:spPr>
           <a:xfrm>
-            <a:off x="7692741" y="2081642"/>
-            <a:ext cx="3856131" cy="380539"/>
+            <a:off x="8036572" y="2293533"/>
+            <a:ext cx="3512300" cy="309909"/>
           </a:xfrm>
           <a:custGeom>
             <a:avLst/>
@@ -10925,15 +10925,15 @@
             <a:cxnLst/>
             <a:rect l="l" t="t" r="r" b="b"/>
             <a:pathLst>
-              <a:path w="3856131" h="380539">
+              <a:path w="3512300" h="309909">
                 <a:moveTo>
-                  <a:pt x="0" y="380539"/>
+                  <a:pt x="0" y="309909"/>
                 </a:moveTo>
                 <a:lnTo>
-                  <a:pt x="3856131" y="380539"/>
-                </a:lnTo>
-                <a:lnTo>
-                  <a:pt x="3856131" y="0"/>
+                  <a:pt x="3512300" y="309909"/>
+                </a:lnTo>
+                <a:lnTo>
+                  <a:pt x="3512300" y="0"/>
                 </a:lnTo>
                 <a:lnTo>
                   <a:pt x="0" y="0"/>
@@ -10961,8 +10961,8 @@
         </p:nvSpPr>
         <p:spPr>
           <a:xfrm>
-            <a:off x="7972818" y="2490595"/>
-            <a:ext cx="246589" cy="146127"/>
+            <a:off x="8244004" y="2626582"/>
+            <a:ext cx="200821" cy="119005"/>
           </a:xfrm>
           <a:custGeom>
             <a:avLst/>
@@ -10971,15 +10971,15 @@
             <a:cxnLst/>
             <a:rect l="l" t="t" r="r" b="b"/>
             <a:pathLst>
-              <a:path w="246589" h="146127">
+              <a:path w="200821" h="119005">
                 <a:moveTo>
                   <a:pt x="0" y="0"/>
                 </a:moveTo>
                 <a:lnTo>
-                  <a:pt x="246589" y="73064"/>
-                </a:lnTo>
-                <a:lnTo>
-                  <a:pt x="0" y="146127"/>
+                  <a:pt x="200821" y="59503"/>
+                </a:lnTo>
+                <a:lnTo>
+                  <a:pt x="0" y="119005"/>
                 </a:lnTo>
                 <a:close/>
               </a:path>
@@ -11004,8 +11004,8 @@
         </p:nvSpPr>
         <p:spPr>
           <a:xfrm>
-            <a:off x="9850652" y="2504294"/>
-            <a:ext cx="301387" cy="301387"/>
+            <a:off x="9938586" y="2637739"/>
+            <a:ext cx="245448" cy="245448"/>
           </a:xfrm>
           <a:custGeom>
             <a:avLst/>
@@ -11014,42 +11014,42 @@
             <a:cxnLst/>
             <a:rect l="l" t="t" r="r" b="b"/>
             <a:pathLst>
-              <a:path w="301387" h="301387">
+              <a:path w="245448" h="245448">
                 <a:moveTo>
-                  <a:pt x="105029" y="301387"/>
+                  <a:pt x="85535" y="245448"/>
                 </a:moveTo>
                 <a:lnTo>
-                  <a:pt x="196358" y="301387"/>
-                </a:lnTo>
-                <a:lnTo>
-                  <a:pt x="196358" y="196358"/>
-                </a:lnTo>
-                <a:lnTo>
-                  <a:pt x="301387" y="196358"/>
-                </a:lnTo>
-                <a:lnTo>
-                  <a:pt x="301387" y="105029"/>
-                </a:lnTo>
-                <a:lnTo>
-                  <a:pt x="196358" y="105029"/>
-                </a:lnTo>
-                <a:lnTo>
-                  <a:pt x="196358" y="0"/>
-                </a:lnTo>
-                <a:lnTo>
-                  <a:pt x="105029" y="0"/>
-                </a:lnTo>
-                <a:lnTo>
-                  <a:pt x="105029" y="105029"/>
-                </a:lnTo>
-                <a:lnTo>
-                  <a:pt x="0" y="105029"/>
-                </a:lnTo>
-                <a:lnTo>
-                  <a:pt x="0" y="196358"/>
-                </a:lnTo>
-                <a:lnTo>
-                  <a:pt x="105029" y="196358"/>
+                  <a:pt x="159913" y="245448"/>
+                </a:lnTo>
+                <a:lnTo>
+                  <a:pt x="159913" y="159913"/>
+                </a:lnTo>
+                <a:lnTo>
+                  <a:pt x="245448" y="159913"/>
+                </a:lnTo>
+                <a:lnTo>
+                  <a:pt x="245448" y="85535"/>
+                </a:lnTo>
+                <a:lnTo>
+                  <a:pt x="159913" y="85535"/>
+                </a:lnTo>
+                <a:lnTo>
+                  <a:pt x="159913" y="0"/>
+                </a:lnTo>
+                <a:lnTo>
+                  <a:pt x="85535" y="0"/>
+                </a:lnTo>
+                <a:lnTo>
+                  <a:pt x="85535" y="85535"/>
+                </a:lnTo>
+                <a:lnTo>
+                  <a:pt x="0" y="85535"/>
+                </a:lnTo>
+                <a:lnTo>
+                  <a:pt x="0" y="159913"/>
+                </a:lnTo>
+                <a:lnTo>
+                  <a:pt x="85535" y="159913"/>
                 </a:lnTo>
                 <a:close/>
               </a:path>
@@ -11074,8 +11074,8 @@
         </p:nvSpPr>
         <p:spPr>
           <a:xfrm>
-            <a:off x="8041315" y="3166433"/>
-            <a:ext cx="63931" cy="118728"/>
+            <a:off x="8299787" y="3176980"/>
+            <a:ext cx="52065" cy="96692"/>
           </a:xfrm>
           <a:custGeom>
             <a:avLst/>
@@ -11084,15 +11084,15 @@
             <a:cxnLst/>
             <a:rect l="l" t="t" r="r" b="b"/>
             <a:pathLst>
-              <a:path w="63931" h="118728">
+              <a:path w="52065" h="96692">
                 <a:moveTo>
-                  <a:pt x="0" y="118728"/>
+                  <a:pt x="0" y="96692"/>
                 </a:moveTo>
                 <a:lnTo>
-                  <a:pt x="63931" y="118728"/>
-                </a:lnTo>
-                <a:lnTo>
-                  <a:pt x="63931" y="0"/>
+                  <a:pt x="52065" y="96692"/>
+                </a:lnTo>
+                <a:lnTo>
+                  <a:pt x="52065" y="0"/>
                 </a:lnTo>
                 <a:lnTo>
                   <a:pt x="0" y="0"/>
@@ -11120,8 +11120,8 @@
         </p:nvSpPr>
         <p:spPr>
           <a:xfrm>
-            <a:off x="7927153" y="2928976"/>
-            <a:ext cx="292254" cy="237456"/>
+            <a:off x="8206815" y="2983597"/>
+            <a:ext cx="238010" cy="193383"/>
           </a:xfrm>
           <a:custGeom>
             <a:avLst/>
@@ -11130,15 +11130,15 @@
             <a:cxnLst/>
             <a:rect l="l" t="t" r="r" b="b"/>
             <a:pathLst>
-              <a:path w="292254" h="237456">
+              <a:path w="238010" h="193383">
                 <a:moveTo>
-                  <a:pt x="0" y="237456"/>
+                  <a:pt x="0" y="193383"/>
                 </a:moveTo>
                 <a:lnTo>
-                  <a:pt x="292254" y="237456"/>
-                </a:lnTo>
-                <a:lnTo>
-                  <a:pt x="146127" y="0"/>
+                  <a:pt x="238010" y="193383"/>
+                </a:lnTo>
+                <a:lnTo>
+                  <a:pt x="119005" y="0"/>
                 </a:lnTo>
                 <a:close/>
               </a:path>
@@ -11163,8 +11163,8 @@
         </p:nvSpPr>
         <p:spPr>
           <a:xfrm>
-            <a:off x="9836953" y="2965508"/>
-            <a:ext cx="164393" cy="283121"/>
+            <a:off x="9927429" y="3013348"/>
+            <a:ext cx="133881" cy="230572"/>
           </a:xfrm>
           <a:custGeom>
             <a:avLst/>
@@ -11173,15 +11173,15 @@
             <a:cxnLst/>
             <a:rect l="l" t="t" r="r" b="b"/>
             <a:pathLst>
-              <a:path w="164393" h="283121">
+              <a:path w="133881" h="230572">
                 <a:moveTo>
-                  <a:pt x="0" y="246589"/>
+                  <a:pt x="0" y="200821"/>
                 </a:moveTo>
                 <a:lnTo>
-                  <a:pt x="164393" y="283121"/>
-                </a:lnTo>
-                <a:lnTo>
-                  <a:pt x="164393" y="36532"/>
+                  <a:pt x="133881" y="230572"/>
+                </a:lnTo>
+                <a:lnTo>
+                  <a:pt x="133881" y="29751"/>
                 </a:lnTo>
                 <a:lnTo>
                   <a:pt x="0" y="0"/>
@@ -11209,8 +11209,8 @@
         </p:nvSpPr>
         <p:spPr>
           <a:xfrm>
-            <a:off x="10001346" y="2965508"/>
-            <a:ext cx="164393" cy="283121"/>
+            <a:off x="10061309" y="3013348"/>
+            <a:ext cx="133881" cy="230572"/>
           </a:xfrm>
           <a:custGeom>
             <a:avLst/>
@@ -11219,18 +11219,18 @@
             <a:cxnLst/>
             <a:rect l="l" t="t" r="r" b="b"/>
             <a:pathLst>
-              <a:path w="164393" h="283121">
+              <a:path w="133881" h="230572">
                 <a:moveTo>
-                  <a:pt x="164393" y="246589"/>
+                  <a:pt x="133881" y="200821"/>
                 </a:moveTo>
                 <a:lnTo>
-                  <a:pt x="0" y="283121"/>
-                </a:lnTo>
-                <a:lnTo>
-                  <a:pt x="0" y="36532"/>
-                </a:lnTo>
-                <a:lnTo>
-                  <a:pt x="164393" y="0"/>
+                  <a:pt x="0" y="230572"/>
+                </a:lnTo>
+                <a:lnTo>
+                  <a:pt x="0" y="29751"/>
+                </a:lnTo>
+                <a:lnTo>
+                  <a:pt x="133881" y="0"/>
                 </a:lnTo>
                 <a:close/>
               </a:path>
@@ -11255,8 +11255,8 @@
         </p:nvSpPr>
         <p:spPr>
           <a:xfrm>
-            <a:off x="9923716" y="3413022"/>
-            <a:ext cx="155260" cy="118728"/>
+            <a:off x="9998088" y="3377801"/>
+            <a:ext cx="126443" cy="96692"/>
           </a:xfrm>
           <a:custGeom>
             <a:avLst/>
@@ -11265,27 +11265,27 @@
             <a:cxnLst/>
             <a:rect l="l" t="t" r="r" b="b"/>
             <a:pathLst>
-              <a:path w="155260" h="118728">
+              <a:path w="126443" h="96692">
                 <a:moveTo>
-                  <a:pt x="155260" y="118728"/>
+                  <a:pt x="126443" y="96692"/>
                 </a:moveTo>
                 <a:lnTo>
-                  <a:pt x="145112" y="59364"/>
-                </a:lnTo>
-                <a:lnTo>
-                  <a:pt x="116191" y="15729"/>
-                </a:lnTo>
-                <a:lnTo>
-                  <a:pt x="77630" y="0"/>
-                </a:lnTo>
-                <a:lnTo>
-                  <a:pt x="38561" y="15729"/>
-                </a:lnTo>
-                <a:lnTo>
-                  <a:pt x="10148" y="59364"/>
-                </a:lnTo>
-                <a:lnTo>
-                  <a:pt x="0" y="118728"/>
+                  <a:pt x="118179" y="48346"/>
+                </a:lnTo>
+                <a:lnTo>
+                  <a:pt x="94626" y="12810"/>
+                </a:lnTo>
+                <a:lnTo>
+                  <a:pt x="63221" y="0"/>
+                </a:lnTo>
+                <a:lnTo>
+                  <a:pt x="31404" y="12810"/>
+                </a:lnTo>
+                <a:lnTo>
+                  <a:pt x="8264" y="48346"/>
+                </a:lnTo>
+                <a:lnTo>
+                  <a:pt x="0" y="96692"/>
                 </a:lnTo>
               </a:path>
             </a:pathLst>
@@ -11307,8 +11307,8 @@
         </p:nvSpPr>
         <p:spPr>
           <a:xfrm>
-            <a:off x="9850652" y="3531750"/>
-            <a:ext cx="301387" cy="200925"/>
+            <a:off x="9938586" y="3474493"/>
+            <a:ext cx="245448" cy="163632"/>
           </a:xfrm>
           <a:custGeom>
             <a:avLst/>
@@ -11317,18 +11317,18 @@
             <a:cxnLst/>
             <a:rect l="l" t="t" r="r" b="b"/>
             <a:pathLst>
-              <a:path w="301387" h="200925">
+              <a:path w="245448" h="163632">
                 <a:moveTo>
                   <a:pt x="0" y="0"/>
                 </a:moveTo>
                 <a:lnTo>
-                  <a:pt x="301387" y="0"/>
-                </a:lnTo>
-                <a:lnTo>
-                  <a:pt x="264855" y="200925"/>
-                </a:lnTo>
-                <a:lnTo>
-                  <a:pt x="36532" y="200925"/>
+                  <a:pt x="245448" y="0"/>
+                </a:lnTo>
+                <a:lnTo>
+                  <a:pt x="215697" y="163632"/>
+                </a:lnTo>
+                <a:lnTo>
+                  <a:pt x="29751" y="163632"/>
                 </a:lnTo>
                 <a:close/>
               </a:path>
@@ -11353,8 +11353,8 @@
         </p:nvSpPr>
         <p:spPr>
           <a:xfrm>
-            <a:off x="7936286" y="3851403"/>
-            <a:ext cx="273988" cy="337919"/>
+            <a:off x="8214253" y="3734816"/>
+            <a:ext cx="223134" cy="275199"/>
           </a:xfrm>
           <a:custGeom>
             <a:avLst/>
@@ -11363,21 +11363,21 @@
             <a:cxnLst/>
             <a:rect l="l" t="t" r="r" b="b"/>
             <a:pathLst>
-              <a:path w="273988" h="337919">
+              <a:path w="223134" h="275199">
                 <a:moveTo>
-                  <a:pt x="0" y="337919"/>
+                  <a:pt x="0" y="275199"/>
                 </a:moveTo>
                 <a:lnTo>
-                  <a:pt x="273988" y="337919"/>
-                </a:lnTo>
-                <a:lnTo>
-                  <a:pt x="273988" y="155260"/>
-                </a:lnTo>
-                <a:lnTo>
-                  <a:pt x="136994" y="0"/>
-                </a:lnTo>
-                <a:lnTo>
-                  <a:pt x="0" y="155260"/>
+                  <a:pt x="223134" y="275199"/>
+                </a:lnTo>
+                <a:lnTo>
+                  <a:pt x="223134" y="126443"/>
+                </a:lnTo>
+                <a:lnTo>
+                  <a:pt x="111567" y="0"/>
+                </a:lnTo>
+                <a:lnTo>
+                  <a:pt x="0" y="126443"/>
                 </a:lnTo>
                 <a:close/>
               </a:path>
@@ -11402,8 +11402,8 @@
         </p:nvSpPr>
         <p:spPr>
           <a:xfrm>
-            <a:off x="4785421" y="2776761"/>
-            <a:ext cx="334875" cy="334875"/>
+            <a:off x="5366397" y="2743108"/>
+            <a:ext cx="381808" cy="381808"/>
           </a:xfrm>
           <a:prstGeom prst="ellipse">
             <a:avLst/>
@@ -11427,8 +11427,8 @@
         </p:nvSpPr>
         <p:spPr>
           <a:xfrm>
-            <a:off x="4881824" y="2873164"/>
-            <a:ext cx="142068" cy="142068"/>
+            <a:off x="5476311" y="2853022"/>
+            <a:ext cx="161979" cy="161979"/>
           </a:xfrm>
           <a:prstGeom prst="ellipse">
             <a:avLst/>
@@ -11452,8 +11452,8 @@
         </p:nvSpPr>
         <p:spPr>
           <a:xfrm>
-            <a:off x="7922587" y="3417589"/>
-            <a:ext cx="301387" cy="301387"/>
+            <a:off x="8203096" y="3381520"/>
+            <a:ext cx="245448" cy="245448"/>
           </a:xfrm>
           <a:prstGeom prst="ellipse">
             <a:avLst/>
@@ -11477,8 +11477,8 @@
         </p:nvSpPr>
         <p:spPr>
           <a:xfrm>
-            <a:off x="8009350" y="3504352"/>
-            <a:ext cx="127861" cy="127861"/>
+            <a:off x="8273755" y="3452179"/>
+            <a:ext cx="104129" cy="104129"/>
           </a:xfrm>
           <a:prstGeom prst="ellipse">
             <a:avLst/>
@@ -11502,8 +11502,8 @@
         </p:nvSpPr>
         <p:spPr>
           <a:xfrm flipV="1">
-            <a:off x="2811691" y="2761539"/>
-            <a:ext cx="0" cy="365318"/>
+            <a:off x="3116045" y="2725753"/>
+            <a:ext cx="0" cy="416518"/>
           </a:xfrm>
           <a:prstGeom prst="line">
             <a:avLst/>
@@ -11525,8 +11525,8 @@
         </p:nvSpPr>
         <p:spPr>
           <a:xfrm flipV="1">
-            <a:off x="640080" y="2183119"/>
-            <a:ext cx="0" cy="2029543"/>
+            <a:off x="640080" y="2066267"/>
+            <a:ext cx="0" cy="2313986"/>
           </a:xfrm>
           <a:prstGeom prst="line">
             <a:avLst/>
@@ -11548,8 +11548,8 @@
         </p:nvSpPr>
         <p:spPr>
           <a:xfrm flipV="1">
-            <a:off x="1147466" y="2183119"/>
-            <a:ext cx="0" cy="2029543"/>
+            <a:off x="1218577" y="2066267"/>
+            <a:ext cx="0" cy="2313986"/>
           </a:xfrm>
           <a:prstGeom prst="line">
             <a:avLst/>
@@ -11571,8 +11571,8 @@
         </p:nvSpPr>
         <p:spPr>
           <a:xfrm flipV="1">
-            <a:off x="1654851" y="2183119"/>
-            <a:ext cx="0" cy="2029543"/>
+            <a:off x="1797073" y="2066267"/>
+            <a:ext cx="0" cy="2313986"/>
           </a:xfrm>
           <a:prstGeom prst="line">
             <a:avLst/>
@@ -11594,8 +11594,8 @@
         </p:nvSpPr>
         <p:spPr>
           <a:xfrm flipV="1">
-            <a:off x="2162237" y="2183119"/>
-            <a:ext cx="0" cy="2029543"/>
+            <a:off x="2375570" y="2066267"/>
+            <a:ext cx="0" cy="2313986"/>
           </a:xfrm>
           <a:prstGeom prst="line">
             <a:avLst/>
@@ -11617,8 +11617,8 @@
         </p:nvSpPr>
         <p:spPr>
           <a:xfrm flipV="1">
-            <a:off x="2669623" y="2183119"/>
-            <a:ext cx="0" cy="2029543"/>
+            <a:off x="2954066" y="2066267"/>
+            <a:ext cx="0" cy="2313986"/>
           </a:xfrm>
           <a:prstGeom prst="line">
             <a:avLst/>
@@ -11640,8 +11640,8 @@
         </p:nvSpPr>
         <p:spPr>
           <a:xfrm flipV="1">
-            <a:off x="3177008" y="2183119"/>
-            <a:ext cx="0" cy="2029543"/>
+            <a:off x="3532563" y="2066267"/>
+            <a:ext cx="0" cy="2313986"/>
           </a:xfrm>
           <a:prstGeom prst="line">
             <a:avLst/>
@@ -11663,8 +11663,8 @@
         </p:nvSpPr>
         <p:spPr>
           <a:xfrm flipV="1">
-            <a:off x="3684394" y="2183119"/>
-            <a:ext cx="0" cy="2029543"/>
+            <a:off x="4111059" y="2066267"/>
+            <a:ext cx="0" cy="2313986"/>
           </a:xfrm>
           <a:prstGeom prst="line">
             <a:avLst/>
@@ -11686,8 +11686,8 @@
         </p:nvSpPr>
         <p:spPr>
           <a:xfrm flipV="1">
-            <a:off x="4191780" y="2183119"/>
-            <a:ext cx="0" cy="2029543"/>
+            <a:off x="4689556" y="2066267"/>
+            <a:ext cx="0" cy="2313986"/>
           </a:xfrm>
           <a:prstGeom prst="line">
             <a:avLst/>
@@ -11709,8 +11709,8 @@
         </p:nvSpPr>
         <p:spPr>
           <a:xfrm flipV="1">
-            <a:off x="4699165" y="2183119"/>
-            <a:ext cx="0" cy="2029543"/>
+            <a:off x="5268052" y="2066267"/>
+            <a:ext cx="0" cy="2313986"/>
           </a:xfrm>
           <a:prstGeom prst="line">
             <a:avLst/>
@@ -11732,8 +11732,8 @@
         </p:nvSpPr>
         <p:spPr>
           <a:xfrm flipV="1">
-            <a:off x="5206551" y="2183119"/>
-            <a:ext cx="0" cy="2029543"/>
+            <a:off x="5846549" y="2066267"/>
+            <a:ext cx="0" cy="2313986"/>
           </a:xfrm>
           <a:prstGeom prst="line">
             <a:avLst/>
@@ -11755,8 +11755,8 @@
         </p:nvSpPr>
         <p:spPr>
           <a:xfrm flipV="1">
-            <a:off x="5713937" y="2183119"/>
-            <a:ext cx="0" cy="2029543"/>
+            <a:off x="6425045" y="2066267"/>
+            <a:ext cx="0" cy="2313986"/>
           </a:xfrm>
           <a:prstGeom prst="line">
             <a:avLst/>
@@ -11778,8 +11778,8 @@
         </p:nvSpPr>
         <p:spPr>
           <a:xfrm>
-            <a:off x="640080" y="4212662"/>
-            <a:ext cx="5073857" cy="0"/>
+            <a:off x="640080" y="4380253"/>
+            <a:ext cx="5784965" cy="0"/>
           </a:xfrm>
           <a:prstGeom prst="line">
             <a:avLst/>
@@ -11801,8 +11801,8 @@
         </p:nvSpPr>
         <p:spPr>
           <a:xfrm>
-            <a:off x="640080" y="3705276"/>
-            <a:ext cx="5073857" cy="0"/>
+            <a:off x="640080" y="3801757"/>
+            <a:ext cx="5784965" cy="0"/>
           </a:xfrm>
           <a:prstGeom prst="line">
             <a:avLst/>
@@ -11824,8 +11824,8 @@
         </p:nvSpPr>
         <p:spPr>
           <a:xfrm>
-            <a:off x="640080" y="3197891"/>
-            <a:ext cx="5073857" cy="0"/>
+            <a:off x="640080" y="3223260"/>
+            <a:ext cx="5784965" cy="0"/>
           </a:xfrm>
           <a:prstGeom prst="line">
             <a:avLst/>
@@ -11847,8 +11847,8 @@
         </p:nvSpPr>
         <p:spPr>
           <a:xfrm>
-            <a:off x="640080" y="2690505"/>
-            <a:ext cx="5073857" cy="0"/>
+            <a:off x="640080" y="2644763"/>
+            <a:ext cx="5784965" cy="0"/>
           </a:xfrm>
           <a:prstGeom prst="line">
             <a:avLst/>
@@ -11870,8 +11870,8 @@
         </p:nvSpPr>
         <p:spPr>
           <a:xfrm>
-            <a:off x="640080" y="2183119"/>
-            <a:ext cx="5073857" cy="0"/>
+            <a:off x="640080" y="2066267"/>
+            <a:ext cx="5784965" cy="0"/>
           </a:xfrm>
           <a:prstGeom prst="line">
             <a:avLst/>
@@ -11893,8 +11893,8 @@
         </p:nvSpPr>
         <p:spPr>
           <a:xfrm flipV="1">
-            <a:off x="6677970" y="2766613"/>
-            <a:ext cx="0" cy="862556"/>
+            <a:off x="7210148" y="2872030"/>
+            <a:ext cx="0" cy="702460"/>
           </a:xfrm>
           <a:prstGeom prst="line">
             <a:avLst/>
@@ -11917,8 +11917,8 @@
         </p:nvSpPr>
         <p:spPr>
           <a:xfrm>
-            <a:off x="6246692" y="3197891"/>
-            <a:ext cx="862556" cy="0"/>
+            <a:off x="6858918" y="3223260"/>
+            <a:ext cx="702460" cy="0"/>
           </a:xfrm>
           <a:prstGeom prst="line">
             <a:avLst/>
@@ -11940,8 +11940,8 @@
         </p:nvSpPr>
         <p:spPr>
           <a:xfrm flipV="1">
-            <a:off x="7972818" y="2490595"/>
-            <a:ext cx="0" cy="328786"/>
+            <a:off x="8244004" y="2626582"/>
+            <a:ext cx="0" cy="267761"/>
           </a:xfrm>
           <a:prstGeom prst="line">
             <a:avLst/>
@@ -11963,7 +11963,7 @@
         </p:nvSpPr>
         <p:spPr>
           <a:xfrm>
-            <a:off x="6473754" y="2347789"/>
+            <a:off x="7005932" y="2495585"/>
             <a:ext cx="408432" cy="381000"/>
           </a:xfrm>
           <a:prstGeom prst="rect">
@@ -12002,7 +12002,7 @@
         </p:nvSpPr>
         <p:spPr>
           <a:xfrm>
-            <a:off x="6473754" y="3666992"/>
+            <a:off x="7005932" y="3569935"/>
             <a:ext cx="408432" cy="381000"/>
           </a:xfrm>
           <a:prstGeom prst="rect">
@@ -12041,7 +12041,7 @@
         </p:nvSpPr>
         <p:spPr>
           <a:xfrm>
-            <a:off x="7133355" y="3007391"/>
+            <a:off x="7543107" y="3032760"/>
             <a:ext cx="408432" cy="381000"/>
           </a:xfrm>
           <a:prstGeom prst="rect">
@@ -12080,7 +12080,7 @@
         </p:nvSpPr>
         <p:spPr>
           <a:xfrm>
-            <a:off x="5814152" y="3007391"/>
+            <a:off x="6468757" y="3032760"/>
             <a:ext cx="408432" cy="381000"/>
           </a:xfrm>
           <a:prstGeom prst="rect">
@@ -12119,7 +12119,7 @@
         </p:nvSpPr>
         <p:spPr>
           <a:xfrm>
-            <a:off x="9267238" y="2081412"/>
+            <a:off x="9439154" y="2257988"/>
             <a:ext cx="707136" cy="381000"/>
           </a:xfrm>
           <a:prstGeom prst="rect">
@@ -12158,7 +12158,7 @@
         </p:nvSpPr>
         <p:spPr>
           <a:xfrm>
-            <a:off x="8556898" y="2464488"/>
+            <a:off x="8798675" y="2569963"/>
             <a:ext cx="707136" cy="381000"/>
           </a:xfrm>
           <a:prstGeom prst="rect">
@@ -12197,7 +12197,7 @@
         </p:nvSpPr>
         <p:spPr>
           <a:xfrm>
-            <a:off x="10484964" y="2464488"/>
+            <a:off x="10534165" y="2569963"/>
             <a:ext cx="707136" cy="381000"/>
           </a:xfrm>
           <a:prstGeom prst="rect">
@@ -12236,7 +12236,7 @@
         </p:nvSpPr>
         <p:spPr>
           <a:xfrm>
-            <a:off x="8556898" y="2921135"/>
+            <a:off x="8798675" y="2941853"/>
             <a:ext cx="707136" cy="381000"/>
           </a:xfrm>
           <a:prstGeom prst="rect">
@@ -12275,7 +12275,7 @@
         </p:nvSpPr>
         <p:spPr>
           <a:xfrm>
-            <a:off x="10335612" y="2921135"/>
+            <a:off x="10384813" y="2941853"/>
             <a:ext cx="1005840" cy="381000"/>
           </a:xfrm>
           <a:prstGeom prst="rect">
@@ -12314,7 +12314,7 @@
         </p:nvSpPr>
         <p:spPr>
           <a:xfrm>
-            <a:off x="8258194" y="3377782"/>
+            <a:off x="8499971" y="3313744"/>
             <a:ext cx="1304544" cy="381000"/>
           </a:xfrm>
           <a:prstGeom prst="rect">
@@ -12353,7 +12353,7 @@
         </p:nvSpPr>
         <p:spPr>
           <a:xfrm>
-            <a:off x="10484964" y="3377782"/>
+            <a:off x="10534165" y="3313744"/>
             <a:ext cx="707136" cy="381000"/>
           </a:xfrm>
           <a:prstGeom prst="rect">
@@ -12392,7 +12392,7 @@
         </p:nvSpPr>
         <p:spPr>
           <a:xfrm>
-            <a:off x="8706250" y="3834429"/>
+            <a:off x="8948027" y="3685635"/>
             <a:ext cx="408432" cy="381000"/>
           </a:xfrm>
           <a:prstGeom prst="rect">
@@ -12654,8 +12654,8 @@
         </p:nvSpPr>
         <p:spPr>
           <a:xfrm>
-            <a:off x="640080" y="2770409"/>
-            <a:ext cx="507386" cy="507386"/>
+            <a:off x="640080" y="2795778"/>
+            <a:ext cx="578497" cy="578497"/>
           </a:xfrm>
           <a:custGeom>
             <a:avLst/>
@@ -12664,15 +12664,15 @@
             <a:cxnLst/>
             <a:rect l="l" t="t" r="r" b="b"/>
             <a:pathLst>
-              <a:path w="507386" h="507386">
+              <a:path w="578497" h="578497">
                 <a:moveTo>
-                  <a:pt x="0" y="507386"/>
+                  <a:pt x="0" y="578497"/>
                 </a:moveTo>
                 <a:lnTo>
-                  <a:pt x="507386" y="507386"/>
-                </a:lnTo>
-                <a:lnTo>
-                  <a:pt x="507386" y="0"/>
+                  <a:pt x="578497" y="578497"/>
+                </a:lnTo>
+                <a:lnTo>
+                  <a:pt x="578497" y="0"/>
                 </a:lnTo>
                 <a:lnTo>
                   <a:pt x="0" y="0"/>
@@ -12695,8 +12695,8 @@
         </p:nvSpPr>
         <p:spPr>
           <a:xfrm>
-            <a:off x="1147466" y="2770409"/>
-            <a:ext cx="507386" cy="507386"/>
+            <a:off x="1218577" y="2795778"/>
+            <a:ext cx="578497" cy="578497"/>
           </a:xfrm>
           <a:custGeom>
             <a:avLst/>
@@ -12705,15 +12705,15 @@
             <a:cxnLst/>
             <a:rect l="l" t="t" r="r" b="b"/>
             <a:pathLst>
-              <a:path w="507386" h="507386">
+              <a:path w="578497" h="578497">
                 <a:moveTo>
-                  <a:pt x="0" y="507386"/>
+                  <a:pt x="0" y="578497"/>
                 </a:moveTo>
                 <a:lnTo>
-                  <a:pt x="507386" y="507386"/>
-                </a:lnTo>
-                <a:lnTo>
-                  <a:pt x="507386" y="0"/>
+                  <a:pt x="578497" y="578497"/>
+                </a:lnTo>
+                <a:lnTo>
+                  <a:pt x="578497" y="0"/>
                 </a:lnTo>
                 <a:lnTo>
                   <a:pt x="0" y="0"/>
@@ -12736,8 +12736,8 @@
         </p:nvSpPr>
         <p:spPr>
           <a:xfrm>
-            <a:off x="1654851" y="2770409"/>
-            <a:ext cx="507386" cy="507386"/>
+            <a:off x="1797073" y="2795778"/>
+            <a:ext cx="578497" cy="578497"/>
           </a:xfrm>
           <a:custGeom>
             <a:avLst/>
@@ -12746,15 +12746,15 @@
             <a:cxnLst/>
             <a:rect l="l" t="t" r="r" b="b"/>
             <a:pathLst>
-              <a:path w="507386" h="507386">
+              <a:path w="578497" h="578497">
                 <a:moveTo>
-                  <a:pt x="0" y="507386"/>
+                  <a:pt x="0" y="578497"/>
                 </a:moveTo>
                 <a:lnTo>
-                  <a:pt x="507386" y="507386"/>
-                </a:lnTo>
-                <a:lnTo>
-                  <a:pt x="507386" y="0"/>
+                  <a:pt x="578497" y="578497"/>
+                </a:lnTo>
+                <a:lnTo>
+                  <a:pt x="578497" y="0"/>
                 </a:lnTo>
                 <a:lnTo>
                   <a:pt x="0" y="0"/>
@@ -12777,8 +12777,8 @@
         </p:nvSpPr>
         <p:spPr>
           <a:xfrm>
-            <a:off x="2162237" y="2770409"/>
-            <a:ext cx="507386" cy="507386"/>
+            <a:off x="2375570" y="2795778"/>
+            <a:ext cx="578497" cy="578497"/>
           </a:xfrm>
           <a:custGeom>
             <a:avLst/>
@@ -12787,15 +12787,15 @@
             <a:cxnLst/>
             <a:rect l="l" t="t" r="r" b="b"/>
             <a:pathLst>
-              <a:path w="507386" h="507386">
+              <a:path w="578497" h="578497">
                 <a:moveTo>
-                  <a:pt x="0" y="507386"/>
+                  <a:pt x="0" y="578497"/>
                 </a:moveTo>
                 <a:lnTo>
-                  <a:pt x="507386" y="507386"/>
-                </a:lnTo>
-                <a:lnTo>
-                  <a:pt x="507386" y="0"/>
+                  <a:pt x="578497" y="578497"/>
+                </a:lnTo>
+                <a:lnTo>
+                  <a:pt x="578497" y="0"/>
                 </a:lnTo>
                 <a:lnTo>
                   <a:pt x="0" y="0"/>
@@ -12818,8 +12818,8 @@
         </p:nvSpPr>
         <p:spPr>
           <a:xfrm>
-            <a:off x="2669623" y="2770409"/>
-            <a:ext cx="507386" cy="507386"/>
+            <a:off x="2954066" y="2795778"/>
+            <a:ext cx="578497" cy="578497"/>
           </a:xfrm>
           <a:custGeom>
             <a:avLst/>
@@ -12828,15 +12828,15 @@
             <a:cxnLst/>
             <a:rect l="l" t="t" r="r" b="b"/>
             <a:pathLst>
-              <a:path w="507386" h="507386">
+              <a:path w="578497" h="578497">
                 <a:moveTo>
-                  <a:pt x="0" y="507386"/>
+                  <a:pt x="0" y="578497"/>
                 </a:moveTo>
                 <a:lnTo>
-                  <a:pt x="507386" y="507386"/>
-                </a:lnTo>
-                <a:lnTo>
-                  <a:pt x="507386" y="0"/>
+                  <a:pt x="578497" y="578497"/>
+                </a:lnTo>
+                <a:lnTo>
+                  <a:pt x="578497" y="0"/>
                 </a:lnTo>
                 <a:lnTo>
                   <a:pt x="0" y="0"/>
@@ -12859,8 +12859,8 @@
         </p:nvSpPr>
         <p:spPr>
           <a:xfrm>
-            <a:off x="3177008" y="2770409"/>
-            <a:ext cx="507386" cy="507386"/>
+            <a:off x="3532563" y="2795778"/>
+            <a:ext cx="578497" cy="578497"/>
           </a:xfrm>
           <a:custGeom>
             <a:avLst/>
@@ -12869,15 +12869,15 @@
             <a:cxnLst/>
             <a:rect l="l" t="t" r="r" b="b"/>
             <a:pathLst>
-              <a:path w="507386" h="507386">
+              <a:path w="578497" h="578497">
                 <a:moveTo>
-                  <a:pt x="0" y="507386"/>
+                  <a:pt x="0" y="578497"/>
                 </a:moveTo>
                 <a:lnTo>
-                  <a:pt x="507386" y="507386"/>
-                </a:lnTo>
-                <a:lnTo>
-                  <a:pt x="507386" y="0"/>
+                  <a:pt x="578497" y="578497"/>
+                </a:lnTo>
+                <a:lnTo>
+                  <a:pt x="578497" y="0"/>
                 </a:lnTo>
                 <a:lnTo>
                   <a:pt x="0" y="0"/>
@@ -12900,8 +12900,8 @@
         </p:nvSpPr>
         <p:spPr>
           <a:xfrm>
-            <a:off x="3684394" y="2770409"/>
-            <a:ext cx="507386" cy="507386"/>
+            <a:off x="4111059" y="2795778"/>
+            <a:ext cx="578497" cy="578497"/>
           </a:xfrm>
           <a:custGeom>
             <a:avLst/>
@@ -12910,15 +12910,15 @@
             <a:cxnLst/>
             <a:rect l="l" t="t" r="r" b="b"/>
             <a:pathLst>
-              <a:path w="507386" h="507386">
+              <a:path w="578497" h="578497">
                 <a:moveTo>
-                  <a:pt x="0" y="507386"/>
+                  <a:pt x="0" y="578497"/>
                 </a:moveTo>
                 <a:lnTo>
-                  <a:pt x="507386" y="507386"/>
-                </a:lnTo>
-                <a:lnTo>
-                  <a:pt x="507386" y="0"/>
+                  <a:pt x="578497" y="578497"/>
+                </a:lnTo>
+                <a:lnTo>
+                  <a:pt x="578497" y="0"/>
                 </a:lnTo>
                 <a:lnTo>
                   <a:pt x="0" y="0"/>
@@ -12941,8 +12941,8 @@
         </p:nvSpPr>
         <p:spPr>
           <a:xfrm>
-            <a:off x="4191780" y="2770409"/>
-            <a:ext cx="507386" cy="507386"/>
+            <a:off x="4689556" y="2795778"/>
+            <a:ext cx="578497" cy="578497"/>
           </a:xfrm>
           <a:custGeom>
             <a:avLst/>
@@ -12951,15 +12951,15 @@
             <a:cxnLst/>
             <a:rect l="l" t="t" r="r" b="b"/>
             <a:pathLst>
-              <a:path w="507386" h="507386">
+              <a:path w="578497" h="578497">
                 <a:moveTo>
-                  <a:pt x="0" y="507386"/>
+                  <a:pt x="0" y="578497"/>
                 </a:moveTo>
                 <a:lnTo>
-                  <a:pt x="507386" y="507386"/>
-                </a:lnTo>
-                <a:lnTo>
-                  <a:pt x="507386" y="0"/>
+                  <a:pt x="578497" y="578497"/>
+                </a:lnTo>
+                <a:lnTo>
+                  <a:pt x="578497" y="0"/>
                 </a:lnTo>
                 <a:lnTo>
                   <a:pt x="0" y="0"/>
@@ -12982,8 +12982,8 @@
         </p:nvSpPr>
         <p:spPr>
           <a:xfrm>
-            <a:off x="4699165" y="2770409"/>
-            <a:ext cx="507386" cy="507386"/>
+            <a:off x="5268052" y="2795778"/>
+            <a:ext cx="578497" cy="578497"/>
           </a:xfrm>
           <a:custGeom>
             <a:avLst/>
@@ -12992,15 +12992,15 @@
             <a:cxnLst/>
             <a:rect l="l" t="t" r="r" b="b"/>
             <a:pathLst>
-              <a:path w="507386" h="507386">
+              <a:path w="578497" h="578497">
                 <a:moveTo>
-                  <a:pt x="0" y="507386"/>
+                  <a:pt x="0" y="578497"/>
                 </a:moveTo>
                 <a:lnTo>
-                  <a:pt x="507386" y="507386"/>
-                </a:lnTo>
-                <a:lnTo>
-                  <a:pt x="507386" y="0"/>
+                  <a:pt x="578497" y="578497"/>
+                </a:lnTo>
+                <a:lnTo>
+                  <a:pt x="578497" y="0"/>
                 </a:lnTo>
                 <a:lnTo>
                   <a:pt x="0" y="0"/>
@@ -13023,8 +13023,8 @@
         </p:nvSpPr>
         <p:spPr>
           <a:xfrm>
-            <a:off x="5206551" y="2770409"/>
-            <a:ext cx="507386" cy="507386"/>
+            <a:off x="5846549" y="2795778"/>
+            <a:ext cx="578497" cy="578497"/>
           </a:xfrm>
           <a:custGeom>
             <a:avLst/>
@@ -13033,15 +13033,15 @@
             <a:cxnLst/>
             <a:rect l="l" t="t" r="r" b="b"/>
             <a:pathLst>
-              <a:path w="507386" h="507386">
+              <a:path w="578497" h="578497">
                 <a:moveTo>
-                  <a:pt x="0" y="507386"/>
+                  <a:pt x="0" y="578497"/>
                 </a:moveTo>
                 <a:lnTo>
-                  <a:pt x="507386" y="507386"/>
-                </a:lnTo>
-                <a:lnTo>
-                  <a:pt x="507386" y="0"/>
+                  <a:pt x="578497" y="578497"/>
+                </a:lnTo>
+                <a:lnTo>
+                  <a:pt x="578497" y="0"/>
                 </a:lnTo>
                 <a:lnTo>
                   <a:pt x="0" y="0"/>
@@ -13064,8 +13064,8 @@
         </p:nvSpPr>
         <p:spPr>
           <a:xfrm>
-            <a:off x="1218500" y="2354352"/>
-            <a:ext cx="182659" cy="314579"/>
+            <a:off x="1299566" y="2321411"/>
+            <a:ext cx="208259" cy="358668"/>
           </a:xfrm>
           <a:custGeom>
             <a:avLst/>
@@ -13074,15 +13074,15 @@
             <a:cxnLst/>
             <a:rect l="l" t="t" r="r" b="b"/>
             <a:pathLst>
-              <a:path w="182659" h="314579">
+              <a:path w="208259" h="358668">
                 <a:moveTo>
-                  <a:pt x="0" y="273988"/>
+                  <a:pt x="0" y="312388"/>
                 </a:moveTo>
                 <a:lnTo>
-                  <a:pt x="182659" y="314579"/>
-                </a:lnTo>
-                <a:lnTo>
-                  <a:pt x="182659" y="40591"/>
+                  <a:pt x="208259" y="358668"/>
+                </a:lnTo>
+                <a:lnTo>
+                  <a:pt x="208259" y="46280"/>
                 </a:lnTo>
                 <a:lnTo>
                   <a:pt x="0" y="0"/>
@@ -13110,8 +13110,8 @@
         </p:nvSpPr>
         <p:spPr>
           <a:xfrm>
-            <a:off x="1401159" y="2354352"/>
-            <a:ext cx="182659" cy="314579"/>
+            <a:off x="1507825" y="2321411"/>
+            <a:ext cx="208259" cy="358668"/>
           </a:xfrm>
           <a:custGeom>
             <a:avLst/>
@@ -13120,18 +13120,18 @@
             <a:cxnLst/>
             <a:rect l="l" t="t" r="r" b="b"/>
             <a:pathLst>
-              <a:path w="182659" h="314579">
+              <a:path w="208259" h="358668">
                 <a:moveTo>
-                  <a:pt x="182659" y="273988"/>
+                  <a:pt x="208259" y="312388"/>
                 </a:moveTo>
                 <a:lnTo>
-                  <a:pt x="0" y="314579"/>
-                </a:lnTo>
-                <a:lnTo>
-                  <a:pt x="0" y="40591"/>
-                </a:lnTo>
-                <a:lnTo>
-                  <a:pt x="182659" y="0"/>
+                  <a:pt x="0" y="358668"/>
+                </a:lnTo>
+                <a:lnTo>
+                  <a:pt x="0" y="46280"/>
+                </a:lnTo>
+                <a:lnTo>
+                  <a:pt x="208259" y="0"/>
                 </a:lnTo>
                 <a:close/>
               </a:path>
@@ -13156,8 +13156,8 @@
         </p:nvSpPr>
         <p:spPr>
           <a:xfrm>
-            <a:off x="2811691" y="2334057"/>
-            <a:ext cx="273988" cy="162363"/>
+            <a:off x="3116045" y="2298271"/>
+            <a:ext cx="312388" cy="185119"/>
           </a:xfrm>
           <a:custGeom>
             <a:avLst/>
@@ -13166,15 +13166,15 @@
             <a:cxnLst/>
             <a:rect l="l" t="t" r="r" b="b"/>
             <a:pathLst>
-              <a:path w="273988" h="162363">
+              <a:path w="312388" h="185119">
                 <a:moveTo>
                   <a:pt x="0" y="0"/>
                 </a:moveTo>
                 <a:lnTo>
-                  <a:pt x="273988" y="81182"/>
-                </a:lnTo>
-                <a:lnTo>
-                  <a:pt x="0" y="162363"/>
+                  <a:pt x="312388" y="92559"/>
+                </a:lnTo>
+                <a:lnTo>
+                  <a:pt x="0" y="185119"/>
                 </a:lnTo>
                 <a:close/>
               </a:path>
@@ -13199,8 +13199,8 @@
         </p:nvSpPr>
         <p:spPr>
           <a:xfrm>
-            <a:off x="2887799" y="2070216"/>
-            <a:ext cx="71034" cy="131920"/>
+            <a:off x="3202820" y="1997453"/>
+            <a:ext cx="80990" cy="150409"/>
           </a:xfrm>
           <a:custGeom>
             <a:avLst/>
@@ -13209,15 +13209,15 @@
             <a:cxnLst/>
             <a:rect l="l" t="t" r="r" b="b"/>
             <a:pathLst>
-              <a:path w="71034" h="131920">
+              <a:path w="80990" h="150409">
                 <a:moveTo>
-                  <a:pt x="0" y="131920"/>
+                  <a:pt x="0" y="150409"/>
                 </a:moveTo>
                 <a:lnTo>
-                  <a:pt x="71034" y="131920"/>
-                </a:lnTo>
-                <a:lnTo>
-                  <a:pt x="71034" y="0"/>
+                  <a:pt x="80990" y="150409"/>
+                </a:lnTo>
+                <a:lnTo>
+                  <a:pt x="80990" y="0"/>
                 </a:lnTo>
                 <a:lnTo>
                   <a:pt x="0" y="0"/>
@@ -13245,8 +13245,8 @@
         </p:nvSpPr>
         <p:spPr>
           <a:xfrm>
-            <a:off x="2760952" y="1806376"/>
-            <a:ext cx="324727" cy="263841"/>
+            <a:off x="3058196" y="1696635"/>
+            <a:ext cx="370238" cy="300818"/>
           </a:xfrm>
           <a:custGeom>
             <a:avLst/>
@@ -13255,15 +13255,15 @@
             <a:cxnLst/>
             <a:rect l="l" t="t" r="r" b="b"/>
             <a:pathLst>
-              <a:path w="324727" h="263841">
+              <a:path w="370238" h="300818">
                 <a:moveTo>
-                  <a:pt x="0" y="263841"/>
+                  <a:pt x="0" y="300818"/>
                 </a:moveTo>
                 <a:lnTo>
-                  <a:pt x="324727" y="263841"/>
-                </a:lnTo>
-                <a:lnTo>
-                  <a:pt x="162363" y="0"/>
+                  <a:pt x="370238" y="300818"/>
+                </a:lnTo>
+                <a:lnTo>
+                  <a:pt x="185119" y="0"/>
                 </a:lnTo>
                 <a:close/>
               </a:path>
@@ -13288,8 +13288,8 @@
         </p:nvSpPr>
         <p:spPr>
           <a:xfrm>
-            <a:off x="2329674" y="3358976"/>
-            <a:ext cx="172511" cy="131920"/>
+            <a:off x="2566473" y="3466834"/>
+            <a:ext cx="196689" cy="150409"/>
           </a:xfrm>
           <a:custGeom>
             <a:avLst/>
@@ -13298,27 +13298,27 @@
             <a:cxnLst/>
             <a:rect l="l" t="t" r="r" b="b"/>
             <a:pathLst>
-              <a:path w="172511" h="131920">
+              <a:path w="196689" h="150409">
                 <a:moveTo>
-                  <a:pt x="172511" y="131920"/>
+                  <a:pt x="196689" y="150409"/>
                 </a:moveTo>
                 <a:lnTo>
-                  <a:pt x="160841" y="65960"/>
-                </a:lnTo>
-                <a:lnTo>
-                  <a:pt x="129383" y="17758"/>
-                </a:lnTo>
-                <a:lnTo>
-                  <a:pt x="86256" y="0"/>
-                </a:lnTo>
-                <a:lnTo>
-                  <a:pt x="43128" y="17758"/>
-                </a:lnTo>
-                <a:lnTo>
-                  <a:pt x="11670" y="65960"/>
-                </a:lnTo>
-                <a:lnTo>
-                  <a:pt x="0" y="131920"/>
+                  <a:pt x="183466" y="75205"/>
+                </a:lnTo>
+                <a:lnTo>
+                  <a:pt x="147517" y="20247"/>
+                </a:lnTo>
+                <a:lnTo>
+                  <a:pt x="98344" y="0"/>
+                </a:lnTo>
+                <a:lnTo>
+                  <a:pt x="49172" y="20247"/>
+                </a:lnTo>
+                <a:lnTo>
+                  <a:pt x="13223" y="75205"/>
+                </a:lnTo>
+                <a:lnTo>
+                  <a:pt x="0" y="150409"/>
                 </a:lnTo>
               </a:path>
             </a:pathLst>
@@ -13340,8 +13340,8 @@
         </p:nvSpPr>
         <p:spPr>
           <a:xfrm>
-            <a:off x="2248493" y="3490896"/>
-            <a:ext cx="334875" cy="223250"/>
+            <a:off x="2473914" y="3617243"/>
+            <a:ext cx="381808" cy="254538"/>
           </a:xfrm>
           <a:custGeom>
             <a:avLst/>
@@ -13350,18 +13350,18 @@
             <a:cxnLst/>
             <a:rect l="l" t="t" r="r" b="b"/>
             <a:pathLst>
-              <a:path w="334875" h="223250">
+              <a:path w="381808" h="254538">
                 <a:moveTo>
                   <a:pt x="0" y="0"/>
                 </a:moveTo>
                 <a:lnTo>
-                  <a:pt x="334875" y="0"/>
-                </a:lnTo>
-                <a:lnTo>
-                  <a:pt x="294284" y="223250"/>
-                </a:lnTo>
-                <a:lnTo>
-                  <a:pt x="40591" y="223250"/>
+                  <a:pt x="381808" y="0"/>
+                </a:lnTo>
+                <a:lnTo>
+                  <a:pt x="335528" y="254538"/>
+                </a:lnTo>
+                <a:lnTo>
+                  <a:pt x="46280" y="254538"/>
                 </a:lnTo>
                 <a:close/>
               </a:path>
@@ -13386,8 +13386,8 @@
         </p:nvSpPr>
         <p:spPr>
           <a:xfrm>
-            <a:off x="2771100" y="3338681"/>
-            <a:ext cx="304431" cy="375465"/>
+            <a:off x="3069765" y="3443694"/>
+            <a:ext cx="347098" cy="428087"/>
           </a:xfrm>
           <a:custGeom>
             <a:avLst/>
@@ -13396,21 +13396,21 @@
             <a:cxnLst/>
             <a:rect l="l" t="t" r="r" b="b"/>
             <a:pathLst>
-              <a:path w="304431" h="375465">
+              <a:path w="347098" h="428087">
                 <a:moveTo>
-                  <a:pt x="0" y="375465"/>
+                  <a:pt x="0" y="428087"/>
                 </a:moveTo>
                 <a:lnTo>
-                  <a:pt x="304431" y="375465"/>
-                </a:lnTo>
-                <a:lnTo>
-                  <a:pt x="304431" y="172511"/>
-                </a:lnTo>
-                <a:lnTo>
-                  <a:pt x="152216" y="0"/>
-                </a:lnTo>
-                <a:lnTo>
-                  <a:pt x="0" y="172511"/>
+                  <a:pt x="347098" y="428087"/>
+                </a:lnTo>
+                <a:lnTo>
+                  <a:pt x="347098" y="196689"/>
+                </a:lnTo>
+                <a:lnTo>
+                  <a:pt x="173549" y="0"/>
+                </a:lnTo>
+                <a:lnTo>
+                  <a:pt x="0" y="196689"/>
                 </a:lnTo>
                 <a:close/>
               </a:path>
@@ -13435,8 +13435,8 @@
         </p:nvSpPr>
         <p:spPr>
           <a:xfrm>
-            <a:off x="4785421" y="3364050"/>
-            <a:ext cx="334875" cy="334875"/>
+            <a:off x="5366397" y="3472619"/>
+            <a:ext cx="381808" cy="381808"/>
           </a:xfrm>
           <a:custGeom>
             <a:avLst/>
@@ -13445,42 +13445,42 @@
             <a:cxnLst/>
             <a:rect l="l" t="t" r="r" b="b"/>
             <a:pathLst>
-              <a:path w="334875" h="334875">
+              <a:path w="381808" h="381808">
                 <a:moveTo>
-                  <a:pt x="116699" y="334875"/>
+                  <a:pt x="133054" y="381808"/>
                 </a:moveTo>
                 <a:lnTo>
-                  <a:pt x="218176" y="334875"/>
-                </a:lnTo>
-                <a:lnTo>
-                  <a:pt x="218176" y="218176"/>
-                </a:lnTo>
-                <a:lnTo>
-                  <a:pt x="334875" y="218176"/>
-                </a:lnTo>
-                <a:lnTo>
-                  <a:pt x="334875" y="116699"/>
-                </a:lnTo>
-                <a:lnTo>
-                  <a:pt x="218176" y="116699"/>
-                </a:lnTo>
-                <a:lnTo>
-                  <a:pt x="218176" y="0"/>
-                </a:lnTo>
-                <a:lnTo>
-                  <a:pt x="116699" y="0"/>
-                </a:lnTo>
-                <a:lnTo>
-                  <a:pt x="116699" y="116699"/>
-                </a:lnTo>
-                <a:lnTo>
-                  <a:pt x="0" y="116699"/>
-                </a:lnTo>
-                <a:lnTo>
-                  <a:pt x="0" y="218176"/>
-                </a:lnTo>
-                <a:lnTo>
-                  <a:pt x="116699" y="218176"/>
+                  <a:pt x="248754" y="381808"/>
+                </a:lnTo>
+                <a:lnTo>
+                  <a:pt x="248754" y="248754"/>
+                </a:lnTo>
+                <a:lnTo>
+                  <a:pt x="381808" y="248754"/>
+                </a:lnTo>
+                <a:lnTo>
+                  <a:pt x="381808" y="133054"/>
+                </a:lnTo>
+                <a:lnTo>
+                  <a:pt x="248754" y="133054"/>
+                </a:lnTo>
+                <a:lnTo>
+                  <a:pt x="248754" y="0"/>
+                </a:lnTo>
+                <a:lnTo>
+                  <a:pt x="133054" y="0"/>
+                </a:lnTo>
+                <a:lnTo>
+                  <a:pt x="133054" y="133054"/>
+                </a:lnTo>
+                <a:lnTo>
+                  <a:pt x="0" y="133054"/>
+                </a:lnTo>
+                <a:lnTo>
+                  <a:pt x="0" y="248754"/>
+                </a:lnTo>
+                <a:lnTo>
+                  <a:pt x="133054" y="248754"/>
                 </a:lnTo>
                 <a:close/>
               </a:path>
@@ -13505,8 +13505,8 @@
         </p:nvSpPr>
         <p:spPr>
           <a:xfrm>
-            <a:off x="640080" y="1755637"/>
-            <a:ext cx="5073857" cy="2029543"/>
+            <a:off x="640080" y="1638785"/>
+            <a:ext cx="5784965" cy="2313986"/>
           </a:xfrm>
           <a:custGeom>
             <a:avLst/>
@@ -13515,15 +13515,15 @@
             <a:cxnLst/>
             <a:rect l="l" t="t" r="r" b="b"/>
             <a:pathLst>
-              <a:path w="5073857" h="2029543">
+              <a:path w="5784965" h="2313986">
                 <a:moveTo>
-                  <a:pt x="0" y="2029543"/>
+                  <a:pt x="0" y="2313986"/>
                 </a:moveTo>
                 <a:lnTo>
-                  <a:pt x="5073857" y="2029543"/>
-                </a:lnTo>
-                <a:lnTo>
-                  <a:pt x="5073857" y="0"/>
+                  <a:pt x="5784965" y="2313986"/>
+                </a:lnTo>
+                <a:lnTo>
+                  <a:pt x="5784965" y="0"/>
                 </a:lnTo>
                 <a:lnTo>
                   <a:pt x="0" y="0"/>
@@ -13549,8 +13549,8 @@
         </p:nvSpPr>
         <p:spPr>
           <a:xfrm>
-            <a:off x="7692741" y="1654160"/>
-            <a:ext cx="3856131" cy="2283236"/>
+            <a:off x="8036572" y="1866051"/>
+            <a:ext cx="3512300" cy="1859453"/>
           </a:xfrm>
           <a:custGeom>
             <a:avLst/>
@@ -13559,15 +13559,15 @@
             <a:cxnLst/>
             <a:rect l="l" t="t" r="r" b="b"/>
             <a:pathLst>
-              <a:path w="3856131" h="2283236">
+              <a:path w="3512300" h="1859453">
                 <a:moveTo>
-                  <a:pt x="0" y="2283236"/>
+                  <a:pt x="0" y="1859453"/>
                 </a:moveTo>
                 <a:lnTo>
-                  <a:pt x="3856131" y="2283236"/>
-                </a:lnTo>
-                <a:lnTo>
-                  <a:pt x="3856131" y="0"/>
+                  <a:pt x="3512300" y="1859453"/>
+                </a:lnTo>
+                <a:lnTo>
+                  <a:pt x="3512300" y="0"/>
                 </a:lnTo>
                 <a:lnTo>
                   <a:pt x="0" y="0"/>
@@ -13595,8 +13595,8 @@
         </p:nvSpPr>
         <p:spPr>
           <a:xfrm>
-            <a:off x="7692741" y="1654160"/>
-            <a:ext cx="3856131" cy="380539"/>
+            <a:off x="8036572" y="1866051"/>
+            <a:ext cx="3512300" cy="309909"/>
           </a:xfrm>
           <a:custGeom>
             <a:avLst/>
@@ -13605,15 +13605,15 @@
             <a:cxnLst/>
             <a:rect l="l" t="t" r="r" b="b"/>
             <a:pathLst>
-              <a:path w="3856131" h="380539">
+              <a:path w="3512300" h="309909">
                 <a:moveTo>
-                  <a:pt x="0" y="380539"/>
+                  <a:pt x="0" y="309909"/>
                 </a:moveTo>
                 <a:lnTo>
-                  <a:pt x="3856131" y="380539"/>
-                </a:lnTo>
-                <a:lnTo>
-                  <a:pt x="3856131" y="0"/>
+                  <a:pt x="3512300" y="309909"/>
+                </a:lnTo>
+                <a:lnTo>
+                  <a:pt x="3512300" y="0"/>
                 </a:lnTo>
                 <a:lnTo>
                   <a:pt x="0" y="0"/>
@@ -13641,8 +13641,8 @@
         </p:nvSpPr>
         <p:spPr>
           <a:xfrm>
-            <a:off x="7972818" y="2063113"/>
-            <a:ext cx="246589" cy="146127"/>
+            <a:off x="8244004" y="2199100"/>
+            <a:ext cx="200821" cy="119005"/>
           </a:xfrm>
           <a:custGeom>
             <a:avLst/>
@@ -13651,15 +13651,15 @@
             <a:cxnLst/>
             <a:rect l="l" t="t" r="r" b="b"/>
             <a:pathLst>
-              <a:path w="246589" h="146127">
+              <a:path w="200821" h="119005">
                 <a:moveTo>
                   <a:pt x="0" y="0"/>
                 </a:moveTo>
                 <a:lnTo>
-                  <a:pt x="246589" y="73064"/>
-                </a:lnTo>
-                <a:lnTo>
-                  <a:pt x="0" y="146127"/>
+                  <a:pt x="200821" y="59503"/>
+                </a:lnTo>
+                <a:lnTo>
+                  <a:pt x="0" y="119005"/>
                 </a:lnTo>
                 <a:close/>
               </a:path>
@@ -13684,8 +13684,8 @@
         </p:nvSpPr>
         <p:spPr>
           <a:xfrm>
-            <a:off x="9850652" y="2076812"/>
-            <a:ext cx="301387" cy="301387"/>
+            <a:off x="9938586" y="2210257"/>
+            <a:ext cx="245448" cy="245448"/>
           </a:xfrm>
           <a:custGeom>
             <a:avLst/>
@@ -13694,42 +13694,42 @@
             <a:cxnLst/>
             <a:rect l="l" t="t" r="r" b="b"/>
             <a:pathLst>
-              <a:path w="301387" h="301387">
+              <a:path w="245448" h="245448">
                 <a:moveTo>
-                  <a:pt x="105029" y="301387"/>
+                  <a:pt x="85535" y="245448"/>
                 </a:moveTo>
                 <a:lnTo>
-                  <a:pt x="196358" y="301387"/>
-                </a:lnTo>
-                <a:lnTo>
-                  <a:pt x="196358" y="196358"/>
-                </a:lnTo>
-                <a:lnTo>
-                  <a:pt x="301387" y="196358"/>
-                </a:lnTo>
-                <a:lnTo>
-                  <a:pt x="301387" y="105029"/>
-                </a:lnTo>
-                <a:lnTo>
-                  <a:pt x="196358" y="105029"/>
-                </a:lnTo>
-                <a:lnTo>
-                  <a:pt x="196358" y="0"/>
-                </a:lnTo>
-                <a:lnTo>
-                  <a:pt x="105029" y="0"/>
-                </a:lnTo>
-                <a:lnTo>
-                  <a:pt x="105029" y="105029"/>
-                </a:lnTo>
-                <a:lnTo>
-                  <a:pt x="0" y="105029"/>
-                </a:lnTo>
-                <a:lnTo>
-                  <a:pt x="0" y="196358"/>
-                </a:lnTo>
-                <a:lnTo>
-                  <a:pt x="105029" y="196358"/>
+                  <a:pt x="159913" y="245448"/>
+                </a:lnTo>
+                <a:lnTo>
+                  <a:pt x="159913" y="159913"/>
+                </a:lnTo>
+                <a:lnTo>
+                  <a:pt x="245448" y="159913"/>
+                </a:lnTo>
+                <a:lnTo>
+                  <a:pt x="245448" y="85535"/>
+                </a:lnTo>
+                <a:lnTo>
+                  <a:pt x="159913" y="85535"/>
+                </a:lnTo>
+                <a:lnTo>
+                  <a:pt x="159913" y="0"/>
+                </a:lnTo>
+                <a:lnTo>
+                  <a:pt x="85535" y="0"/>
+                </a:lnTo>
+                <a:lnTo>
+                  <a:pt x="85535" y="85535"/>
+                </a:lnTo>
+                <a:lnTo>
+                  <a:pt x="0" y="85535"/>
+                </a:lnTo>
+                <a:lnTo>
+                  <a:pt x="0" y="159913"/>
+                </a:lnTo>
+                <a:lnTo>
+                  <a:pt x="85535" y="159913"/>
                 </a:lnTo>
                 <a:close/>
               </a:path>
@@ -13754,8 +13754,8 @@
         </p:nvSpPr>
         <p:spPr>
           <a:xfrm>
-            <a:off x="8041315" y="2738951"/>
-            <a:ext cx="63931" cy="118728"/>
+            <a:off x="8299787" y="2749498"/>
+            <a:ext cx="52065" cy="96692"/>
           </a:xfrm>
           <a:custGeom>
             <a:avLst/>
@@ -13764,15 +13764,15 @@
             <a:cxnLst/>
             <a:rect l="l" t="t" r="r" b="b"/>
             <a:pathLst>
-              <a:path w="63931" h="118728">
+              <a:path w="52065" h="96692">
                 <a:moveTo>
-                  <a:pt x="0" y="118728"/>
+                  <a:pt x="0" y="96692"/>
                 </a:moveTo>
                 <a:lnTo>
-                  <a:pt x="63931" y="118728"/>
-                </a:lnTo>
-                <a:lnTo>
-                  <a:pt x="63931" y="0"/>
+                  <a:pt x="52065" y="96692"/>
+                </a:lnTo>
+                <a:lnTo>
+                  <a:pt x="52065" y="0"/>
                 </a:lnTo>
                 <a:lnTo>
                   <a:pt x="0" y="0"/>
@@ -13800,8 +13800,8 @@
         </p:nvSpPr>
         <p:spPr>
           <a:xfrm>
-            <a:off x="7927153" y="2501494"/>
-            <a:ext cx="292254" cy="237456"/>
+            <a:off x="8206815" y="2556115"/>
+            <a:ext cx="238010" cy="193383"/>
           </a:xfrm>
           <a:custGeom>
             <a:avLst/>
@@ -13810,15 +13810,15 @@
             <a:cxnLst/>
             <a:rect l="l" t="t" r="r" b="b"/>
             <a:pathLst>
-              <a:path w="292254" h="237456">
+              <a:path w="238010" h="193383">
                 <a:moveTo>
-                  <a:pt x="0" y="237456"/>
+                  <a:pt x="0" y="193383"/>
                 </a:moveTo>
                 <a:lnTo>
-                  <a:pt x="292254" y="237456"/>
-                </a:lnTo>
-                <a:lnTo>
-                  <a:pt x="146127" y="0"/>
+                  <a:pt x="238010" y="193383"/>
+                </a:lnTo>
+                <a:lnTo>
+                  <a:pt x="119005" y="0"/>
                 </a:lnTo>
                 <a:close/>
               </a:path>
@@ -13843,8 +13843,8 @@
         </p:nvSpPr>
         <p:spPr>
           <a:xfrm>
-            <a:off x="9836953" y="2538026"/>
-            <a:ext cx="164393" cy="283121"/>
+            <a:off x="9927429" y="2585866"/>
+            <a:ext cx="133881" cy="230572"/>
           </a:xfrm>
           <a:custGeom>
             <a:avLst/>
@@ -13853,15 +13853,15 @@
             <a:cxnLst/>
             <a:rect l="l" t="t" r="r" b="b"/>
             <a:pathLst>
-              <a:path w="164393" h="283121">
+              <a:path w="133881" h="230572">
                 <a:moveTo>
-                  <a:pt x="0" y="246589"/>
+                  <a:pt x="0" y="200821"/>
                 </a:moveTo>
                 <a:lnTo>
-                  <a:pt x="164393" y="283121"/>
-                </a:lnTo>
-                <a:lnTo>
-                  <a:pt x="164393" y="36532"/>
+                  <a:pt x="133881" y="230572"/>
+                </a:lnTo>
+                <a:lnTo>
+                  <a:pt x="133881" y="29751"/>
                 </a:lnTo>
                 <a:lnTo>
                   <a:pt x="0" y="0"/>
@@ -13889,8 +13889,8 @@
         </p:nvSpPr>
         <p:spPr>
           <a:xfrm>
-            <a:off x="10001346" y="2538026"/>
-            <a:ext cx="164393" cy="283121"/>
+            <a:off x="10061309" y="2585866"/>
+            <a:ext cx="133881" cy="230572"/>
           </a:xfrm>
           <a:custGeom>
             <a:avLst/>
@@ -13899,18 +13899,18 @@
             <a:cxnLst/>
             <a:rect l="l" t="t" r="r" b="b"/>
             <a:pathLst>
-              <a:path w="164393" h="283121">
+              <a:path w="133881" h="230572">
                 <a:moveTo>
-                  <a:pt x="164393" y="246589"/>
+                  <a:pt x="133881" y="200821"/>
                 </a:moveTo>
                 <a:lnTo>
-                  <a:pt x="0" y="283121"/>
-                </a:lnTo>
-                <a:lnTo>
-                  <a:pt x="0" y="36532"/>
-                </a:lnTo>
-                <a:lnTo>
-                  <a:pt x="164393" y="0"/>
+                  <a:pt x="0" y="230572"/>
+                </a:lnTo>
+                <a:lnTo>
+                  <a:pt x="0" y="29751"/>
+                </a:lnTo>
+                <a:lnTo>
+                  <a:pt x="133881" y="0"/>
                 </a:lnTo>
                 <a:close/>
               </a:path>
@@ -13935,8 +13935,8 @@
         </p:nvSpPr>
         <p:spPr>
           <a:xfrm>
-            <a:off x="9923716" y="2985540"/>
-            <a:ext cx="155260" cy="118728"/>
+            <a:off x="9998088" y="2950319"/>
+            <a:ext cx="126443" cy="96692"/>
           </a:xfrm>
           <a:custGeom>
             <a:avLst/>
@@ -13945,27 +13945,27 @@
             <a:cxnLst/>
             <a:rect l="l" t="t" r="r" b="b"/>
             <a:pathLst>
-              <a:path w="155260" h="118728">
+              <a:path w="126443" h="96692">
                 <a:moveTo>
-                  <a:pt x="155260" y="118728"/>
+                  <a:pt x="126443" y="96692"/>
                 </a:moveTo>
                 <a:lnTo>
-                  <a:pt x="145112" y="59364"/>
-                </a:lnTo>
-                <a:lnTo>
-                  <a:pt x="116191" y="15729"/>
-                </a:lnTo>
-                <a:lnTo>
-                  <a:pt x="77630" y="0"/>
-                </a:lnTo>
-                <a:lnTo>
-                  <a:pt x="38561" y="15729"/>
-                </a:lnTo>
-                <a:lnTo>
-                  <a:pt x="10148" y="59364"/>
-                </a:lnTo>
-                <a:lnTo>
-                  <a:pt x="0" y="118728"/>
+                  <a:pt x="118179" y="48346"/>
+                </a:lnTo>
+                <a:lnTo>
+                  <a:pt x="94626" y="12810"/>
+                </a:lnTo>
+                <a:lnTo>
+                  <a:pt x="63221" y="0"/>
+                </a:lnTo>
+                <a:lnTo>
+                  <a:pt x="31404" y="12810"/>
+                </a:lnTo>
+                <a:lnTo>
+                  <a:pt x="8264" y="48346"/>
+                </a:lnTo>
+                <a:lnTo>
+                  <a:pt x="0" y="96692"/>
                 </a:lnTo>
               </a:path>
             </a:pathLst>
@@ -13987,8 +13987,8 @@
         </p:nvSpPr>
         <p:spPr>
           <a:xfrm>
-            <a:off x="9850652" y="3104268"/>
-            <a:ext cx="301387" cy="200925"/>
+            <a:off x="9938586" y="3047011"/>
+            <a:ext cx="245448" cy="163632"/>
           </a:xfrm>
           <a:custGeom>
             <a:avLst/>
@@ -13997,18 +13997,18 @@
             <a:cxnLst/>
             <a:rect l="l" t="t" r="r" b="b"/>
             <a:pathLst>
-              <a:path w="301387" h="200925">
+              <a:path w="245448" h="163632">
                 <a:moveTo>
                   <a:pt x="0" y="0"/>
                 </a:moveTo>
                 <a:lnTo>
-                  <a:pt x="301387" y="0"/>
-                </a:lnTo>
-                <a:lnTo>
-                  <a:pt x="264855" y="200925"/>
-                </a:lnTo>
-                <a:lnTo>
-                  <a:pt x="36532" y="200925"/>
+                  <a:pt x="245448" y="0"/>
+                </a:lnTo>
+                <a:lnTo>
+                  <a:pt x="215697" y="163632"/>
+                </a:lnTo>
+                <a:lnTo>
+                  <a:pt x="29751" y="163632"/>
                 </a:lnTo>
                 <a:close/>
               </a:path>
@@ -14033,8 +14033,8 @@
         </p:nvSpPr>
         <p:spPr>
           <a:xfrm>
-            <a:off x="7936286" y="3423921"/>
-            <a:ext cx="273988" cy="337919"/>
+            <a:off x="8214253" y="3307334"/>
+            <a:ext cx="223134" cy="275199"/>
           </a:xfrm>
           <a:custGeom>
             <a:avLst/>
@@ -14043,21 +14043,21 @@
             <a:cxnLst/>
             <a:rect l="l" t="t" r="r" b="b"/>
             <a:pathLst>
-              <a:path w="273988" h="337919">
+              <a:path w="223134" h="275199">
                 <a:moveTo>
-                  <a:pt x="0" y="337919"/>
+                  <a:pt x="0" y="275199"/>
                 </a:moveTo>
                 <a:lnTo>
-                  <a:pt x="273988" y="337919"/>
-                </a:lnTo>
-                <a:lnTo>
-                  <a:pt x="273988" y="155260"/>
-                </a:lnTo>
-                <a:lnTo>
-                  <a:pt x="136994" y="0"/>
-                </a:lnTo>
-                <a:lnTo>
-                  <a:pt x="0" y="155260"/>
+                  <a:pt x="223134" y="275199"/>
+                </a:lnTo>
+                <a:lnTo>
+                  <a:pt x="223134" y="126443"/>
+                </a:lnTo>
+                <a:lnTo>
+                  <a:pt x="111567" y="0"/>
+                </a:lnTo>
+                <a:lnTo>
+                  <a:pt x="0" y="126443"/>
                 </a:lnTo>
                 <a:close/>
               </a:path>
@@ -14082,8 +14082,8 @@
         </p:nvSpPr>
         <p:spPr>
           <a:xfrm>
-            <a:off x="4785421" y="2349279"/>
-            <a:ext cx="334875" cy="334875"/>
+            <a:off x="5366397" y="2315626"/>
+            <a:ext cx="381808" cy="381808"/>
           </a:xfrm>
           <a:prstGeom prst="ellipse">
             <a:avLst/>
@@ -14107,8 +14107,8 @@
         </p:nvSpPr>
         <p:spPr>
           <a:xfrm>
-            <a:off x="4881824" y="2445682"/>
-            <a:ext cx="142068" cy="142068"/>
+            <a:off x="5476311" y="2425540"/>
+            <a:ext cx="161979" cy="161979"/>
           </a:xfrm>
           <a:prstGeom prst="ellipse">
             <a:avLst/>
@@ -14132,8 +14132,8 @@
         </p:nvSpPr>
         <p:spPr>
           <a:xfrm>
-            <a:off x="7922587" y="2990107"/>
-            <a:ext cx="301387" cy="301387"/>
+            <a:off x="8203096" y="2954038"/>
+            <a:ext cx="245448" cy="245448"/>
           </a:xfrm>
           <a:prstGeom prst="ellipse">
             <a:avLst/>
@@ -14157,8 +14157,8 @@
         </p:nvSpPr>
         <p:spPr>
           <a:xfrm>
-            <a:off x="8009350" y="3076870"/>
-            <a:ext cx="127861" cy="127861"/>
+            <a:off x="8273755" y="3024697"/>
+            <a:ext cx="104129" cy="104129"/>
           </a:xfrm>
           <a:prstGeom prst="ellipse">
             <a:avLst/>
@@ -14182,8 +14182,8 @@
         </p:nvSpPr>
         <p:spPr>
           <a:xfrm flipV="1">
-            <a:off x="2811691" y="2334057"/>
-            <a:ext cx="0" cy="365318"/>
+            <a:off x="3116045" y="2298271"/>
+            <a:ext cx="0" cy="416518"/>
           </a:xfrm>
           <a:prstGeom prst="line">
             <a:avLst/>
@@ -14205,8 +14205,8 @@
         </p:nvSpPr>
         <p:spPr>
           <a:xfrm flipV="1">
-            <a:off x="640080" y="1755637"/>
-            <a:ext cx="0" cy="2029543"/>
+            <a:off x="640080" y="1638785"/>
+            <a:ext cx="0" cy="2313986"/>
           </a:xfrm>
           <a:prstGeom prst="line">
             <a:avLst/>
@@ -14228,8 +14228,8 @@
         </p:nvSpPr>
         <p:spPr>
           <a:xfrm flipV="1">
-            <a:off x="1147466" y="1755637"/>
-            <a:ext cx="0" cy="2029543"/>
+            <a:off x="1218577" y="1638785"/>
+            <a:ext cx="0" cy="2313986"/>
           </a:xfrm>
           <a:prstGeom prst="line">
             <a:avLst/>
@@ -14251,8 +14251,8 @@
         </p:nvSpPr>
         <p:spPr>
           <a:xfrm flipV="1">
-            <a:off x="1654851" y="1755637"/>
-            <a:ext cx="0" cy="2029543"/>
+            <a:off x="1797073" y="1638785"/>
+            <a:ext cx="0" cy="2313986"/>
           </a:xfrm>
           <a:prstGeom prst="line">
             <a:avLst/>
@@ -14274,8 +14274,8 @@
         </p:nvSpPr>
         <p:spPr>
           <a:xfrm flipV="1">
-            <a:off x="2162237" y="1755637"/>
-            <a:ext cx="0" cy="2029543"/>
+            <a:off x="2375570" y="1638785"/>
+            <a:ext cx="0" cy="2313986"/>
           </a:xfrm>
           <a:prstGeom prst="line">
             <a:avLst/>
@@ -14297,8 +14297,8 @@
         </p:nvSpPr>
         <p:spPr>
           <a:xfrm flipV="1">
-            <a:off x="2669623" y="1755637"/>
-            <a:ext cx="0" cy="2029543"/>
+            <a:off x="2954066" y="1638785"/>
+            <a:ext cx="0" cy="2313986"/>
           </a:xfrm>
           <a:prstGeom prst="line">
             <a:avLst/>
@@ -14320,8 +14320,8 @@
         </p:nvSpPr>
         <p:spPr>
           <a:xfrm flipV="1">
-            <a:off x="3177008" y="1755637"/>
-            <a:ext cx="0" cy="2029543"/>
+            <a:off x="3532563" y="1638785"/>
+            <a:ext cx="0" cy="2313986"/>
           </a:xfrm>
           <a:prstGeom prst="line">
             <a:avLst/>
@@ -14343,8 +14343,8 @@
         </p:nvSpPr>
         <p:spPr>
           <a:xfrm flipV="1">
-            <a:off x="3684394" y="1755637"/>
-            <a:ext cx="0" cy="2029543"/>
+            <a:off x="4111059" y="1638785"/>
+            <a:ext cx="0" cy="2313986"/>
           </a:xfrm>
           <a:prstGeom prst="line">
             <a:avLst/>
@@ -14366,8 +14366,8 @@
         </p:nvSpPr>
         <p:spPr>
           <a:xfrm flipV="1">
-            <a:off x="4191780" y="1755637"/>
-            <a:ext cx="0" cy="2029543"/>
+            <a:off x="4689556" y="1638785"/>
+            <a:ext cx="0" cy="2313986"/>
           </a:xfrm>
           <a:prstGeom prst="line">
             <a:avLst/>
@@ -14389,8 +14389,8 @@
         </p:nvSpPr>
         <p:spPr>
           <a:xfrm flipV="1">
-            <a:off x="4699165" y="1755637"/>
-            <a:ext cx="0" cy="2029543"/>
+            <a:off x="5268052" y="1638785"/>
+            <a:ext cx="0" cy="2313986"/>
           </a:xfrm>
           <a:prstGeom prst="line">
             <a:avLst/>
@@ -14412,8 +14412,8 @@
         </p:nvSpPr>
         <p:spPr>
           <a:xfrm flipV="1">
-            <a:off x="5206551" y="1755637"/>
-            <a:ext cx="0" cy="2029543"/>
+            <a:off x="5846549" y="1638785"/>
+            <a:ext cx="0" cy="2313986"/>
           </a:xfrm>
           <a:prstGeom prst="line">
             <a:avLst/>
@@ -14435,8 +14435,8 @@
         </p:nvSpPr>
         <p:spPr>
           <a:xfrm flipV="1">
-            <a:off x="5713937" y="1755637"/>
-            <a:ext cx="0" cy="2029543"/>
+            <a:off x="6425045" y="1638785"/>
+            <a:ext cx="0" cy="2313986"/>
           </a:xfrm>
           <a:prstGeom prst="line">
             <a:avLst/>
@@ -14458,8 +14458,8 @@
         </p:nvSpPr>
         <p:spPr>
           <a:xfrm>
-            <a:off x="640080" y="3785180"/>
-            <a:ext cx="5073857" cy="0"/>
+            <a:off x="640080" y="3952771"/>
+            <a:ext cx="5784965" cy="0"/>
           </a:xfrm>
           <a:prstGeom prst="line">
             <a:avLst/>
@@ -14481,8 +14481,8 @@
         </p:nvSpPr>
         <p:spPr>
           <a:xfrm>
-            <a:off x="640080" y="3277794"/>
-            <a:ext cx="5073857" cy="0"/>
+            <a:off x="640080" y="3374275"/>
+            <a:ext cx="5784965" cy="0"/>
           </a:xfrm>
           <a:prstGeom prst="line">
             <a:avLst/>
@@ -14504,8 +14504,8 @@
         </p:nvSpPr>
         <p:spPr>
           <a:xfrm>
-            <a:off x="640080" y="2770409"/>
-            <a:ext cx="5073857" cy="0"/>
+            <a:off x="640080" y="2795778"/>
+            <a:ext cx="5784965" cy="0"/>
           </a:xfrm>
           <a:prstGeom prst="line">
             <a:avLst/>
@@ -14527,8 +14527,8 @@
         </p:nvSpPr>
         <p:spPr>
           <a:xfrm>
-            <a:off x="640080" y="2263023"/>
-            <a:ext cx="5073857" cy="0"/>
+            <a:off x="640080" y="2217281"/>
+            <a:ext cx="5784965" cy="0"/>
           </a:xfrm>
           <a:prstGeom prst="line">
             <a:avLst/>
@@ -14550,8 +14550,8 @@
         </p:nvSpPr>
         <p:spPr>
           <a:xfrm>
-            <a:off x="640080" y="1755637"/>
-            <a:ext cx="5073857" cy="0"/>
+            <a:off x="640080" y="1638785"/>
+            <a:ext cx="5784965" cy="0"/>
           </a:xfrm>
           <a:prstGeom prst="line">
             <a:avLst/>
@@ -14573,8 +14573,8 @@
         </p:nvSpPr>
         <p:spPr>
           <a:xfrm flipV="1">
-            <a:off x="6677970" y="2339131"/>
-            <a:ext cx="0" cy="862556"/>
+            <a:off x="7210148" y="2444548"/>
+            <a:ext cx="0" cy="702460"/>
           </a:xfrm>
           <a:prstGeom prst="line">
             <a:avLst/>
@@ -14597,8 +14597,8 @@
         </p:nvSpPr>
         <p:spPr>
           <a:xfrm>
-            <a:off x="6246692" y="2770409"/>
-            <a:ext cx="862556" cy="0"/>
+            <a:off x="6858918" y="2795778"/>
+            <a:ext cx="702460" cy="0"/>
           </a:xfrm>
           <a:prstGeom prst="line">
             <a:avLst/>
@@ -14620,8 +14620,8 @@
         </p:nvSpPr>
         <p:spPr>
           <a:xfrm flipV="1">
-            <a:off x="7972818" y="2063113"/>
-            <a:ext cx="0" cy="328786"/>
+            <a:off x="8244004" y="2199100"/>
+            <a:ext cx="0" cy="267761"/>
           </a:xfrm>
           <a:prstGeom prst="line">
             <a:avLst/>
@@ -14643,7 +14643,7 @@
         </p:nvSpPr>
         <p:spPr>
           <a:xfrm>
-            <a:off x="6473754" y="1920307"/>
+            <a:off x="7005932" y="2068103"/>
             <a:ext cx="408432" cy="381000"/>
           </a:xfrm>
           <a:prstGeom prst="rect">
@@ -14682,7 +14682,7 @@
         </p:nvSpPr>
         <p:spPr>
           <a:xfrm>
-            <a:off x="6473754" y="3239510"/>
+            <a:off x="7005932" y="3142453"/>
             <a:ext cx="408432" cy="381000"/>
           </a:xfrm>
           <a:prstGeom prst="rect">
@@ -14721,7 +14721,7 @@
         </p:nvSpPr>
         <p:spPr>
           <a:xfrm>
-            <a:off x="7133355" y="2579909"/>
+            <a:off x="7543107" y="2605278"/>
             <a:ext cx="408432" cy="381000"/>
           </a:xfrm>
           <a:prstGeom prst="rect">
@@ -14760,7 +14760,7 @@
         </p:nvSpPr>
         <p:spPr>
           <a:xfrm>
-            <a:off x="5814152" y="2579909"/>
+            <a:off x="6468757" y="2605278"/>
             <a:ext cx="408432" cy="381000"/>
           </a:xfrm>
           <a:prstGeom prst="rect">
@@ -14799,7 +14799,7 @@
         </p:nvSpPr>
         <p:spPr>
           <a:xfrm>
-            <a:off x="9267238" y="1653930"/>
+            <a:off x="9439154" y="1830506"/>
             <a:ext cx="707136" cy="381000"/>
           </a:xfrm>
           <a:prstGeom prst="rect">
@@ -14838,7 +14838,7 @@
         </p:nvSpPr>
         <p:spPr>
           <a:xfrm>
-            <a:off x="8556898" y="2037006"/>
+            <a:off x="8798675" y="2142481"/>
             <a:ext cx="707136" cy="381000"/>
           </a:xfrm>
           <a:prstGeom prst="rect">
@@ -14877,7 +14877,7 @@
         </p:nvSpPr>
         <p:spPr>
           <a:xfrm>
-            <a:off x="10484964" y="2037006"/>
+            <a:off x="10534165" y="2142481"/>
             <a:ext cx="707136" cy="381000"/>
           </a:xfrm>
           <a:prstGeom prst="rect">
@@ -14916,7 +14916,7 @@
         </p:nvSpPr>
         <p:spPr>
           <a:xfrm>
-            <a:off x="8556898" y="2493653"/>
+            <a:off x="8798675" y="2514371"/>
             <a:ext cx="707136" cy="381000"/>
           </a:xfrm>
           <a:prstGeom prst="rect">
@@ -14955,7 +14955,7 @@
         </p:nvSpPr>
         <p:spPr>
           <a:xfrm>
-            <a:off x="10335612" y="2493653"/>
+            <a:off x="10384813" y="2514371"/>
             <a:ext cx="1005840" cy="381000"/>
           </a:xfrm>
           <a:prstGeom prst="rect">
@@ -14994,7 +14994,7 @@
         </p:nvSpPr>
         <p:spPr>
           <a:xfrm>
-            <a:off x="8258194" y="2950300"/>
+            <a:off x="8499971" y="2886262"/>
             <a:ext cx="1304544" cy="381000"/>
           </a:xfrm>
           <a:prstGeom prst="rect">
@@ -15033,7 +15033,7 @@
         </p:nvSpPr>
         <p:spPr>
           <a:xfrm>
-            <a:off x="10484964" y="2950300"/>
+            <a:off x="10534165" y="2886262"/>
             <a:ext cx="707136" cy="381000"/>
           </a:xfrm>
           <a:prstGeom prst="rect">
@@ -15072,7 +15072,7 @@
         </p:nvSpPr>
         <p:spPr>
           <a:xfrm>
-            <a:off x="8706250" y="3406947"/>
+            <a:off x="8948027" y="3258153"/>
             <a:ext cx="408432" cy="381000"/>
           </a:xfrm>
           <a:prstGeom prst="rect">
@@ -16387,8 +16387,8 @@
         </p:nvSpPr>
         <p:spPr>
           <a:xfrm>
-            <a:off x="640080" y="3002819"/>
-            <a:ext cx="507386" cy="507386"/>
+            <a:off x="640080" y="3028188"/>
+            <a:ext cx="578497" cy="578497"/>
           </a:xfrm>
           <a:custGeom>
             <a:avLst/>
@@ -16397,15 +16397,15 @@
             <a:cxnLst/>
             <a:rect l="l" t="t" r="r" b="b"/>
             <a:pathLst>
-              <a:path w="507386" h="507386">
+              <a:path w="578497" h="578497">
                 <a:moveTo>
-                  <a:pt x="0" y="507386"/>
+                  <a:pt x="0" y="578497"/>
                 </a:moveTo>
                 <a:lnTo>
-                  <a:pt x="507386" y="507386"/>
-                </a:lnTo>
-                <a:lnTo>
-                  <a:pt x="507386" y="0"/>
+                  <a:pt x="578497" y="578497"/>
+                </a:lnTo>
+                <a:lnTo>
+                  <a:pt x="578497" y="0"/>
                 </a:lnTo>
                 <a:lnTo>
                   <a:pt x="0" y="0"/>
@@ -16428,8 +16428,8 @@
         </p:nvSpPr>
         <p:spPr>
           <a:xfrm>
-            <a:off x="1147466" y="3002819"/>
-            <a:ext cx="507386" cy="507386"/>
+            <a:off x="1218577" y="3028188"/>
+            <a:ext cx="578497" cy="578497"/>
           </a:xfrm>
           <a:custGeom>
             <a:avLst/>
@@ -16438,15 +16438,15 @@
             <a:cxnLst/>
             <a:rect l="l" t="t" r="r" b="b"/>
             <a:pathLst>
-              <a:path w="507386" h="507386">
+              <a:path w="578497" h="578497">
                 <a:moveTo>
-                  <a:pt x="0" y="507386"/>
+                  <a:pt x="0" y="578497"/>
                 </a:moveTo>
                 <a:lnTo>
-                  <a:pt x="507386" y="507386"/>
-                </a:lnTo>
-                <a:lnTo>
-                  <a:pt x="507386" y="0"/>
+                  <a:pt x="578497" y="578497"/>
+                </a:lnTo>
+                <a:lnTo>
+                  <a:pt x="578497" y="0"/>
                 </a:lnTo>
                 <a:lnTo>
                   <a:pt x="0" y="0"/>
@@ -16469,8 +16469,8 @@
         </p:nvSpPr>
         <p:spPr>
           <a:xfrm>
-            <a:off x="1654851" y="3002819"/>
-            <a:ext cx="507386" cy="507386"/>
+            <a:off x="1797073" y="3028188"/>
+            <a:ext cx="578497" cy="578497"/>
           </a:xfrm>
           <a:custGeom>
             <a:avLst/>
@@ -16479,15 +16479,15 @@
             <a:cxnLst/>
             <a:rect l="l" t="t" r="r" b="b"/>
             <a:pathLst>
-              <a:path w="507386" h="507386">
+              <a:path w="578497" h="578497">
                 <a:moveTo>
-                  <a:pt x="0" y="507386"/>
+                  <a:pt x="0" y="578497"/>
                 </a:moveTo>
                 <a:lnTo>
-                  <a:pt x="507386" y="507386"/>
-                </a:lnTo>
-                <a:lnTo>
-                  <a:pt x="507386" y="0"/>
+                  <a:pt x="578497" y="578497"/>
+                </a:lnTo>
+                <a:lnTo>
+                  <a:pt x="578497" y="0"/>
                 </a:lnTo>
                 <a:lnTo>
                   <a:pt x="0" y="0"/>
@@ -16510,8 +16510,8 @@
         </p:nvSpPr>
         <p:spPr>
           <a:xfrm>
-            <a:off x="2162237" y="3002819"/>
-            <a:ext cx="507386" cy="507386"/>
+            <a:off x="2375570" y="3028188"/>
+            <a:ext cx="578497" cy="578497"/>
           </a:xfrm>
           <a:custGeom>
             <a:avLst/>
@@ -16520,15 +16520,15 @@
             <a:cxnLst/>
             <a:rect l="l" t="t" r="r" b="b"/>
             <a:pathLst>
-              <a:path w="507386" h="507386">
+              <a:path w="578497" h="578497">
                 <a:moveTo>
-                  <a:pt x="0" y="507386"/>
+                  <a:pt x="0" y="578497"/>
                 </a:moveTo>
                 <a:lnTo>
-                  <a:pt x="507386" y="507386"/>
-                </a:lnTo>
-                <a:lnTo>
-                  <a:pt x="507386" y="0"/>
+                  <a:pt x="578497" y="578497"/>
+                </a:lnTo>
+                <a:lnTo>
+                  <a:pt x="578497" y="0"/>
                 </a:lnTo>
                 <a:lnTo>
                   <a:pt x="0" y="0"/>
@@ -16551,8 +16551,8 @@
         </p:nvSpPr>
         <p:spPr>
           <a:xfrm>
-            <a:off x="2669623" y="3002819"/>
-            <a:ext cx="507386" cy="507386"/>
+            <a:off x="2954066" y="3028188"/>
+            <a:ext cx="578497" cy="578497"/>
           </a:xfrm>
           <a:custGeom>
             <a:avLst/>
@@ -16561,15 +16561,15 @@
             <a:cxnLst/>
             <a:rect l="l" t="t" r="r" b="b"/>
             <a:pathLst>
-              <a:path w="507386" h="507386">
+              <a:path w="578497" h="578497">
                 <a:moveTo>
-                  <a:pt x="0" y="507386"/>
+                  <a:pt x="0" y="578497"/>
                 </a:moveTo>
                 <a:lnTo>
-                  <a:pt x="507386" y="507386"/>
-                </a:lnTo>
-                <a:lnTo>
-                  <a:pt x="507386" y="0"/>
+                  <a:pt x="578497" y="578497"/>
+                </a:lnTo>
+                <a:lnTo>
+                  <a:pt x="578497" y="0"/>
                 </a:lnTo>
                 <a:lnTo>
                   <a:pt x="0" y="0"/>
@@ -16592,8 +16592,8 @@
         </p:nvSpPr>
         <p:spPr>
           <a:xfrm>
-            <a:off x="3177008" y="3002819"/>
-            <a:ext cx="507386" cy="507386"/>
+            <a:off x="3532563" y="3028188"/>
+            <a:ext cx="578497" cy="578497"/>
           </a:xfrm>
           <a:custGeom>
             <a:avLst/>
@@ -16602,15 +16602,15 @@
             <a:cxnLst/>
             <a:rect l="l" t="t" r="r" b="b"/>
             <a:pathLst>
-              <a:path w="507386" h="507386">
+              <a:path w="578497" h="578497">
                 <a:moveTo>
-                  <a:pt x="0" y="507386"/>
+                  <a:pt x="0" y="578497"/>
                 </a:moveTo>
                 <a:lnTo>
-                  <a:pt x="507386" y="507386"/>
-                </a:lnTo>
-                <a:lnTo>
-                  <a:pt x="507386" y="0"/>
+                  <a:pt x="578497" y="578497"/>
+                </a:lnTo>
+                <a:lnTo>
+                  <a:pt x="578497" y="0"/>
                 </a:lnTo>
                 <a:lnTo>
                   <a:pt x="0" y="0"/>
@@ -16633,8 +16633,8 @@
         </p:nvSpPr>
         <p:spPr>
           <a:xfrm>
-            <a:off x="3684394" y="3002819"/>
-            <a:ext cx="507386" cy="507386"/>
+            <a:off x="4111059" y="3028188"/>
+            <a:ext cx="578497" cy="578497"/>
           </a:xfrm>
           <a:custGeom>
             <a:avLst/>
@@ -16643,15 +16643,15 @@
             <a:cxnLst/>
             <a:rect l="l" t="t" r="r" b="b"/>
             <a:pathLst>
-              <a:path w="507386" h="507386">
+              <a:path w="578497" h="578497">
                 <a:moveTo>
-                  <a:pt x="0" y="507386"/>
+                  <a:pt x="0" y="578497"/>
                 </a:moveTo>
                 <a:lnTo>
-                  <a:pt x="507386" y="507386"/>
-                </a:lnTo>
-                <a:lnTo>
-                  <a:pt x="507386" y="0"/>
+                  <a:pt x="578497" y="578497"/>
+                </a:lnTo>
+                <a:lnTo>
+                  <a:pt x="578497" y="0"/>
                 </a:lnTo>
                 <a:lnTo>
                   <a:pt x="0" y="0"/>
@@ -16674,8 +16674,8 @@
         </p:nvSpPr>
         <p:spPr>
           <a:xfrm>
-            <a:off x="4191780" y="3002819"/>
-            <a:ext cx="507386" cy="507386"/>
+            <a:off x="4689556" y="3028188"/>
+            <a:ext cx="578497" cy="578497"/>
           </a:xfrm>
           <a:custGeom>
             <a:avLst/>
@@ -16684,15 +16684,15 @@
             <a:cxnLst/>
             <a:rect l="l" t="t" r="r" b="b"/>
             <a:pathLst>
-              <a:path w="507386" h="507386">
+              <a:path w="578497" h="578497">
                 <a:moveTo>
-                  <a:pt x="0" y="507386"/>
+                  <a:pt x="0" y="578497"/>
                 </a:moveTo>
                 <a:lnTo>
-                  <a:pt x="507386" y="507386"/>
-                </a:lnTo>
-                <a:lnTo>
-                  <a:pt x="507386" y="0"/>
+                  <a:pt x="578497" y="578497"/>
+                </a:lnTo>
+                <a:lnTo>
+                  <a:pt x="578497" y="0"/>
                 </a:lnTo>
                 <a:lnTo>
                   <a:pt x="0" y="0"/>
@@ -16715,8 +16715,8 @@
         </p:nvSpPr>
         <p:spPr>
           <a:xfrm>
-            <a:off x="4699165" y="3002819"/>
-            <a:ext cx="507386" cy="507386"/>
+            <a:off x="5268052" y="3028188"/>
+            <a:ext cx="578497" cy="578497"/>
           </a:xfrm>
           <a:custGeom>
             <a:avLst/>
@@ -16725,15 +16725,15 @@
             <a:cxnLst/>
             <a:rect l="l" t="t" r="r" b="b"/>
             <a:pathLst>
-              <a:path w="507386" h="507386">
+              <a:path w="578497" h="578497">
                 <a:moveTo>
-                  <a:pt x="0" y="507386"/>
+                  <a:pt x="0" y="578497"/>
                 </a:moveTo>
                 <a:lnTo>
-                  <a:pt x="507386" y="507386"/>
-                </a:lnTo>
-                <a:lnTo>
-                  <a:pt x="507386" y="0"/>
+                  <a:pt x="578497" y="578497"/>
+                </a:lnTo>
+                <a:lnTo>
+                  <a:pt x="578497" y="0"/>
                 </a:lnTo>
                 <a:lnTo>
                   <a:pt x="0" y="0"/>
@@ -16756,8 +16756,8 @@
         </p:nvSpPr>
         <p:spPr>
           <a:xfrm>
-            <a:off x="5206551" y="3002819"/>
-            <a:ext cx="507386" cy="507386"/>
+            <a:off x="5846549" y="3028188"/>
+            <a:ext cx="578497" cy="578497"/>
           </a:xfrm>
           <a:custGeom>
             <a:avLst/>
@@ -16766,15 +16766,15 @@
             <a:cxnLst/>
             <a:rect l="l" t="t" r="r" b="b"/>
             <a:pathLst>
-              <a:path w="507386" h="507386">
+              <a:path w="578497" h="578497">
                 <a:moveTo>
-                  <a:pt x="0" y="507386"/>
+                  <a:pt x="0" y="578497"/>
                 </a:moveTo>
                 <a:lnTo>
-                  <a:pt x="507386" y="507386"/>
-                </a:lnTo>
-                <a:lnTo>
-                  <a:pt x="507386" y="0"/>
+                  <a:pt x="578497" y="578497"/>
+                </a:lnTo>
+                <a:lnTo>
+                  <a:pt x="578497" y="0"/>
                 </a:lnTo>
                 <a:lnTo>
                   <a:pt x="0" y="0"/>
@@ -16797,8 +16797,8 @@
         </p:nvSpPr>
         <p:spPr>
           <a:xfrm>
-            <a:off x="1218500" y="2586762"/>
-            <a:ext cx="182659" cy="314579"/>
+            <a:off x="1299566" y="2553821"/>
+            <a:ext cx="208259" cy="358668"/>
           </a:xfrm>
           <a:custGeom>
             <a:avLst/>
@@ -16807,15 +16807,15 @@
             <a:cxnLst/>
             <a:rect l="l" t="t" r="r" b="b"/>
             <a:pathLst>
-              <a:path w="182659" h="314579">
+              <a:path w="208259" h="358668">
                 <a:moveTo>
-                  <a:pt x="0" y="273988"/>
+                  <a:pt x="0" y="312388"/>
                 </a:moveTo>
                 <a:lnTo>
-                  <a:pt x="182659" y="314579"/>
-                </a:lnTo>
-                <a:lnTo>
-                  <a:pt x="182659" y="40591"/>
+                  <a:pt x="208259" y="358668"/>
+                </a:lnTo>
+                <a:lnTo>
+                  <a:pt x="208259" y="46280"/>
                 </a:lnTo>
                 <a:lnTo>
                   <a:pt x="0" y="0"/>
@@ -16843,8 +16843,8 @@
         </p:nvSpPr>
         <p:spPr>
           <a:xfrm>
-            <a:off x="1401159" y="2586762"/>
-            <a:ext cx="182659" cy="314579"/>
+            <a:off x="1507825" y="2553821"/>
+            <a:ext cx="208259" cy="358668"/>
           </a:xfrm>
           <a:custGeom>
             <a:avLst/>
@@ -16853,18 +16853,18 @@
             <a:cxnLst/>
             <a:rect l="l" t="t" r="r" b="b"/>
             <a:pathLst>
-              <a:path w="182659" h="314579">
+              <a:path w="208259" h="358668">
                 <a:moveTo>
-                  <a:pt x="182659" y="273988"/>
+                  <a:pt x="208259" y="312388"/>
                 </a:moveTo>
                 <a:lnTo>
-                  <a:pt x="0" y="314579"/>
-                </a:lnTo>
-                <a:lnTo>
-                  <a:pt x="0" y="40591"/>
-                </a:lnTo>
-                <a:lnTo>
-                  <a:pt x="182659" y="0"/>
+                  <a:pt x="0" y="358668"/>
+                </a:lnTo>
+                <a:lnTo>
+                  <a:pt x="0" y="46280"/>
+                </a:lnTo>
+                <a:lnTo>
+                  <a:pt x="208259" y="0"/>
                 </a:lnTo>
                 <a:close/>
               </a:path>
@@ -16889,8 +16889,8 @@
         </p:nvSpPr>
         <p:spPr>
           <a:xfrm>
-            <a:off x="2811691" y="2566467"/>
-            <a:ext cx="273988" cy="162363"/>
+            <a:off x="3116045" y="2530681"/>
+            <a:ext cx="312388" cy="185119"/>
           </a:xfrm>
           <a:custGeom>
             <a:avLst/>
@@ -16899,15 +16899,15 @@
             <a:cxnLst/>
             <a:rect l="l" t="t" r="r" b="b"/>
             <a:pathLst>
-              <a:path w="273988" h="162363">
+              <a:path w="312388" h="185119">
                 <a:moveTo>
                   <a:pt x="0" y="0"/>
                 </a:moveTo>
                 <a:lnTo>
-                  <a:pt x="273988" y="81182"/>
-                </a:lnTo>
-                <a:lnTo>
-                  <a:pt x="0" y="162363"/>
+                  <a:pt x="312388" y="92559"/>
+                </a:lnTo>
+                <a:lnTo>
+                  <a:pt x="0" y="185119"/>
                 </a:lnTo>
                 <a:close/>
               </a:path>
@@ -16932,8 +16932,8 @@
         </p:nvSpPr>
         <p:spPr>
           <a:xfrm>
-            <a:off x="2887799" y="2302626"/>
-            <a:ext cx="71034" cy="131920"/>
+            <a:off x="3202820" y="2229863"/>
+            <a:ext cx="80990" cy="150409"/>
           </a:xfrm>
           <a:custGeom>
             <a:avLst/>
@@ -16942,15 +16942,15 @@
             <a:cxnLst/>
             <a:rect l="l" t="t" r="r" b="b"/>
             <a:pathLst>
-              <a:path w="71034" h="131920">
+              <a:path w="80990" h="150409">
                 <a:moveTo>
-                  <a:pt x="0" y="131920"/>
+                  <a:pt x="0" y="150409"/>
                 </a:moveTo>
                 <a:lnTo>
-                  <a:pt x="71034" y="131920"/>
-                </a:lnTo>
-                <a:lnTo>
-                  <a:pt x="71034" y="0"/>
+                  <a:pt x="80990" y="150409"/>
+                </a:lnTo>
+                <a:lnTo>
+                  <a:pt x="80990" y="0"/>
                 </a:lnTo>
                 <a:lnTo>
                   <a:pt x="0" y="0"/>
@@ -16978,8 +16978,8 @@
         </p:nvSpPr>
         <p:spPr>
           <a:xfrm>
-            <a:off x="2760952" y="2038786"/>
-            <a:ext cx="324727" cy="263841"/>
+            <a:off x="3058196" y="1929045"/>
+            <a:ext cx="370238" cy="300818"/>
           </a:xfrm>
           <a:custGeom>
             <a:avLst/>
@@ -16988,15 +16988,15 @@
             <a:cxnLst/>
             <a:rect l="l" t="t" r="r" b="b"/>
             <a:pathLst>
-              <a:path w="324727" h="263841">
+              <a:path w="370238" h="300818">
                 <a:moveTo>
-                  <a:pt x="0" y="263841"/>
+                  <a:pt x="0" y="300818"/>
                 </a:moveTo>
                 <a:lnTo>
-                  <a:pt x="324727" y="263841"/>
-                </a:lnTo>
-                <a:lnTo>
-                  <a:pt x="162363" y="0"/>
+                  <a:pt x="370238" y="300818"/>
+                </a:lnTo>
+                <a:lnTo>
+                  <a:pt x="185119" y="0"/>
                 </a:lnTo>
                 <a:close/>
               </a:path>
@@ -17021,8 +17021,8 @@
         </p:nvSpPr>
         <p:spPr>
           <a:xfrm>
-            <a:off x="2329674" y="3591386"/>
-            <a:ext cx="172511" cy="131920"/>
+            <a:off x="2566473" y="3699244"/>
+            <a:ext cx="196689" cy="150409"/>
           </a:xfrm>
           <a:custGeom>
             <a:avLst/>
@@ -17031,27 +17031,27 @@
             <a:cxnLst/>
             <a:rect l="l" t="t" r="r" b="b"/>
             <a:pathLst>
-              <a:path w="172511" h="131920">
+              <a:path w="196689" h="150409">
                 <a:moveTo>
-                  <a:pt x="172511" y="131920"/>
+                  <a:pt x="196689" y="150409"/>
                 </a:moveTo>
                 <a:lnTo>
-                  <a:pt x="160841" y="65960"/>
-                </a:lnTo>
-                <a:lnTo>
-                  <a:pt x="129383" y="17758"/>
-                </a:lnTo>
-                <a:lnTo>
-                  <a:pt x="86256" y="0"/>
-                </a:lnTo>
-                <a:lnTo>
-                  <a:pt x="43128" y="17758"/>
-                </a:lnTo>
-                <a:lnTo>
-                  <a:pt x="11670" y="65960"/>
-                </a:lnTo>
-                <a:lnTo>
-                  <a:pt x="0" y="131920"/>
+                  <a:pt x="183466" y="75205"/>
+                </a:lnTo>
+                <a:lnTo>
+                  <a:pt x="147517" y="20247"/>
+                </a:lnTo>
+                <a:lnTo>
+                  <a:pt x="98344" y="0"/>
+                </a:lnTo>
+                <a:lnTo>
+                  <a:pt x="49172" y="20247"/>
+                </a:lnTo>
+                <a:lnTo>
+                  <a:pt x="13223" y="75205"/>
+                </a:lnTo>
+                <a:lnTo>
+                  <a:pt x="0" y="150409"/>
                 </a:lnTo>
               </a:path>
             </a:pathLst>
@@ -17073,8 +17073,8 @@
         </p:nvSpPr>
         <p:spPr>
           <a:xfrm>
-            <a:off x="2248493" y="3723306"/>
-            <a:ext cx="334875" cy="223250"/>
+            <a:off x="2473914" y="3849653"/>
+            <a:ext cx="381808" cy="254538"/>
           </a:xfrm>
           <a:custGeom>
             <a:avLst/>
@@ -17083,18 +17083,18 @@
             <a:cxnLst/>
             <a:rect l="l" t="t" r="r" b="b"/>
             <a:pathLst>
-              <a:path w="334875" h="223250">
+              <a:path w="381808" h="254538">
                 <a:moveTo>
                   <a:pt x="0" y="0"/>
                 </a:moveTo>
                 <a:lnTo>
-                  <a:pt x="334875" y="0"/>
-                </a:lnTo>
-                <a:lnTo>
-                  <a:pt x="294284" y="223250"/>
-                </a:lnTo>
-                <a:lnTo>
-                  <a:pt x="40591" y="223250"/>
+                  <a:pt x="381808" y="0"/>
+                </a:lnTo>
+                <a:lnTo>
+                  <a:pt x="335528" y="254538"/>
+                </a:lnTo>
+                <a:lnTo>
+                  <a:pt x="46280" y="254538"/>
                 </a:lnTo>
                 <a:close/>
               </a:path>
@@ -17119,8 +17119,8 @@
         </p:nvSpPr>
         <p:spPr>
           <a:xfrm>
-            <a:off x="2771100" y="3571091"/>
-            <a:ext cx="304431" cy="375465"/>
+            <a:off x="3069765" y="3676104"/>
+            <a:ext cx="347098" cy="428087"/>
           </a:xfrm>
           <a:custGeom>
             <a:avLst/>
@@ -17129,21 +17129,21 @@
             <a:cxnLst/>
             <a:rect l="l" t="t" r="r" b="b"/>
             <a:pathLst>
-              <a:path w="304431" h="375465">
+              <a:path w="347098" h="428087">
                 <a:moveTo>
-                  <a:pt x="0" y="375465"/>
+                  <a:pt x="0" y="428087"/>
                 </a:moveTo>
                 <a:lnTo>
-                  <a:pt x="304431" y="375465"/>
-                </a:lnTo>
-                <a:lnTo>
-                  <a:pt x="304431" y="172511"/>
-                </a:lnTo>
-                <a:lnTo>
-                  <a:pt x="152216" y="0"/>
-                </a:lnTo>
-                <a:lnTo>
-                  <a:pt x="0" y="172511"/>
+                  <a:pt x="347098" y="428087"/>
+                </a:lnTo>
+                <a:lnTo>
+                  <a:pt x="347098" y="196689"/>
+                </a:lnTo>
+                <a:lnTo>
+                  <a:pt x="173549" y="0"/>
+                </a:lnTo>
+                <a:lnTo>
+                  <a:pt x="0" y="196689"/>
                 </a:lnTo>
                 <a:close/>
               </a:path>
@@ -17168,8 +17168,8 @@
         </p:nvSpPr>
         <p:spPr>
           <a:xfrm>
-            <a:off x="4785421" y="3596460"/>
-            <a:ext cx="334875" cy="334875"/>
+            <a:off x="5366397" y="3705029"/>
+            <a:ext cx="381808" cy="381808"/>
           </a:xfrm>
           <a:custGeom>
             <a:avLst/>
@@ -17178,42 +17178,42 @@
             <a:cxnLst/>
             <a:rect l="l" t="t" r="r" b="b"/>
             <a:pathLst>
-              <a:path w="334875" h="334875">
+              <a:path w="381808" h="381808">
                 <a:moveTo>
-                  <a:pt x="116699" y="334875"/>
+                  <a:pt x="133054" y="381808"/>
                 </a:moveTo>
                 <a:lnTo>
-                  <a:pt x="218176" y="334875"/>
-                </a:lnTo>
-                <a:lnTo>
-                  <a:pt x="218176" y="218176"/>
-                </a:lnTo>
-                <a:lnTo>
-                  <a:pt x="334875" y="218176"/>
-                </a:lnTo>
-                <a:lnTo>
-                  <a:pt x="334875" y="116699"/>
-                </a:lnTo>
-                <a:lnTo>
-                  <a:pt x="218176" y="116699"/>
-                </a:lnTo>
-                <a:lnTo>
-                  <a:pt x="218176" y="0"/>
-                </a:lnTo>
-                <a:lnTo>
-                  <a:pt x="116699" y="0"/>
-                </a:lnTo>
-                <a:lnTo>
-                  <a:pt x="116699" y="116699"/>
-                </a:lnTo>
-                <a:lnTo>
-                  <a:pt x="0" y="116699"/>
-                </a:lnTo>
-                <a:lnTo>
-                  <a:pt x="0" y="218176"/>
-                </a:lnTo>
-                <a:lnTo>
-                  <a:pt x="116699" y="218176"/>
+                  <a:pt x="248754" y="381808"/>
+                </a:lnTo>
+                <a:lnTo>
+                  <a:pt x="248754" y="248754"/>
+                </a:lnTo>
+                <a:lnTo>
+                  <a:pt x="381808" y="248754"/>
+                </a:lnTo>
+                <a:lnTo>
+                  <a:pt x="381808" y="133054"/>
+                </a:lnTo>
+                <a:lnTo>
+                  <a:pt x="248754" y="133054"/>
+                </a:lnTo>
+                <a:lnTo>
+                  <a:pt x="248754" y="0"/>
+                </a:lnTo>
+                <a:lnTo>
+                  <a:pt x="133054" y="0"/>
+                </a:lnTo>
+                <a:lnTo>
+                  <a:pt x="133054" y="133054"/>
+                </a:lnTo>
+                <a:lnTo>
+                  <a:pt x="0" y="133054"/>
+                </a:lnTo>
+                <a:lnTo>
+                  <a:pt x="0" y="248754"/>
+                </a:lnTo>
+                <a:lnTo>
+                  <a:pt x="133054" y="248754"/>
                 </a:lnTo>
                 <a:close/>
               </a:path>
@@ -17238,8 +17238,8 @@
         </p:nvSpPr>
         <p:spPr>
           <a:xfrm>
-            <a:off x="640080" y="1988047"/>
-            <a:ext cx="5073857" cy="2029543"/>
+            <a:off x="640080" y="1871195"/>
+            <a:ext cx="5784965" cy="2313986"/>
           </a:xfrm>
           <a:custGeom>
             <a:avLst/>
@@ -17248,15 +17248,15 @@
             <a:cxnLst/>
             <a:rect l="l" t="t" r="r" b="b"/>
             <a:pathLst>
-              <a:path w="5073857" h="2029543">
+              <a:path w="5784965" h="2313986">
                 <a:moveTo>
-                  <a:pt x="0" y="2029543"/>
+                  <a:pt x="0" y="2313986"/>
                 </a:moveTo>
                 <a:lnTo>
-                  <a:pt x="5073857" y="2029543"/>
-                </a:lnTo>
-                <a:lnTo>
-                  <a:pt x="5073857" y="0"/>
+                  <a:pt x="5784965" y="2313986"/>
+                </a:lnTo>
+                <a:lnTo>
+                  <a:pt x="5784965" y="0"/>
                 </a:lnTo>
                 <a:lnTo>
                   <a:pt x="0" y="0"/>
@@ -17282,8 +17282,8 @@
         </p:nvSpPr>
         <p:spPr>
           <a:xfrm>
-            <a:off x="7692741" y="1886570"/>
-            <a:ext cx="3856131" cy="2283236"/>
+            <a:off x="8036572" y="2098461"/>
+            <a:ext cx="3512300" cy="1859453"/>
           </a:xfrm>
           <a:custGeom>
             <a:avLst/>
@@ -17292,15 +17292,15 @@
             <a:cxnLst/>
             <a:rect l="l" t="t" r="r" b="b"/>
             <a:pathLst>
-              <a:path w="3856131" h="2283236">
+              <a:path w="3512300" h="1859453">
                 <a:moveTo>
-                  <a:pt x="0" y="2283236"/>
+                  <a:pt x="0" y="1859453"/>
                 </a:moveTo>
                 <a:lnTo>
-                  <a:pt x="3856131" y="2283236"/>
-                </a:lnTo>
-                <a:lnTo>
-                  <a:pt x="3856131" y="0"/>
+                  <a:pt x="3512300" y="1859453"/>
+                </a:lnTo>
+                <a:lnTo>
+                  <a:pt x="3512300" y="0"/>
                 </a:lnTo>
                 <a:lnTo>
                   <a:pt x="0" y="0"/>
@@ -17328,8 +17328,8 @@
         </p:nvSpPr>
         <p:spPr>
           <a:xfrm>
-            <a:off x="7692741" y="1886570"/>
-            <a:ext cx="3856131" cy="380539"/>
+            <a:off x="8036572" y="2098461"/>
+            <a:ext cx="3512300" cy="309909"/>
           </a:xfrm>
           <a:custGeom>
             <a:avLst/>
@@ -17338,15 +17338,15 @@
             <a:cxnLst/>
             <a:rect l="l" t="t" r="r" b="b"/>
             <a:pathLst>
-              <a:path w="3856131" h="380539">
+              <a:path w="3512300" h="309909">
                 <a:moveTo>
-                  <a:pt x="0" y="380539"/>
+                  <a:pt x="0" y="309909"/>
                 </a:moveTo>
                 <a:lnTo>
-                  <a:pt x="3856131" y="380539"/>
-                </a:lnTo>
-                <a:lnTo>
-                  <a:pt x="3856131" y="0"/>
+                  <a:pt x="3512300" y="309909"/>
+                </a:lnTo>
+                <a:lnTo>
+                  <a:pt x="3512300" y="0"/>
                 </a:lnTo>
                 <a:lnTo>
                   <a:pt x="0" y="0"/>
@@ -17374,8 +17374,8 @@
         </p:nvSpPr>
         <p:spPr>
           <a:xfrm>
-            <a:off x="7972818" y="2295523"/>
-            <a:ext cx="246589" cy="146127"/>
+            <a:off x="8244004" y="2431510"/>
+            <a:ext cx="200821" cy="119005"/>
           </a:xfrm>
           <a:custGeom>
             <a:avLst/>
@@ -17384,15 +17384,15 @@
             <a:cxnLst/>
             <a:rect l="l" t="t" r="r" b="b"/>
             <a:pathLst>
-              <a:path w="246589" h="146127">
+              <a:path w="200821" h="119005">
                 <a:moveTo>
                   <a:pt x="0" y="0"/>
                 </a:moveTo>
                 <a:lnTo>
-                  <a:pt x="246589" y="73064"/>
-                </a:lnTo>
-                <a:lnTo>
-                  <a:pt x="0" y="146127"/>
+                  <a:pt x="200821" y="59503"/>
+                </a:lnTo>
+                <a:lnTo>
+                  <a:pt x="0" y="119005"/>
                 </a:lnTo>
                 <a:close/>
               </a:path>
@@ -17417,8 +17417,8 @@
         </p:nvSpPr>
         <p:spPr>
           <a:xfrm>
-            <a:off x="9850652" y="2309222"/>
-            <a:ext cx="301387" cy="301387"/>
+            <a:off x="9938586" y="2442667"/>
+            <a:ext cx="245448" cy="245448"/>
           </a:xfrm>
           <a:custGeom>
             <a:avLst/>
@@ -17427,42 +17427,42 @@
             <a:cxnLst/>
             <a:rect l="l" t="t" r="r" b="b"/>
             <a:pathLst>
-              <a:path w="301387" h="301387">
+              <a:path w="245448" h="245448">
                 <a:moveTo>
-                  <a:pt x="105029" y="301387"/>
+                  <a:pt x="85535" y="245448"/>
                 </a:moveTo>
                 <a:lnTo>
-                  <a:pt x="196358" y="301387"/>
-                </a:lnTo>
-                <a:lnTo>
-                  <a:pt x="196358" y="196358"/>
-                </a:lnTo>
-                <a:lnTo>
-                  <a:pt x="301387" y="196358"/>
-                </a:lnTo>
-                <a:lnTo>
-                  <a:pt x="301387" y="105029"/>
-                </a:lnTo>
-                <a:lnTo>
-                  <a:pt x="196358" y="105029"/>
-                </a:lnTo>
-                <a:lnTo>
-                  <a:pt x="196358" y="0"/>
-                </a:lnTo>
-                <a:lnTo>
-                  <a:pt x="105029" y="0"/>
-                </a:lnTo>
-                <a:lnTo>
-                  <a:pt x="105029" y="105029"/>
-                </a:lnTo>
-                <a:lnTo>
-                  <a:pt x="0" y="105029"/>
-                </a:lnTo>
-                <a:lnTo>
-                  <a:pt x="0" y="196358"/>
-                </a:lnTo>
-                <a:lnTo>
-                  <a:pt x="105029" y="196358"/>
+                  <a:pt x="159913" y="245448"/>
+                </a:lnTo>
+                <a:lnTo>
+                  <a:pt x="159913" y="159913"/>
+                </a:lnTo>
+                <a:lnTo>
+                  <a:pt x="245448" y="159913"/>
+                </a:lnTo>
+                <a:lnTo>
+                  <a:pt x="245448" y="85535"/>
+                </a:lnTo>
+                <a:lnTo>
+                  <a:pt x="159913" y="85535"/>
+                </a:lnTo>
+                <a:lnTo>
+                  <a:pt x="159913" y="0"/>
+                </a:lnTo>
+                <a:lnTo>
+                  <a:pt x="85535" y="0"/>
+                </a:lnTo>
+                <a:lnTo>
+                  <a:pt x="85535" y="85535"/>
+                </a:lnTo>
+                <a:lnTo>
+                  <a:pt x="0" y="85535"/>
+                </a:lnTo>
+                <a:lnTo>
+                  <a:pt x="0" y="159913"/>
+                </a:lnTo>
+                <a:lnTo>
+                  <a:pt x="85535" y="159913"/>
                 </a:lnTo>
                 <a:close/>
               </a:path>
@@ -17487,8 +17487,8 @@
         </p:nvSpPr>
         <p:spPr>
           <a:xfrm>
-            <a:off x="8041315" y="2971361"/>
-            <a:ext cx="63931" cy="118728"/>
+            <a:off x="8299787" y="2981908"/>
+            <a:ext cx="52065" cy="96692"/>
           </a:xfrm>
           <a:custGeom>
             <a:avLst/>
@@ -17497,15 +17497,15 @@
             <a:cxnLst/>
             <a:rect l="l" t="t" r="r" b="b"/>
             <a:pathLst>
-              <a:path w="63931" h="118728">
+              <a:path w="52065" h="96692">
                 <a:moveTo>
-                  <a:pt x="0" y="118728"/>
+                  <a:pt x="0" y="96692"/>
                 </a:moveTo>
                 <a:lnTo>
-                  <a:pt x="63931" y="118728"/>
-                </a:lnTo>
-                <a:lnTo>
-                  <a:pt x="63931" y="0"/>
+                  <a:pt x="52065" y="96692"/>
+                </a:lnTo>
+                <a:lnTo>
+                  <a:pt x="52065" y="0"/>
                 </a:lnTo>
                 <a:lnTo>
                   <a:pt x="0" y="0"/>
@@ -17533,8 +17533,8 @@
         </p:nvSpPr>
         <p:spPr>
           <a:xfrm>
-            <a:off x="7927153" y="2733904"/>
-            <a:ext cx="292254" cy="237456"/>
+            <a:off x="8206815" y="2788525"/>
+            <a:ext cx="238010" cy="193383"/>
           </a:xfrm>
           <a:custGeom>
             <a:avLst/>
@@ -17543,15 +17543,15 @@
             <a:cxnLst/>
             <a:rect l="l" t="t" r="r" b="b"/>
             <a:pathLst>
-              <a:path w="292254" h="237456">
+              <a:path w="238010" h="193383">
                 <a:moveTo>
-                  <a:pt x="0" y="237456"/>
+                  <a:pt x="0" y="193383"/>
                 </a:moveTo>
                 <a:lnTo>
-                  <a:pt x="292254" y="237456"/>
-                </a:lnTo>
-                <a:lnTo>
-                  <a:pt x="146127" y="0"/>
+                  <a:pt x="238010" y="193383"/>
+                </a:lnTo>
+                <a:lnTo>
+                  <a:pt x="119005" y="0"/>
                 </a:lnTo>
                 <a:close/>
               </a:path>
@@ -17576,8 +17576,8 @@
         </p:nvSpPr>
         <p:spPr>
           <a:xfrm>
-            <a:off x="9836953" y="2770436"/>
-            <a:ext cx="164393" cy="283121"/>
+            <a:off x="9927429" y="2818276"/>
+            <a:ext cx="133881" cy="230572"/>
           </a:xfrm>
           <a:custGeom>
             <a:avLst/>
@@ -17586,15 +17586,15 @@
             <a:cxnLst/>
             <a:rect l="l" t="t" r="r" b="b"/>
             <a:pathLst>
-              <a:path w="164393" h="283121">
+              <a:path w="133881" h="230572">
                 <a:moveTo>
-                  <a:pt x="0" y="246589"/>
+                  <a:pt x="0" y="200821"/>
                 </a:moveTo>
                 <a:lnTo>
-                  <a:pt x="164393" y="283121"/>
-                </a:lnTo>
-                <a:lnTo>
-                  <a:pt x="164393" y="36532"/>
+                  <a:pt x="133881" y="230572"/>
+                </a:lnTo>
+                <a:lnTo>
+                  <a:pt x="133881" y="29751"/>
                 </a:lnTo>
                 <a:lnTo>
                   <a:pt x="0" y="0"/>
@@ -17622,8 +17622,8 @@
         </p:nvSpPr>
         <p:spPr>
           <a:xfrm>
-            <a:off x="10001346" y="2770436"/>
-            <a:ext cx="164393" cy="283121"/>
+            <a:off x="10061309" y="2818276"/>
+            <a:ext cx="133881" cy="230572"/>
           </a:xfrm>
           <a:custGeom>
             <a:avLst/>
@@ -17632,18 +17632,18 @@
             <a:cxnLst/>
             <a:rect l="l" t="t" r="r" b="b"/>
             <a:pathLst>
-              <a:path w="164393" h="283121">
+              <a:path w="133881" h="230572">
                 <a:moveTo>
-                  <a:pt x="164393" y="246589"/>
+                  <a:pt x="133881" y="200821"/>
                 </a:moveTo>
                 <a:lnTo>
-                  <a:pt x="0" y="283121"/>
-                </a:lnTo>
-                <a:lnTo>
-                  <a:pt x="0" y="36532"/>
-                </a:lnTo>
-                <a:lnTo>
-                  <a:pt x="164393" y="0"/>
+                  <a:pt x="0" y="230572"/>
+                </a:lnTo>
+                <a:lnTo>
+                  <a:pt x="0" y="29751"/>
+                </a:lnTo>
+                <a:lnTo>
+                  <a:pt x="133881" y="0"/>
                 </a:lnTo>
                 <a:close/>
               </a:path>
@@ -17668,8 +17668,8 @@
         </p:nvSpPr>
         <p:spPr>
           <a:xfrm>
-            <a:off x="9923716" y="3217950"/>
-            <a:ext cx="155260" cy="118728"/>
+            <a:off x="9998088" y="3182729"/>
+            <a:ext cx="126443" cy="96692"/>
           </a:xfrm>
           <a:custGeom>
             <a:avLst/>
@@ -17678,27 +17678,27 @@
             <a:cxnLst/>
             <a:rect l="l" t="t" r="r" b="b"/>
             <a:pathLst>
-              <a:path w="155260" h="118728">
+              <a:path w="126443" h="96692">
                 <a:moveTo>
-                  <a:pt x="155260" y="118728"/>
+                  <a:pt x="126443" y="96692"/>
                 </a:moveTo>
                 <a:lnTo>
-                  <a:pt x="145112" y="59364"/>
-                </a:lnTo>
-                <a:lnTo>
-                  <a:pt x="116191" y="15729"/>
-                </a:lnTo>
-                <a:lnTo>
-                  <a:pt x="77630" y="0"/>
-                </a:lnTo>
-                <a:lnTo>
-                  <a:pt x="38561" y="15729"/>
-                </a:lnTo>
-                <a:lnTo>
-                  <a:pt x="10148" y="59364"/>
-                </a:lnTo>
-                <a:lnTo>
-                  <a:pt x="0" y="118728"/>
+                  <a:pt x="118179" y="48346"/>
+                </a:lnTo>
+                <a:lnTo>
+                  <a:pt x="94626" y="12810"/>
+                </a:lnTo>
+                <a:lnTo>
+                  <a:pt x="63221" y="0"/>
+                </a:lnTo>
+                <a:lnTo>
+                  <a:pt x="31404" y="12810"/>
+                </a:lnTo>
+                <a:lnTo>
+                  <a:pt x="8264" y="48346"/>
+                </a:lnTo>
+                <a:lnTo>
+                  <a:pt x="0" y="96692"/>
                 </a:lnTo>
               </a:path>
             </a:pathLst>
@@ -17720,8 +17720,8 @@
         </p:nvSpPr>
         <p:spPr>
           <a:xfrm>
-            <a:off x="9850652" y="3336678"/>
-            <a:ext cx="301387" cy="200925"/>
+            <a:off x="9938586" y="3279421"/>
+            <a:ext cx="245448" cy="163632"/>
           </a:xfrm>
           <a:custGeom>
             <a:avLst/>
@@ -17730,18 +17730,18 @@
             <a:cxnLst/>
             <a:rect l="l" t="t" r="r" b="b"/>
             <a:pathLst>
-              <a:path w="301387" h="200925">
+              <a:path w="245448" h="163632">
                 <a:moveTo>
                   <a:pt x="0" y="0"/>
                 </a:moveTo>
                 <a:lnTo>
-                  <a:pt x="301387" y="0"/>
-                </a:lnTo>
-                <a:lnTo>
-                  <a:pt x="264855" y="200925"/>
-                </a:lnTo>
-                <a:lnTo>
-                  <a:pt x="36532" y="200925"/>
+                  <a:pt x="245448" y="0"/>
+                </a:lnTo>
+                <a:lnTo>
+                  <a:pt x="215697" y="163632"/>
+                </a:lnTo>
+                <a:lnTo>
+                  <a:pt x="29751" y="163632"/>
                 </a:lnTo>
                 <a:close/>
               </a:path>
@@ -17766,8 +17766,8 @@
         </p:nvSpPr>
         <p:spPr>
           <a:xfrm>
-            <a:off x="7936286" y="3656331"/>
-            <a:ext cx="273988" cy="337919"/>
+            <a:off x="8214253" y="3539744"/>
+            <a:ext cx="223134" cy="275199"/>
           </a:xfrm>
           <a:custGeom>
             <a:avLst/>
@@ -17776,21 +17776,21 @@
             <a:cxnLst/>
             <a:rect l="l" t="t" r="r" b="b"/>
             <a:pathLst>
-              <a:path w="273988" h="337919">
+              <a:path w="223134" h="275199">
                 <a:moveTo>
-                  <a:pt x="0" y="337919"/>
+                  <a:pt x="0" y="275199"/>
                 </a:moveTo>
                 <a:lnTo>
-                  <a:pt x="273988" y="337919"/>
-                </a:lnTo>
-                <a:lnTo>
-                  <a:pt x="273988" y="155260"/>
-                </a:lnTo>
-                <a:lnTo>
-                  <a:pt x="136994" y="0"/>
-                </a:lnTo>
-                <a:lnTo>
-                  <a:pt x="0" y="155260"/>
+                  <a:pt x="223134" y="275199"/>
+                </a:lnTo>
+                <a:lnTo>
+                  <a:pt x="223134" y="126443"/>
+                </a:lnTo>
+                <a:lnTo>
+                  <a:pt x="111567" y="0"/>
+                </a:lnTo>
+                <a:lnTo>
+                  <a:pt x="0" y="126443"/>
                 </a:lnTo>
                 <a:close/>
               </a:path>
@@ -17815,8 +17815,8 @@
         </p:nvSpPr>
         <p:spPr>
           <a:xfrm>
-            <a:off x="4785421" y="2581689"/>
-            <a:ext cx="334875" cy="334875"/>
+            <a:off x="5366397" y="2548036"/>
+            <a:ext cx="381808" cy="381808"/>
           </a:xfrm>
           <a:prstGeom prst="ellipse">
             <a:avLst/>
@@ -17840,8 +17840,8 @@
         </p:nvSpPr>
         <p:spPr>
           <a:xfrm>
-            <a:off x="4881824" y="2678092"/>
-            <a:ext cx="142068" cy="142068"/>
+            <a:off x="5476311" y="2657950"/>
+            <a:ext cx="161979" cy="161979"/>
           </a:xfrm>
           <a:prstGeom prst="ellipse">
             <a:avLst/>
@@ -17865,8 +17865,8 @@
         </p:nvSpPr>
         <p:spPr>
           <a:xfrm>
-            <a:off x="7922587" y="3222517"/>
-            <a:ext cx="301387" cy="301387"/>
+            <a:off x="8203096" y="3186448"/>
+            <a:ext cx="245448" cy="245448"/>
           </a:xfrm>
           <a:prstGeom prst="ellipse">
             <a:avLst/>
@@ -17890,8 +17890,8 @@
         </p:nvSpPr>
         <p:spPr>
           <a:xfrm>
-            <a:off x="8009350" y="3309280"/>
-            <a:ext cx="127861" cy="127861"/>
+            <a:off x="8273755" y="3257107"/>
+            <a:ext cx="104129" cy="104129"/>
           </a:xfrm>
           <a:prstGeom prst="ellipse">
             <a:avLst/>
@@ -17915,8 +17915,8 @@
         </p:nvSpPr>
         <p:spPr>
           <a:xfrm flipV="1">
-            <a:off x="2811691" y="2566467"/>
-            <a:ext cx="0" cy="365318"/>
+            <a:off x="3116045" y="2530681"/>
+            <a:ext cx="0" cy="416518"/>
           </a:xfrm>
           <a:prstGeom prst="line">
             <a:avLst/>
@@ -17938,8 +17938,8 @@
         </p:nvSpPr>
         <p:spPr>
           <a:xfrm flipV="1">
-            <a:off x="640080" y="1988047"/>
-            <a:ext cx="0" cy="2029543"/>
+            <a:off x="640080" y="1871195"/>
+            <a:ext cx="0" cy="2313986"/>
           </a:xfrm>
           <a:prstGeom prst="line">
             <a:avLst/>
@@ -17961,8 +17961,8 @@
         </p:nvSpPr>
         <p:spPr>
           <a:xfrm flipV="1">
-            <a:off x="1147466" y="1988047"/>
-            <a:ext cx="0" cy="2029543"/>
+            <a:off x="1218577" y="1871195"/>
+            <a:ext cx="0" cy="2313986"/>
           </a:xfrm>
           <a:prstGeom prst="line">
             <a:avLst/>
@@ -17984,8 +17984,8 @@
         </p:nvSpPr>
         <p:spPr>
           <a:xfrm flipV="1">
-            <a:off x="1654851" y="1988047"/>
-            <a:ext cx="0" cy="2029543"/>
+            <a:off x="1797073" y="1871195"/>
+            <a:ext cx="0" cy="2313986"/>
           </a:xfrm>
           <a:prstGeom prst="line">
             <a:avLst/>
@@ -18007,8 +18007,8 @@
         </p:nvSpPr>
         <p:spPr>
           <a:xfrm flipV="1">
-            <a:off x="2162237" y="1988047"/>
-            <a:ext cx="0" cy="2029543"/>
+            <a:off x="2375570" y="1871195"/>
+            <a:ext cx="0" cy="2313986"/>
           </a:xfrm>
           <a:prstGeom prst="line">
             <a:avLst/>
@@ -18030,8 +18030,8 @@
         </p:nvSpPr>
         <p:spPr>
           <a:xfrm flipV="1">
-            <a:off x="2669623" y="1988047"/>
-            <a:ext cx="0" cy="2029543"/>
+            <a:off x="2954066" y="1871195"/>
+            <a:ext cx="0" cy="2313986"/>
           </a:xfrm>
           <a:prstGeom prst="line">
             <a:avLst/>
@@ -18053,8 +18053,8 @@
         </p:nvSpPr>
         <p:spPr>
           <a:xfrm flipV="1">
-            <a:off x="3177008" y="1988047"/>
-            <a:ext cx="0" cy="2029543"/>
+            <a:off x="3532563" y="1871195"/>
+            <a:ext cx="0" cy="2313986"/>
           </a:xfrm>
           <a:prstGeom prst="line">
             <a:avLst/>
@@ -18076,8 +18076,8 @@
         </p:nvSpPr>
         <p:spPr>
           <a:xfrm flipV="1">
-            <a:off x="3684394" y="1988047"/>
-            <a:ext cx="0" cy="2029543"/>
+            <a:off x="4111059" y="1871195"/>
+            <a:ext cx="0" cy="2313986"/>
           </a:xfrm>
           <a:prstGeom prst="line">
             <a:avLst/>
@@ -18099,8 +18099,8 @@
         </p:nvSpPr>
         <p:spPr>
           <a:xfrm flipV="1">
-            <a:off x="4191780" y="1988047"/>
-            <a:ext cx="0" cy="2029543"/>
+            <a:off x="4689556" y="1871195"/>
+            <a:ext cx="0" cy="2313986"/>
           </a:xfrm>
           <a:prstGeom prst="line">
             <a:avLst/>
@@ -18122,8 +18122,8 @@
         </p:nvSpPr>
         <p:spPr>
           <a:xfrm flipV="1">
-            <a:off x="4699165" y="1988047"/>
-            <a:ext cx="0" cy="2029543"/>
+            <a:off x="5268052" y="1871195"/>
+            <a:ext cx="0" cy="2313986"/>
           </a:xfrm>
           <a:prstGeom prst="line">
             <a:avLst/>
@@ -18145,8 +18145,8 @@
         </p:nvSpPr>
         <p:spPr>
           <a:xfrm flipV="1">
-            <a:off x="5206551" y="1988047"/>
-            <a:ext cx="0" cy="2029543"/>
+            <a:off x="5846549" y="1871195"/>
+            <a:ext cx="0" cy="2313986"/>
           </a:xfrm>
           <a:prstGeom prst="line">
             <a:avLst/>
@@ -18168,8 +18168,8 @@
         </p:nvSpPr>
         <p:spPr>
           <a:xfrm flipV="1">
-            <a:off x="5713937" y="1988047"/>
-            <a:ext cx="0" cy="2029543"/>
+            <a:off x="6425045" y="1871195"/>
+            <a:ext cx="0" cy="2313986"/>
           </a:xfrm>
           <a:prstGeom prst="line">
             <a:avLst/>
@@ -18191,8 +18191,8 @@
         </p:nvSpPr>
         <p:spPr>
           <a:xfrm>
-            <a:off x="640080" y="4017590"/>
-            <a:ext cx="5073857" cy="0"/>
+            <a:off x="640080" y="4185181"/>
+            <a:ext cx="5784965" cy="0"/>
           </a:xfrm>
           <a:prstGeom prst="line">
             <a:avLst/>
@@ -18214,8 +18214,8 @@
         </p:nvSpPr>
         <p:spPr>
           <a:xfrm>
-            <a:off x="640080" y="3510204"/>
-            <a:ext cx="5073857" cy="0"/>
+            <a:off x="640080" y="3606685"/>
+            <a:ext cx="5784965" cy="0"/>
           </a:xfrm>
           <a:prstGeom prst="line">
             <a:avLst/>
@@ -18237,8 +18237,8 @@
         </p:nvSpPr>
         <p:spPr>
           <a:xfrm>
-            <a:off x="640080" y="3002819"/>
-            <a:ext cx="5073857" cy="0"/>
+            <a:off x="640080" y="3028188"/>
+            <a:ext cx="5784965" cy="0"/>
           </a:xfrm>
           <a:prstGeom prst="line">
             <a:avLst/>
@@ -18260,8 +18260,8 @@
         </p:nvSpPr>
         <p:spPr>
           <a:xfrm>
-            <a:off x="640080" y="2495433"/>
-            <a:ext cx="5073857" cy="0"/>
+            <a:off x="640080" y="2449691"/>
+            <a:ext cx="5784965" cy="0"/>
           </a:xfrm>
           <a:prstGeom prst="line">
             <a:avLst/>
@@ -18283,8 +18283,8 @@
         </p:nvSpPr>
         <p:spPr>
           <a:xfrm>
-            <a:off x="640080" y="1988047"/>
-            <a:ext cx="5073857" cy="0"/>
+            <a:off x="640080" y="1871195"/>
+            <a:ext cx="5784965" cy="0"/>
           </a:xfrm>
           <a:prstGeom prst="line">
             <a:avLst/>
@@ -18306,8 +18306,8 @@
         </p:nvSpPr>
         <p:spPr>
           <a:xfrm flipV="1">
-            <a:off x="6677970" y="2571541"/>
-            <a:ext cx="0" cy="862556"/>
+            <a:off x="7210148" y="2676958"/>
+            <a:ext cx="0" cy="702460"/>
           </a:xfrm>
           <a:prstGeom prst="line">
             <a:avLst/>
@@ -18330,8 +18330,8 @@
         </p:nvSpPr>
         <p:spPr>
           <a:xfrm>
-            <a:off x="6246692" y="3002819"/>
-            <a:ext cx="862556" cy="0"/>
+            <a:off x="6858918" y="3028188"/>
+            <a:ext cx="702460" cy="0"/>
           </a:xfrm>
           <a:prstGeom prst="line">
             <a:avLst/>
@@ -18353,8 +18353,8 @@
         </p:nvSpPr>
         <p:spPr>
           <a:xfrm flipV="1">
-            <a:off x="7972818" y="2295523"/>
-            <a:ext cx="0" cy="328786"/>
+            <a:off x="8244004" y="2431510"/>
+            <a:ext cx="0" cy="267761"/>
           </a:xfrm>
           <a:prstGeom prst="line">
             <a:avLst/>
@@ -18376,7 +18376,7 @@
         </p:nvSpPr>
         <p:spPr>
           <a:xfrm>
-            <a:off x="6473754" y="2152717"/>
+            <a:off x="7005932" y="2300513"/>
             <a:ext cx="408432" cy="381000"/>
           </a:xfrm>
           <a:prstGeom prst="rect">
@@ -18415,7 +18415,7 @@
         </p:nvSpPr>
         <p:spPr>
           <a:xfrm>
-            <a:off x="6473754" y="3471920"/>
+            <a:off x="7005932" y="3374863"/>
             <a:ext cx="408432" cy="381000"/>
           </a:xfrm>
           <a:prstGeom prst="rect">
@@ -18454,7 +18454,7 @@
         </p:nvSpPr>
         <p:spPr>
           <a:xfrm>
-            <a:off x="7133355" y="2812319"/>
+            <a:off x="7543107" y="2837688"/>
             <a:ext cx="408432" cy="381000"/>
           </a:xfrm>
           <a:prstGeom prst="rect">
@@ -18493,7 +18493,7 @@
         </p:nvSpPr>
         <p:spPr>
           <a:xfrm>
-            <a:off x="5814152" y="2812319"/>
+            <a:off x="6468757" y="2837688"/>
             <a:ext cx="408432" cy="381000"/>
           </a:xfrm>
           <a:prstGeom prst="rect">
@@ -18532,7 +18532,7 @@
         </p:nvSpPr>
         <p:spPr>
           <a:xfrm>
-            <a:off x="9267238" y="1886340"/>
+            <a:off x="9439154" y="2062916"/>
             <a:ext cx="707136" cy="381000"/>
           </a:xfrm>
           <a:prstGeom prst="rect">
@@ -18571,7 +18571,7 @@
         </p:nvSpPr>
         <p:spPr>
           <a:xfrm>
-            <a:off x="8556898" y="2269416"/>
+            <a:off x="8798675" y="2374891"/>
             <a:ext cx="707136" cy="381000"/>
           </a:xfrm>
           <a:prstGeom prst="rect">
@@ -18610,7 +18610,7 @@
         </p:nvSpPr>
         <p:spPr>
           <a:xfrm>
-            <a:off x="10484964" y="2269416"/>
+            <a:off x="10534165" y="2374891"/>
             <a:ext cx="707136" cy="381000"/>
           </a:xfrm>
           <a:prstGeom prst="rect">
@@ -18649,7 +18649,7 @@
         </p:nvSpPr>
         <p:spPr>
           <a:xfrm>
-            <a:off x="8556898" y="2726063"/>
+            <a:off x="8798675" y="2746781"/>
             <a:ext cx="707136" cy="381000"/>
           </a:xfrm>
           <a:prstGeom prst="rect">
@@ -18688,7 +18688,7 @@
         </p:nvSpPr>
         <p:spPr>
           <a:xfrm>
-            <a:off x="10335612" y="2726063"/>
+            <a:off x="10384813" y="2746781"/>
             <a:ext cx="1005840" cy="381000"/>
           </a:xfrm>
           <a:prstGeom prst="rect">
@@ -18727,7 +18727,7 @@
         </p:nvSpPr>
         <p:spPr>
           <a:xfrm>
-            <a:off x="8258194" y="3182710"/>
+            <a:off x="8499971" y="3118672"/>
             <a:ext cx="1304544" cy="381000"/>
           </a:xfrm>
           <a:prstGeom prst="rect">
@@ -18766,7 +18766,7 @@
         </p:nvSpPr>
         <p:spPr>
           <a:xfrm>
-            <a:off x="10484964" y="3182710"/>
+            <a:off x="10534165" y="3118672"/>
             <a:ext cx="707136" cy="381000"/>
           </a:xfrm>
           <a:prstGeom prst="rect">
@@ -18805,7 +18805,7 @@
         </p:nvSpPr>
         <p:spPr>
           <a:xfrm>
-            <a:off x="8706250" y="3639357"/>
+            <a:off x="8948027" y="3490563"/>
             <a:ext cx="408432" cy="381000"/>
           </a:xfrm>
           <a:prstGeom prst="rect">
@@ -19067,8 +19067,8 @@
         </p:nvSpPr>
         <p:spPr>
           <a:xfrm>
-            <a:off x="640080" y="2770409"/>
-            <a:ext cx="507386" cy="507386"/>
+            <a:off x="640080" y="2795778"/>
+            <a:ext cx="578497" cy="578497"/>
           </a:xfrm>
           <a:custGeom>
             <a:avLst/>
@@ -19077,15 +19077,15 @@
             <a:cxnLst/>
             <a:rect l="l" t="t" r="r" b="b"/>
             <a:pathLst>
-              <a:path w="507386" h="507386">
+              <a:path w="578497" h="578497">
                 <a:moveTo>
-                  <a:pt x="0" y="507386"/>
+                  <a:pt x="0" y="578497"/>
                 </a:moveTo>
                 <a:lnTo>
-                  <a:pt x="507386" y="507386"/>
-                </a:lnTo>
-                <a:lnTo>
-                  <a:pt x="507386" y="0"/>
+                  <a:pt x="578497" y="578497"/>
+                </a:lnTo>
+                <a:lnTo>
+                  <a:pt x="578497" y="0"/>
                 </a:lnTo>
                 <a:lnTo>
                   <a:pt x="0" y="0"/>
@@ -19108,8 +19108,8 @@
         </p:nvSpPr>
         <p:spPr>
           <a:xfrm>
-            <a:off x="1147466" y="2770409"/>
-            <a:ext cx="507386" cy="507386"/>
+            <a:off x="1218577" y="2795778"/>
+            <a:ext cx="578497" cy="578497"/>
           </a:xfrm>
           <a:custGeom>
             <a:avLst/>
@@ -19118,15 +19118,15 @@
             <a:cxnLst/>
             <a:rect l="l" t="t" r="r" b="b"/>
             <a:pathLst>
-              <a:path w="507386" h="507386">
+              <a:path w="578497" h="578497">
                 <a:moveTo>
-                  <a:pt x="0" y="507386"/>
+                  <a:pt x="0" y="578497"/>
                 </a:moveTo>
                 <a:lnTo>
-                  <a:pt x="507386" y="507386"/>
-                </a:lnTo>
-                <a:lnTo>
-                  <a:pt x="507386" y="0"/>
+                  <a:pt x="578497" y="578497"/>
+                </a:lnTo>
+                <a:lnTo>
+                  <a:pt x="578497" y="0"/>
                 </a:lnTo>
                 <a:lnTo>
                   <a:pt x="0" y="0"/>
@@ -19149,8 +19149,8 @@
         </p:nvSpPr>
         <p:spPr>
           <a:xfrm>
-            <a:off x="1654851" y="2770409"/>
-            <a:ext cx="507386" cy="507386"/>
+            <a:off x="1797073" y="2795778"/>
+            <a:ext cx="578497" cy="578497"/>
           </a:xfrm>
           <a:custGeom>
             <a:avLst/>
@@ -19159,15 +19159,15 @@
             <a:cxnLst/>
             <a:rect l="l" t="t" r="r" b="b"/>
             <a:pathLst>
-              <a:path w="507386" h="507386">
+              <a:path w="578497" h="578497">
                 <a:moveTo>
-                  <a:pt x="0" y="507386"/>
+                  <a:pt x="0" y="578497"/>
                 </a:moveTo>
                 <a:lnTo>
-                  <a:pt x="507386" y="507386"/>
-                </a:lnTo>
-                <a:lnTo>
-                  <a:pt x="507386" y="0"/>
+                  <a:pt x="578497" y="578497"/>
+                </a:lnTo>
+                <a:lnTo>
+                  <a:pt x="578497" y="0"/>
                 </a:lnTo>
                 <a:lnTo>
                   <a:pt x="0" y="0"/>
@@ -19190,8 +19190,8 @@
         </p:nvSpPr>
         <p:spPr>
           <a:xfrm>
-            <a:off x="2162237" y="2770409"/>
-            <a:ext cx="507386" cy="507386"/>
+            <a:off x="2375570" y="2795778"/>
+            <a:ext cx="578497" cy="578497"/>
           </a:xfrm>
           <a:custGeom>
             <a:avLst/>
@@ -19200,15 +19200,15 @@
             <a:cxnLst/>
             <a:rect l="l" t="t" r="r" b="b"/>
             <a:pathLst>
-              <a:path w="507386" h="507386">
+              <a:path w="578497" h="578497">
                 <a:moveTo>
-                  <a:pt x="0" y="507386"/>
+                  <a:pt x="0" y="578497"/>
                 </a:moveTo>
                 <a:lnTo>
-                  <a:pt x="507386" y="507386"/>
-                </a:lnTo>
-                <a:lnTo>
-                  <a:pt x="507386" y="0"/>
+                  <a:pt x="578497" y="578497"/>
+                </a:lnTo>
+                <a:lnTo>
+                  <a:pt x="578497" y="0"/>
                 </a:lnTo>
                 <a:lnTo>
                   <a:pt x="0" y="0"/>
@@ -19231,8 +19231,8 @@
         </p:nvSpPr>
         <p:spPr>
           <a:xfrm>
-            <a:off x="2669623" y="2770409"/>
-            <a:ext cx="507386" cy="507386"/>
+            <a:off x="2954066" y="2795778"/>
+            <a:ext cx="578497" cy="578497"/>
           </a:xfrm>
           <a:custGeom>
             <a:avLst/>
@@ -19241,15 +19241,15 @@
             <a:cxnLst/>
             <a:rect l="l" t="t" r="r" b="b"/>
             <a:pathLst>
-              <a:path w="507386" h="507386">
+              <a:path w="578497" h="578497">
                 <a:moveTo>
-                  <a:pt x="0" y="507386"/>
+                  <a:pt x="0" y="578497"/>
                 </a:moveTo>
                 <a:lnTo>
-                  <a:pt x="507386" y="507386"/>
-                </a:lnTo>
-                <a:lnTo>
-                  <a:pt x="507386" y="0"/>
+                  <a:pt x="578497" y="578497"/>
+                </a:lnTo>
+                <a:lnTo>
+                  <a:pt x="578497" y="0"/>
                 </a:lnTo>
                 <a:lnTo>
                   <a:pt x="0" y="0"/>
@@ -19272,8 +19272,8 @@
         </p:nvSpPr>
         <p:spPr>
           <a:xfrm>
-            <a:off x="3177008" y="2770409"/>
-            <a:ext cx="507386" cy="507386"/>
+            <a:off x="3532563" y="2795778"/>
+            <a:ext cx="578497" cy="578497"/>
           </a:xfrm>
           <a:custGeom>
             <a:avLst/>
@@ -19282,15 +19282,15 @@
             <a:cxnLst/>
             <a:rect l="l" t="t" r="r" b="b"/>
             <a:pathLst>
-              <a:path w="507386" h="507386">
+              <a:path w="578497" h="578497">
                 <a:moveTo>
-                  <a:pt x="0" y="507386"/>
+                  <a:pt x="0" y="578497"/>
                 </a:moveTo>
                 <a:lnTo>
-                  <a:pt x="507386" y="507386"/>
-                </a:lnTo>
-                <a:lnTo>
-                  <a:pt x="507386" y="0"/>
+                  <a:pt x="578497" y="578497"/>
+                </a:lnTo>
+                <a:lnTo>
+                  <a:pt x="578497" y="0"/>
                 </a:lnTo>
                 <a:lnTo>
                   <a:pt x="0" y="0"/>
@@ -19313,8 +19313,8 @@
         </p:nvSpPr>
         <p:spPr>
           <a:xfrm>
-            <a:off x="3684394" y="2770409"/>
-            <a:ext cx="507386" cy="507386"/>
+            <a:off x="4111059" y="2795778"/>
+            <a:ext cx="578497" cy="578497"/>
           </a:xfrm>
           <a:custGeom>
             <a:avLst/>
@@ -19323,15 +19323,15 @@
             <a:cxnLst/>
             <a:rect l="l" t="t" r="r" b="b"/>
             <a:pathLst>
-              <a:path w="507386" h="507386">
+              <a:path w="578497" h="578497">
                 <a:moveTo>
-                  <a:pt x="0" y="507386"/>
+                  <a:pt x="0" y="578497"/>
                 </a:moveTo>
                 <a:lnTo>
-                  <a:pt x="507386" y="507386"/>
-                </a:lnTo>
-                <a:lnTo>
-                  <a:pt x="507386" y="0"/>
+                  <a:pt x="578497" y="578497"/>
+                </a:lnTo>
+                <a:lnTo>
+                  <a:pt x="578497" y="0"/>
                 </a:lnTo>
                 <a:lnTo>
                   <a:pt x="0" y="0"/>
@@ -19354,8 +19354,8 @@
         </p:nvSpPr>
         <p:spPr>
           <a:xfrm>
-            <a:off x="4191780" y="2770409"/>
-            <a:ext cx="507386" cy="507386"/>
+            <a:off x="4689556" y="2795778"/>
+            <a:ext cx="578497" cy="578497"/>
           </a:xfrm>
           <a:custGeom>
             <a:avLst/>
@@ -19364,15 +19364,15 @@
             <a:cxnLst/>
             <a:rect l="l" t="t" r="r" b="b"/>
             <a:pathLst>
-              <a:path w="507386" h="507386">
+              <a:path w="578497" h="578497">
                 <a:moveTo>
-                  <a:pt x="0" y="507386"/>
+                  <a:pt x="0" y="578497"/>
                 </a:moveTo>
                 <a:lnTo>
-                  <a:pt x="507386" y="507386"/>
-                </a:lnTo>
-                <a:lnTo>
-                  <a:pt x="507386" y="0"/>
+                  <a:pt x="578497" y="578497"/>
+                </a:lnTo>
+                <a:lnTo>
+                  <a:pt x="578497" y="0"/>
                 </a:lnTo>
                 <a:lnTo>
                   <a:pt x="0" y="0"/>
@@ -19395,8 +19395,8 @@
         </p:nvSpPr>
         <p:spPr>
           <a:xfrm>
-            <a:off x="4699165" y="2770409"/>
-            <a:ext cx="507386" cy="507386"/>
+            <a:off x="5268052" y="2795778"/>
+            <a:ext cx="578497" cy="578497"/>
           </a:xfrm>
           <a:custGeom>
             <a:avLst/>
@@ -19405,15 +19405,15 @@
             <a:cxnLst/>
             <a:rect l="l" t="t" r="r" b="b"/>
             <a:pathLst>
-              <a:path w="507386" h="507386">
+              <a:path w="578497" h="578497">
                 <a:moveTo>
-                  <a:pt x="0" y="507386"/>
+                  <a:pt x="0" y="578497"/>
                 </a:moveTo>
                 <a:lnTo>
-                  <a:pt x="507386" y="507386"/>
-                </a:lnTo>
-                <a:lnTo>
-                  <a:pt x="507386" y="0"/>
+                  <a:pt x="578497" y="578497"/>
+                </a:lnTo>
+                <a:lnTo>
+                  <a:pt x="578497" y="0"/>
                 </a:lnTo>
                 <a:lnTo>
                   <a:pt x="0" y="0"/>
@@ -19436,8 +19436,8 @@
         </p:nvSpPr>
         <p:spPr>
           <a:xfrm>
-            <a:off x="5206551" y="2770409"/>
-            <a:ext cx="507386" cy="507386"/>
+            <a:off x="5846549" y="2795778"/>
+            <a:ext cx="578497" cy="578497"/>
           </a:xfrm>
           <a:custGeom>
             <a:avLst/>
@@ -19446,15 +19446,15 @@
             <a:cxnLst/>
             <a:rect l="l" t="t" r="r" b="b"/>
             <a:pathLst>
-              <a:path w="507386" h="507386">
+              <a:path w="578497" h="578497">
                 <a:moveTo>
-                  <a:pt x="0" y="507386"/>
+                  <a:pt x="0" y="578497"/>
                 </a:moveTo>
                 <a:lnTo>
-                  <a:pt x="507386" y="507386"/>
-                </a:lnTo>
-                <a:lnTo>
-                  <a:pt x="507386" y="0"/>
+                  <a:pt x="578497" y="578497"/>
+                </a:lnTo>
+                <a:lnTo>
+                  <a:pt x="578497" y="0"/>
                 </a:lnTo>
                 <a:lnTo>
                   <a:pt x="0" y="0"/>
@@ -19477,8 +19477,8 @@
         </p:nvSpPr>
         <p:spPr>
           <a:xfrm>
-            <a:off x="1218500" y="2354352"/>
-            <a:ext cx="182659" cy="314579"/>
+            <a:off x="1299566" y="2321411"/>
+            <a:ext cx="208259" cy="358668"/>
           </a:xfrm>
           <a:custGeom>
             <a:avLst/>
@@ -19487,15 +19487,15 @@
             <a:cxnLst/>
             <a:rect l="l" t="t" r="r" b="b"/>
             <a:pathLst>
-              <a:path w="182659" h="314579">
+              <a:path w="208259" h="358668">
                 <a:moveTo>
-                  <a:pt x="0" y="273988"/>
+                  <a:pt x="0" y="312388"/>
                 </a:moveTo>
                 <a:lnTo>
-                  <a:pt x="182659" y="314579"/>
-                </a:lnTo>
-                <a:lnTo>
-                  <a:pt x="182659" y="40591"/>
+                  <a:pt x="208259" y="358668"/>
+                </a:lnTo>
+                <a:lnTo>
+                  <a:pt x="208259" y="46280"/>
                 </a:lnTo>
                 <a:lnTo>
                   <a:pt x="0" y="0"/>
@@ -19523,8 +19523,8 @@
         </p:nvSpPr>
         <p:spPr>
           <a:xfrm>
-            <a:off x="1401159" y="2354352"/>
-            <a:ext cx="182659" cy="314579"/>
+            <a:off x="1507825" y="2321411"/>
+            <a:ext cx="208259" cy="358668"/>
           </a:xfrm>
           <a:custGeom>
             <a:avLst/>
@@ -19533,18 +19533,18 @@
             <a:cxnLst/>
             <a:rect l="l" t="t" r="r" b="b"/>
             <a:pathLst>
-              <a:path w="182659" h="314579">
+              <a:path w="208259" h="358668">
                 <a:moveTo>
-                  <a:pt x="182659" y="273988"/>
+                  <a:pt x="208259" y="312388"/>
                 </a:moveTo>
                 <a:lnTo>
-                  <a:pt x="0" y="314579"/>
-                </a:lnTo>
-                <a:lnTo>
-                  <a:pt x="0" y="40591"/>
-                </a:lnTo>
-                <a:lnTo>
-                  <a:pt x="182659" y="0"/>
+                  <a:pt x="0" y="358668"/>
+                </a:lnTo>
+                <a:lnTo>
+                  <a:pt x="0" y="46280"/>
+                </a:lnTo>
+                <a:lnTo>
+                  <a:pt x="208259" y="0"/>
                 </a:lnTo>
                 <a:close/>
               </a:path>
@@ -19569,8 +19569,8 @@
         </p:nvSpPr>
         <p:spPr>
           <a:xfrm>
-            <a:off x="2811691" y="2334057"/>
-            <a:ext cx="273988" cy="162363"/>
+            <a:off x="3116045" y="2298271"/>
+            <a:ext cx="312388" cy="185119"/>
           </a:xfrm>
           <a:custGeom>
             <a:avLst/>
@@ -19579,15 +19579,15 @@
             <a:cxnLst/>
             <a:rect l="l" t="t" r="r" b="b"/>
             <a:pathLst>
-              <a:path w="273988" h="162363">
+              <a:path w="312388" h="185119">
                 <a:moveTo>
                   <a:pt x="0" y="0"/>
                 </a:moveTo>
                 <a:lnTo>
-                  <a:pt x="273988" y="81182"/>
-                </a:lnTo>
-                <a:lnTo>
-                  <a:pt x="0" y="162363"/>
+                  <a:pt x="312388" y="92559"/>
+                </a:lnTo>
+                <a:lnTo>
+                  <a:pt x="0" y="185119"/>
                 </a:lnTo>
                 <a:close/>
               </a:path>
@@ -19612,8 +19612,8 @@
         </p:nvSpPr>
         <p:spPr>
           <a:xfrm>
-            <a:off x="2887799" y="2070216"/>
-            <a:ext cx="71034" cy="131920"/>
+            <a:off x="3202820" y="1997453"/>
+            <a:ext cx="80990" cy="150409"/>
           </a:xfrm>
           <a:custGeom>
             <a:avLst/>
@@ -19622,15 +19622,15 @@
             <a:cxnLst/>
             <a:rect l="l" t="t" r="r" b="b"/>
             <a:pathLst>
-              <a:path w="71034" h="131920">
+              <a:path w="80990" h="150409">
                 <a:moveTo>
-                  <a:pt x="0" y="131920"/>
+                  <a:pt x="0" y="150409"/>
                 </a:moveTo>
                 <a:lnTo>
-                  <a:pt x="71034" y="131920"/>
-                </a:lnTo>
-                <a:lnTo>
-                  <a:pt x="71034" y="0"/>
+                  <a:pt x="80990" y="150409"/>
+                </a:lnTo>
+                <a:lnTo>
+                  <a:pt x="80990" y="0"/>
                 </a:lnTo>
                 <a:lnTo>
                   <a:pt x="0" y="0"/>
@@ -19658,8 +19658,8 @@
         </p:nvSpPr>
         <p:spPr>
           <a:xfrm>
-            <a:off x="2760952" y="1806376"/>
-            <a:ext cx="324727" cy="263841"/>
+            <a:off x="3058196" y="1696635"/>
+            <a:ext cx="370238" cy="300818"/>
           </a:xfrm>
           <a:custGeom>
             <a:avLst/>
@@ -19668,15 +19668,15 @@
             <a:cxnLst/>
             <a:rect l="l" t="t" r="r" b="b"/>
             <a:pathLst>
-              <a:path w="324727" h="263841">
+              <a:path w="370238" h="300818">
                 <a:moveTo>
-                  <a:pt x="0" y="263841"/>
+                  <a:pt x="0" y="300818"/>
                 </a:moveTo>
                 <a:lnTo>
-                  <a:pt x="324727" y="263841"/>
-                </a:lnTo>
-                <a:lnTo>
-                  <a:pt x="162363" y="0"/>
+                  <a:pt x="370238" y="300818"/>
+                </a:lnTo>
+                <a:lnTo>
+                  <a:pt x="185119" y="0"/>
                 </a:lnTo>
                 <a:close/>
               </a:path>
@@ -19701,8 +19701,8 @@
         </p:nvSpPr>
         <p:spPr>
           <a:xfrm>
-            <a:off x="2329674" y="3358976"/>
-            <a:ext cx="172511" cy="131920"/>
+            <a:off x="2566473" y="3466834"/>
+            <a:ext cx="196689" cy="150409"/>
           </a:xfrm>
           <a:custGeom>
             <a:avLst/>
@@ -19711,27 +19711,27 @@
             <a:cxnLst/>
             <a:rect l="l" t="t" r="r" b="b"/>
             <a:pathLst>
-              <a:path w="172511" h="131920">
+              <a:path w="196689" h="150409">
                 <a:moveTo>
-                  <a:pt x="172511" y="131920"/>
+                  <a:pt x="196689" y="150409"/>
                 </a:moveTo>
                 <a:lnTo>
-                  <a:pt x="160841" y="65960"/>
-                </a:lnTo>
-                <a:lnTo>
-                  <a:pt x="129383" y="17758"/>
-                </a:lnTo>
-                <a:lnTo>
-                  <a:pt x="86256" y="0"/>
-                </a:lnTo>
-                <a:lnTo>
-                  <a:pt x="43128" y="17758"/>
-                </a:lnTo>
-                <a:lnTo>
-                  <a:pt x="11670" y="65960"/>
-                </a:lnTo>
-                <a:lnTo>
-                  <a:pt x="0" y="131920"/>
+                  <a:pt x="183466" y="75205"/>
+                </a:lnTo>
+                <a:lnTo>
+                  <a:pt x="147517" y="20247"/>
+                </a:lnTo>
+                <a:lnTo>
+                  <a:pt x="98344" y="0"/>
+                </a:lnTo>
+                <a:lnTo>
+                  <a:pt x="49172" y="20247"/>
+                </a:lnTo>
+                <a:lnTo>
+                  <a:pt x="13223" y="75205"/>
+                </a:lnTo>
+                <a:lnTo>
+                  <a:pt x="0" y="150409"/>
                 </a:lnTo>
               </a:path>
             </a:pathLst>
@@ -19753,8 +19753,8 @@
         </p:nvSpPr>
         <p:spPr>
           <a:xfrm>
-            <a:off x="2248493" y="3490896"/>
-            <a:ext cx="334875" cy="223250"/>
+            <a:off x="2473914" y="3617243"/>
+            <a:ext cx="381808" cy="254538"/>
           </a:xfrm>
           <a:custGeom>
             <a:avLst/>
@@ -19763,18 +19763,18 @@
             <a:cxnLst/>
             <a:rect l="l" t="t" r="r" b="b"/>
             <a:pathLst>
-              <a:path w="334875" h="223250">
+              <a:path w="381808" h="254538">
                 <a:moveTo>
                   <a:pt x="0" y="0"/>
                 </a:moveTo>
                 <a:lnTo>
-                  <a:pt x="334875" y="0"/>
-                </a:lnTo>
-                <a:lnTo>
-                  <a:pt x="294284" y="223250"/>
-                </a:lnTo>
-                <a:lnTo>
-                  <a:pt x="40591" y="223250"/>
+                  <a:pt x="381808" y="0"/>
+                </a:lnTo>
+                <a:lnTo>
+                  <a:pt x="335528" y="254538"/>
+                </a:lnTo>
+                <a:lnTo>
+                  <a:pt x="46280" y="254538"/>
                 </a:lnTo>
                 <a:close/>
               </a:path>
@@ -19799,8 +19799,8 @@
         </p:nvSpPr>
         <p:spPr>
           <a:xfrm>
-            <a:off x="2771100" y="3338681"/>
-            <a:ext cx="304431" cy="375465"/>
+            <a:off x="3069765" y="3443694"/>
+            <a:ext cx="347098" cy="428087"/>
           </a:xfrm>
           <a:custGeom>
             <a:avLst/>
@@ -19809,21 +19809,21 @@
             <a:cxnLst/>
             <a:rect l="l" t="t" r="r" b="b"/>
             <a:pathLst>
-              <a:path w="304431" h="375465">
+              <a:path w="347098" h="428087">
                 <a:moveTo>
-                  <a:pt x="0" y="375465"/>
+                  <a:pt x="0" y="428087"/>
                 </a:moveTo>
                 <a:lnTo>
-                  <a:pt x="304431" y="375465"/>
-                </a:lnTo>
-                <a:lnTo>
-                  <a:pt x="304431" y="172511"/>
-                </a:lnTo>
-                <a:lnTo>
-                  <a:pt x="152216" y="0"/>
-                </a:lnTo>
-                <a:lnTo>
-                  <a:pt x="0" y="172511"/>
+                  <a:pt x="347098" y="428087"/>
+                </a:lnTo>
+                <a:lnTo>
+                  <a:pt x="347098" y="196689"/>
+                </a:lnTo>
+                <a:lnTo>
+                  <a:pt x="173549" y="0"/>
+                </a:lnTo>
+                <a:lnTo>
+                  <a:pt x="0" y="196689"/>
                 </a:lnTo>
                 <a:close/>
               </a:path>
@@ -19848,8 +19848,8 @@
         </p:nvSpPr>
         <p:spPr>
           <a:xfrm>
-            <a:off x="4785421" y="3364050"/>
-            <a:ext cx="334875" cy="334875"/>
+            <a:off x="5366397" y="3472619"/>
+            <a:ext cx="381808" cy="381808"/>
           </a:xfrm>
           <a:custGeom>
             <a:avLst/>
@@ -19858,42 +19858,42 @@
             <a:cxnLst/>
             <a:rect l="l" t="t" r="r" b="b"/>
             <a:pathLst>
-              <a:path w="334875" h="334875">
+              <a:path w="381808" h="381808">
                 <a:moveTo>
-                  <a:pt x="116699" y="334875"/>
+                  <a:pt x="133054" y="381808"/>
                 </a:moveTo>
                 <a:lnTo>
-                  <a:pt x="218176" y="334875"/>
-                </a:lnTo>
-                <a:lnTo>
-                  <a:pt x="218176" y="218176"/>
-                </a:lnTo>
-                <a:lnTo>
-                  <a:pt x="334875" y="218176"/>
-                </a:lnTo>
-                <a:lnTo>
-                  <a:pt x="334875" y="116699"/>
-                </a:lnTo>
-                <a:lnTo>
-                  <a:pt x="218176" y="116699"/>
-                </a:lnTo>
-                <a:lnTo>
-                  <a:pt x="218176" y="0"/>
-                </a:lnTo>
-                <a:lnTo>
-                  <a:pt x="116699" y="0"/>
-                </a:lnTo>
-                <a:lnTo>
-                  <a:pt x="116699" y="116699"/>
-                </a:lnTo>
-                <a:lnTo>
-                  <a:pt x="0" y="116699"/>
-                </a:lnTo>
-                <a:lnTo>
-                  <a:pt x="0" y="218176"/>
-                </a:lnTo>
-                <a:lnTo>
-                  <a:pt x="116699" y="218176"/>
+                  <a:pt x="248754" y="381808"/>
+                </a:lnTo>
+                <a:lnTo>
+                  <a:pt x="248754" y="248754"/>
+                </a:lnTo>
+                <a:lnTo>
+                  <a:pt x="381808" y="248754"/>
+                </a:lnTo>
+                <a:lnTo>
+                  <a:pt x="381808" y="133054"/>
+                </a:lnTo>
+                <a:lnTo>
+                  <a:pt x="248754" y="133054"/>
+                </a:lnTo>
+                <a:lnTo>
+                  <a:pt x="248754" y="0"/>
+                </a:lnTo>
+                <a:lnTo>
+                  <a:pt x="133054" y="0"/>
+                </a:lnTo>
+                <a:lnTo>
+                  <a:pt x="133054" y="133054"/>
+                </a:lnTo>
+                <a:lnTo>
+                  <a:pt x="0" y="133054"/>
+                </a:lnTo>
+                <a:lnTo>
+                  <a:pt x="0" y="248754"/>
+                </a:lnTo>
+                <a:lnTo>
+                  <a:pt x="133054" y="248754"/>
                 </a:lnTo>
                 <a:close/>
               </a:path>
@@ -19918,8 +19918,8 @@
         </p:nvSpPr>
         <p:spPr>
           <a:xfrm>
-            <a:off x="640080" y="1755637"/>
-            <a:ext cx="5073857" cy="2029543"/>
+            <a:off x="640080" y="1638785"/>
+            <a:ext cx="5784965" cy="2313986"/>
           </a:xfrm>
           <a:custGeom>
             <a:avLst/>
@@ -19928,15 +19928,15 @@
             <a:cxnLst/>
             <a:rect l="l" t="t" r="r" b="b"/>
             <a:pathLst>
-              <a:path w="5073857" h="2029543">
+              <a:path w="5784965" h="2313986">
                 <a:moveTo>
-                  <a:pt x="0" y="2029543"/>
+                  <a:pt x="0" y="2313986"/>
                 </a:moveTo>
                 <a:lnTo>
-                  <a:pt x="5073857" y="2029543"/>
-                </a:lnTo>
-                <a:lnTo>
-                  <a:pt x="5073857" y="0"/>
+                  <a:pt x="5784965" y="2313986"/>
+                </a:lnTo>
+                <a:lnTo>
+                  <a:pt x="5784965" y="0"/>
                 </a:lnTo>
                 <a:lnTo>
                   <a:pt x="0" y="0"/>
@@ -19962,8 +19962,8 @@
         </p:nvSpPr>
         <p:spPr>
           <a:xfrm>
-            <a:off x="7692741" y="1654160"/>
-            <a:ext cx="3856131" cy="2283236"/>
+            <a:off x="8036572" y="1866051"/>
+            <a:ext cx="3512300" cy="1859453"/>
           </a:xfrm>
           <a:custGeom>
             <a:avLst/>
@@ -19972,15 +19972,15 @@
             <a:cxnLst/>
             <a:rect l="l" t="t" r="r" b="b"/>
             <a:pathLst>
-              <a:path w="3856131" h="2283236">
+              <a:path w="3512300" h="1859453">
                 <a:moveTo>
-                  <a:pt x="0" y="2283236"/>
+                  <a:pt x="0" y="1859453"/>
                 </a:moveTo>
                 <a:lnTo>
-                  <a:pt x="3856131" y="2283236"/>
-                </a:lnTo>
-                <a:lnTo>
-                  <a:pt x="3856131" y="0"/>
+                  <a:pt x="3512300" y="1859453"/>
+                </a:lnTo>
+                <a:lnTo>
+                  <a:pt x="3512300" y="0"/>
                 </a:lnTo>
                 <a:lnTo>
                   <a:pt x="0" y="0"/>
@@ -20008,8 +20008,8 @@
         </p:nvSpPr>
         <p:spPr>
           <a:xfrm>
-            <a:off x="7692741" y="1654160"/>
-            <a:ext cx="3856131" cy="380539"/>
+            <a:off x="8036572" y="1866051"/>
+            <a:ext cx="3512300" cy="309909"/>
           </a:xfrm>
           <a:custGeom>
             <a:avLst/>
@@ -20018,15 +20018,15 @@
             <a:cxnLst/>
             <a:rect l="l" t="t" r="r" b="b"/>
             <a:pathLst>
-              <a:path w="3856131" h="380539">
+              <a:path w="3512300" h="309909">
                 <a:moveTo>
-                  <a:pt x="0" y="380539"/>
+                  <a:pt x="0" y="309909"/>
                 </a:moveTo>
                 <a:lnTo>
-                  <a:pt x="3856131" y="380539"/>
-                </a:lnTo>
-                <a:lnTo>
-                  <a:pt x="3856131" y="0"/>
+                  <a:pt x="3512300" y="309909"/>
+                </a:lnTo>
+                <a:lnTo>
+                  <a:pt x="3512300" y="0"/>
                 </a:lnTo>
                 <a:lnTo>
                   <a:pt x="0" y="0"/>
@@ -20054,8 +20054,8 @@
         </p:nvSpPr>
         <p:spPr>
           <a:xfrm>
-            <a:off x="7972818" y="2063113"/>
-            <a:ext cx="246589" cy="146127"/>
+            <a:off x="8244004" y="2199100"/>
+            <a:ext cx="200821" cy="119005"/>
           </a:xfrm>
           <a:custGeom>
             <a:avLst/>
@@ -20064,15 +20064,15 @@
             <a:cxnLst/>
             <a:rect l="l" t="t" r="r" b="b"/>
             <a:pathLst>
-              <a:path w="246589" h="146127">
+              <a:path w="200821" h="119005">
                 <a:moveTo>
                   <a:pt x="0" y="0"/>
                 </a:moveTo>
                 <a:lnTo>
-                  <a:pt x="246589" y="73064"/>
-                </a:lnTo>
-                <a:lnTo>
-                  <a:pt x="0" y="146127"/>
+                  <a:pt x="200821" y="59503"/>
+                </a:lnTo>
+                <a:lnTo>
+                  <a:pt x="0" y="119005"/>
                 </a:lnTo>
                 <a:close/>
               </a:path>
@@ -20097,8 +20097,8 @@
         </p:nvSpPr>
         <p:spPr>
           <a:xfrm>
-            <a:off x="9850652" y="2076812"/>
-            <a:ext cx="301387" cy="301387"/>
+            <a:off x="9938586" y="2210257"/>
+            <a:ext cx="245448" cy="245448"/>
           </a:xfrm>
           <a:custGeom>
             <a:avLst/>
@@ -20107,42 +20107,42 @@
             <a:cxnLst/>
             <a:rect l="l" t="t" r="r" b="b"/>
             <a:pathLst>
-              <a:path w="301387" h="301387">
+              <a:path w="245448" h="245448">
                 <a:moveTo>
-                  <a:pt x="105029" y="301387"/>
+                  <a:pt x="85535" y="245448"/>
                 </a:moveTo>
                 <a:lnTo>
-                  <a:pt x="196358" y="301387"/>
-                </a:lnTo>
-                <a:lnTo>
-                  <a:pt x="196358" y="196358"/>
-                </a:lnTo>
-                <a:lnTo>
-                  <a:pt x="301387" y="196358"/>
-                </a:lnTo>
-                <a:lnTo>
-                  <a:pt x="301387" y="105029"/>
-                </a:lnTo>
-                <a:lnTo>
-                  <a:pt x="196358" y="105029"/>
-                </a:lnTo>
-                <a:lnTo>
-                  <a:pt x="196358" y="0"/>
-                </a:lnTo>
-                <a:lnTo>
-                  <a:pt x="105029" y="0"/>
-                </a:lnTo>
-                <a:lnTo>
-                  <a:pt x="105029" y="105029"/>
-                </a:lnTo>
-                <a:lnTo>
-                  <a:pt x="0" y="105029"/>
-                </a:lnTo>
-                <a:lnTo>
-                  <a:pt x="0" y="196358"/>
-                </a:lnTo>
-                <a:lnTo>
-                  <a:pt x="105029" y="196358"/>
+                  <a:pt x="159913" y="245448"/>
+                </a:lnTo>
+                <a:lnTo>
+                  <a:pt x="159913" y="159913"/>
+                </a:lnTo>
+                <a:lnTo>
+                  <a:pt x="245448" y="159913"/>
+                </a:lnTo>
+                <a:lnTo>
+                  <a:pt x="245448" y="85535"/>
+                </a:lnTo>
+                <a:lnTo>
+                  <a:pt x="159913" y="85535"/>
+                </a:lnTo>
+                <a:lnTo>
+                  <a:pt x="159913" y="0"/>
+                </a:lnTo>
+                <a:lnTo>
+                  <a:pt x="85535" y="0"/>
+                </a:lnTo>
+                <a:lnTo>
+                  <a:pt x="85535" y="85535"/>
+                </a:lnTo>
+                <a:lnTo>
+                  <a:pt x="0" y="85535"/>
+                </a:lnTo>
+                <a:lnTo>
+                  <a:pt x="0" y="159913"/>
+                </a:lnTo>
+                <a:lnTo>
+                  <a:pt x="85535" y="159913"/>
                 </a:lnTo>
                 <a:close/>
               </a:path>
@@ -20167,8 +20167,8 @@
         </p:nvSpPr>
         <p:spPr>
           <a:xfrm>
-            <a:off x="8041315" y="2738951"/>
-            <a:ext cx="63931" cy="118728"/>
+            <a:off x="8299787" y="2749498"/>
+            <a:ext cx="52065" cy="96692"/>
           </a:xfrm>
           <a:custGeom>
             <a:avLst/>
@@ -20177,15 +20177,15 @@
             <a:cxnLst/>
             <a:rect l="l" t="t" r="r" b="b"/>
             <a:pathLst>
-              <a:path w="63931" h="118728">
+              <a:path w="52065" h="96692">
                 <a:moveTo>
-                  <a:pt x="0" y="118728"/>
+                  <a:pt x="0" y="96692"/>
                 </a:moveTo>
                 <a:lnTo>
-                  <a:pt x="63931" y="118728"/>
-                </a:lnTo>
-                <a:lnTo>
-                  <a:pt x="63931" y="0"/>
+                  <a:pt x="52065" y="96692"/>
+                </a:lnTo>
+                <a:lnTo>
+                  <a:pt x="52065" y="0"/>
                 </a:lnTo>
                 <a:lnTo>
                   <a:pt x="0" y="0"/>
@@ -20213,8 +20213,8 @@
         </p:nvSpPr>
         <p:spPr>
           <a:xfrm>
-            <a:off x="7927153" y="2501494"/>
-            <a:ext cx="292254" cy="237456"/>
+            <a:off x="8206815" y="2556115"/>
+            <a:ext cx="238010" cy="193383"/>
           </a:xfrm>
           <a:custGeom>
             <a:avLst/>
@@ -20223,15 +20223,15 @@
             <a:cxnLst/>
             <a:rect l="l" t="t" r="r" b="b"/>
             <a:pathLst>
-              <a:path w="292254" h="237456">
+              <a:path w="238010" h="193383">
                 <a:moveTo>
-                  <a:pt x="0" y="237456"/>
+                  <a:pt x="0" y="193383"/>
                 </a:moveTo>
                 <a:lnTo>
-                  <a:pt x="292254" y="237456"/>
-                </a:lnTo>
-                <a:lnTo>
-                  <a:pt x="146127" y="0"/>
+                  <a:pt x="238010" y="193383"/>
+                </a:lnTo>
+                <a:lnTo>
+                  <a:pt x="119005" y="0"/>
                 </a:lnTo>
                 <a:close/>
               </a:path>
@@ -20256,8 +20256,8 @@
         </p:nvSpPr>
         <p:spPr>
           <a:xfrm>
-            <a:off x="9836953" y="2538026"/>
-            <a:ext cx="164393" cy="283121"/>
+            <a:off x="9927429" y="2585866"/>
+            <a:ext cx="133881" cy="230572"/>
           </a:xfrm>
           <a:custGeom>
             <a:avLst/>
@@ -20266,15 +20266,15 @@
             <a:cxnLst/>
             <a:rect l="l" t="t" r="r" b="b"/>
             <a:pathLst>
-              <a:path w="164393" h="283121">
+              <a:path w="133881" h="230572">
                 <a:moveTo>
-                  <a:pt x="0" y="246589"/>
+                  <a:pt x="0" y="200821"/>
                 </a:moveTo>
                 <a:lnTo>
-                  <a:pt x="164393" y="283121"/>
-                </a:lnTo>
-                <a:lnTo>
-                  <a:pt x="164393" y="36532"/>
+                  <a:pt x="133881" y="230572"/>
+                </a:lnTo>
+                <a:lnTo>
+                  <a:pt x="133881" y="29751"/>
                 </a:lnTo>
                 <a:lnTo>
                   <a:pt x="0" y="0"/>
@@ -20302,8 +20302,8 @@
         </p:nvSpPr>
         <p:spPr>
           <a:xfrm>
-            <a:off x="10001346" y="2538026"/>
-            <a:ext cx="164393" cy="283121"/>
+            <a:off x="10061309" y="2585866"/>
+            <a:ext cx="133881" cy="230572"/>
           </a:xfrm>
           <a:custGeom>
             <a:avLst/>
@@ -20312,18 +20312,18 @@
             <a:cxnLst/>
             <a:rect l="l" t="t" r="r" b="b"/>
             <a:pathLst>
-              <a:path w="164393" h="283121">
+              <a:path w="133881" h="230572">
                 <a:moveTo>
-                  <a:pt x="164393" y="246589"/>
+                  <a:pt x="133881" y="200821"/>
                 </a:moveTo>
                 <a:lnTo>
-                  <a:pt x="0" y="283121"/>
-                </a:lnTo>
-                <a:lnTo>
-                  <a:pt x="0" y="36532"/>
-                </a:lnTo>
-                <a:lnTo>
-                  <a:pt x="164393" y="0"/>
+                  <a:pt x="0" y="230572"/>
+                </a:lnTo>
+                <a:lnTo>
+                  <a:pt x="0" y="29751"/>
+                </a:lnTo>
+                <a:lnTo>
+                  <a:pt x="133881" y="0"/>
                 </a:lnTo>
                 <a:close/>
               </a:path>
@@ -20348,8 +20348,8 @@
         </p:nvSpPr>
         <p:spPr>
           <a:xfrm>
-            <a:off x="9923716" y="2985540"/>
-            <a:ext cx="155260" cy="118728"/>
+            <a:off x="9998088" y="2950319"/>
+            <a:ext cx="126443" cy="96692"/>
           </a:xfrm>
           <a:custGeom>
             <a:avLst/>
@@ -20358,27 +20358,27 @@
             <a:cxnLst/>
             <a:rect l="l" t="t" r="r" b="b"/>
             <a:pathLst>
-              <a:path w="155260" h="118728">
+              <a:path w="126443" h="96692">
                 <a:moveTo>
-                  <a:pt x="155260" y="118728"/>
+                  <a:pt x="126443" y="96692"/>
                 </a:moveTo>
                 <a:lnTo>
-                  <a:pt x="145112" y="59364"/>
-                </a:lnTo>
-                <a:lnTo>
-                  <a:pt x="116191" y="15729"/>
-                </a:lnTo>
-                <a:lnTo>
-                  <a:pt x="77630" y="0"/>
-                </a:lnTo>
-                <a:lnTo>
-                  <a:pt x="38561" y="15729"/>
-                </a:lnTo>
-                <a:lnTo>
-                  <a:pt x="10148" y="59364"/>
-                </a:lnTo>
-                <a:lnTo>
-                  <a:pt x="0" y="118728"/>
+                  <a:pt x="118179" y="48346"/>
+                </a:lnTo>
+                <a:lnTo>
+                  <a:pt x="94626" y="12810"/>
+                </a:lnTo>
+                <a:lnTo>
+                  <a:pt x="63221" y="0"/>
+                </a:lnTo>
+                <a:lnTo>
+                  <a:pt x="31404" y="12810"/>
+                </a:lnTo>
+                <a:lnTo>
+                  <a:pt x="8264" y="48346"/>
+                </a:lnTo>
+                <a:lnTo>
+                  <a:pt x="0" y="96692"/>
                 </a:lnTo>
               </a:path>
             </a:pathLst>
@@ -20400,8 +20400,8 @@
         </p:nvSpPr>
         <p:spPr>
           <a:xfrm>
-            <a:off x="9850652" y="3104268"/>
-            <a:ext cx="301387" cy="200925"/>
+            <a:off x="9938586" y="3047011"/>
+            <a:ext cx="245448" cy="163632"/>
           </a:xfrm>
           <a:custGeom>
             <a:avLst/>
@@ -20410,18 +20410,18 @@
             <a:cxnLst/>
             <a:rect l="l" t="t" r="r" b="b"/>
             <a:pathLst>
-              <a:path w="301387" h="200925">
+              <a:path w="245448" h="163632">
                 <a:moveTo>
                   <a:pt x="0" y="0"/>
                 </a:moveTo>
                 <a:lnTo>
-                  <a:pt x="301387" y="0"/>
-                </a:lnTo>
-                <a:lnTo>
-                  <a:pt x="264855" y="200925"/>
-                </a:lnTo>
-                <a:lnTo>
-                  <a:pt x="36532" y="200925"/>
+                  <a:pt x="245448" y="0"/>
+                </a:lnTo>
+                <a:lnTo>
+                  <a:pt x="215697" y="163632"/>
+                </a:lnTo>
+                <a:lnTo>
+                  <a:pt x="29751" y="163632"/>
                 </a:lnTo>
                 <a:close/>
               </a:path>
@@ -20446,8 +20446,8 @@
         </p:nvSpPr>
         <p:spPr>
           <a:xfrm>
-            <a:off x="7936286" y="3423921"/>
-            <a:ext cx="273988" cy="337919"/>
+            <a:off x="8214253" y="3307334"/>
+            <a:ext cx="223134" cy="275199"/>
           </a:xfrm>
           <a:custGeom>
             <a:avLst/>
@@ -20456,21 +20456,21 @@
             <a:cxnLst/>
             <a:rect l="l" t="t" r="r" b="b"/>
             <a:pathLst>
-              <a:path w="273988" h="337919">
+              <a:path w="223134" h="275199">
                 <a:moveTo>
-                  <a:pt x="0" y="337919"/>
+                  <a:pt x="0" y="275199"/>
                 </a:moveTo>
                 <a:lnTo>
-                  <a:pt x="273988" y="337919"/>
-                </a:lnTo>
-                <a:lnTo>
-                  <a:pt x="273988" y="155260"/>
-                </a:lnTo>
-                <a:lnTo>
-                  <a:pt x="136994" y="0"/>
-                </a:lnTo>
-                <a:lnTo>
-                  <a:pt x="0" y="155260"/>
+                  <a:pt x="223134" y="275199"/>
+                </a:lnTo>
+                <a:lnTo>
+                  <a:pt x="223134" y="126443"/>
+                </a:lnTo>
+                <a:lnTo>
+                  <a:pt x="111567" y="0"/>
+                </a:lnTo>
+                <a:lnTo>
+                  <a:pt x="0" y="126443"/>
                 </a:lnTo>
                 <a:close/>
               </a:path>
@@ -20495,8 +20495,8 @@
         </p:nvSpPr>
         <p:spPr>
           <a:xfrm>
-            <a:off x="4785421" y="2349279"/>
-            <a:ext cx="334875" cy="334875"/>
+            <a:off x="5366397" y="2315626"/>
+            <a:ext cx="381808" cy="381808"/>
           </a:xfrm>
           <a:prstGeom prst="ellipse">
             <a:avLst/>
@@ -20520,8 +20520,8 @@
         </p:nvSpPr>
         <p:spPr>
           <a:xfrm>
-            <a:off x="4881824" y="2445682"/>
-            <a:ext cx="142068" cy="142068"/>
+            <a:off x="5476311" y="2425540"/>
+            <a:ext cx="161979" cy="161979"/>
           </a:xfrm>
           <a:prstGeom prst="ellipse">
             <a:avLst/>
@@ -20545,8 +20545,8 @@
         </p:nvSpPr>
         <p:spPr>
           <a:xfrm>
-            <a:off x="7922587" y="2990107"/>
-            <a:ext cx="301387" cy="301387"/>
+            <a:off x="8203096" y="2954038"/>
+            <a:ext cx="245448" cy="245448"/>
           </a:xfrm>
           <a:prstGeom prst="ellipse">
             <a:avLst/>
@@ -20570,8 +20570,8 @@
         </p:nvSpPr>
         <p:spPr>
           <a:xfrm>
-            <a:off x="8009350" y="3076870"/>
-            <a:ext cx="127861" cy="127861"/>
+            <a:off x="8273755" y="3024697"/>
+            <a:ext cx="104129" cy="104129"/>
           </a:xfrm>
           <a:prstGeom prst="ellipse">
             <a:avLst/>
@@ -20595,8 +20595,8 @@
         </p:nvSpPr>
         <p:spPr>
           <a:xfrm flipV="1">
-            <a:off x="2811691" y="2334057"/>
-            <a:ext cx="0" cy="365318"/>
+            <a:off x="3116045" y="2298271"/>
+            <a:ext cx="0" cy="416518"/>
           </a:xfrm>
           <a:prstGeom prst="line">
             <a:avLst/>
@@ -20618,8 +20618,8 @@
         </p:nvSpPr>
         <p:spPr>
           <a:xfrm flipV="1">
-            <a:off x="640080" y="1755637"/>
-            <a:ext cx="0" cy="2029543"/>
+            <a:off x="640080" y="1638785"/>
+            <a:ext cx="0" cy="2313986"/>
           </a:xfrm>
           <a:prstGeom prst="line">
             <a:avLst/>
@@ -20641,8 +20641,8 @@
         </p:nvSpPr>
         <p:spPr>
           <a:xfrm flipV="1">
-            <a:off x="1147466" y="1755637"/>
-            <a:ext cx="0" cy="2029543"/>
+            <a:off x="1218577" y="1638785"/>
+            <a:ext cx="0" cy="2313986"/>
           </a:xfrm>
           <a:prstGeom prst="line">
             <a:avLst/>
@@ -20664,8 +20664,8 @@
         </p:nvSpPr>
         <p:spPr>
           <a:xfrm flipV="1">
-            <a:off x="1654851" y="1755637"/>
-            <a:ext cx="0" cy="2029543"/>
+            <a:off x="1797073" y="1638785"/>
+            <a:ext cx="0" cy="2313986"/>
           </a:xfrm>
           <a:prstGeom prst="line">
             <a:avLst/>
@@ -20687,8 +20687,8 @@
         </p:nvSpPr>
         <p:spPr>
           <a:xfrm flipV="1">
-            <a:off x="2162237" y="1755637"/>
-            <a:ext cx="0" cy="2029543"/>
+            <a:off x="2375570" y="1638785"/>
+            <a:ext cx="0" cy="2313986"/>
           </a:xfrm>
           <a:prstGeom prst="line">
             <a:avLst/>
@@ -20710,8 +20710,8 @@
         </p:nvSpPr>
         <p:spPr>
           <a:xfrm flipV="1">
-            <a:off x="2669623" y="1755637"/>
-            <a:ext cx="0" cy="2029543"/>
+            <a:off x="2954066" y="1638785"/>
+            <a:ext cx="0" cy="2313986"/>
           </a:xfrm>
           <a:prstGeom prst="line">
             <a:avLst/>
@@ -20733,8 +20733,8 @@
         </p:nvSpPr>
         <p:spPr>
           <a:xfrm flipV="1">
-            <a:off x="3177008" y="1755637"/>
-            <a:ext cx="0" cy="2029543"/>
+            <a:off x="3532563" y="1638785"/>
+            <a:ext cx="0" cy="2313986"/>
           </a:xfrm>
           <a:prstGeom prst="line">
             <a:avLst/>
@@ -20756,8 +20756,8 @@
         </p:nvSpPr>
         <p:spPr>
           <a:xfrm flipV="1">
-            <a:off x="3684394" y="1755637"/>
-            <a:ext cx="0" cy="2029543"/>
+            <a:off x="4111059" y="1638785"/>
+            <a:ext cx="0" cy="2313986"/>
           </a:xfrm>
           <a:prstGeom prst="line">
             <a:avLst/>
@@ -20779,8 +20779,8 @@
         </p:nvSpPr>
         <p:spPr>
           <a:xfrm flipV="1">
-            <a:off x="4191780" y="1755637"/>
-            <a:ext cx="0" cy="2029543"/>
+            <a:off x="4689556" y="1638785"/>
+            <a:ext cx="0" cy="2313986"/>
           </a:xfrm>
           <a:prstGeom prst="line">
             <a:avLst/>
@@ -20802,8 +20802,8 @@
         </p:nvSpPr>
         <p:spPr>
           <a:xfrm flipV="1">
-            <a:off x="4699165" y="1755637"/>
-            <a:ext cx="0" cy="2029543"/>
+            <a:off x="5268052" y="1638785"/>
+            <a:ext cx="0" cy="2313986"/>
           </a:xfrm>
           <a:prstGeom prst="line">
             <a:avLst/>
@@ -20825,8 +20825,8 @@
         </p:nvSpPr>
         <p:spPr>
           <a:xfrm flipV="1">
-            <a:off x="5206551" y="1755637"/>
-            <a:ext cx="0" cy="2029543"/>
+            <a:off x="5846549" y="1638785"/>
+            <a:ext cx="0" cy="2313986"/>
           </a:xfrm>
           <a:prstGeom prst="line">
             <a:avLst/>
@@ -20848,8 +20848,8 @@
         </p:nvSpPr>
         <p:spPr>
           <a:xfrm flipV="1">
-            <a:off x="5713937" y="1755637"/>
-            <a:ext cx="0" cy="2029543"/>
+            <a:off x="6425045" y="1638785"/>
+            <a:ext cx="0" cy="2313986"/>
           </a:xfrm>
           <a:prstGeom prst="line">
             <a:avLst/>
@@ -20871,8 +20871,8 @@
         </p:nvSpPr>
         <p:spPr>
           <a:xfrm>
-            <a:off x="640080" y="3785180"/>
-            <a:ext cx="5073857" cy="0"/>
+            <a:off x="640080" y="3952771"/>
+            <a:ext cx="5784965" cy="0"/>
           </a:xfrm>
           <a:prstGeom prst="line">
             <a:avLst/>
@@ -20894,8 +20894,8 @@
         </p:nvSpPr>
         <p:spPr>
           <a:xfrm>
-            <a:off x="640080" y="3277794"/>
-            <a:ext cx="5073857" cy="0"/>
+            <a:off x="640080" y="3374275"/>
+            <a:ext cx="5784965" cy="0"/>
           </a:xfrm>
           <a:prstGeom prst="line">
             <a:avLst/>
@@ -20917,8 +20917,8 @@
         </p:nvSpPr>
         <p:spPr>
           <a:xfrm>
-            <a:off x="640080" y="2770409"/>
-            <a:ext cx="5073857" cy="0"/>
+            <a:off x="640080" y="2795778"/>
+            <a:ext cx="5784965" cy="0"/>
           </a:xfrm>
           <a:prstGeom prst="line">
             <a:avLst/>
@@ -20940,8 +20940,8 @@
         </p:nvSpPr>
         <p:spPr>
           <a:xfrm>
-            <a:off x="640080" y="2263023"/>
-            <a:ext cx="5073857" cy="0"/>
+            <a:off x="640080" y="2217281"/>
+            <a:ext cx="5784965" cy="0"/>
           </a:xfrm>
           <a:prstGeom prst="line">
             <a:avLst/>
@@ -20963,8 +20963,8 @@
         </p:nvSpPr>
         <p:spPr>
           <a:xfrm>
-            <a:off x="640080" y="1755637"/>
-            <a:ext cx="5073857" cy="0"/>
+            <a:off x="640080" y="1638785"/>
+            <a:ext cx="5784965" cy="0"/>
           </a:xfrm>
           <a:prstGeom prst="line">
             <a:avLst/>
@@ -20986,8 +20986,8 @@
         </p:nvSpPr>
         <p:spPr>
           <a:xfrm flipV="1">
-            <a:off x="6677970" y="2339131"/>
-            <a:ext cx="0" cy="862556"/>
+            <a:off x="7210148" y="2444548"/>
+            <a:ext cx="0" cy="702460"/>
           </a:xfrm>
           <a:prstGeom prst="line">
             <a:avLst/>
@@ -21010,8 +21010,8 @@
         </p:nvSpPr>
         <p:spPr>
           <a:xfrm>
-            <a:off x="6246692" y="2770409"/>
-            <a:ext cx="862556" cy="0"/>
+            <a:off x="6858918" y="2795778"/>
+            <a:ext cx="702460" cy="0"/>
           </a:xfrm>
           <a:prstGeom prst="line">
             <a:avLst/>
@@ -21033,8 +21033,8 @@
         </p:nvSpPr>
         <p:spPr>
           <a:xfrm flipV="1">
-            <a:off x="7972818" y="2063113"/>
-            <a:ext cx="0" cy="328786"/>
+            <a:off x="8244004" y="2199100"/>
+            <a:ext cx="0" cy="267761"/>
           </a:xfrm>
           <a:prstGeom prst="line">
             <a:avLst/>
@@ -21056,7 +21056,7 @@
         </p:nvSpPr>
         <p:spPr>
           <a:xfrm>
-            <a:off x="6473754" y="1920307"/>
+            <a:off x="7005932" y="2068103"/>
             <a:ext cx="408432" cy="381000"/>
           </a:xfrm>
           <a:prstGeom prst="rect">
@@ -21095,7 +21095,7 @@
         </p:nvSpPr>
         <p:spPr>
           <a:xfrm>
-            <a:off x="6473754" y="3239510"/>
+            <a:off x="7005932" y="3142453"/>
             <a:ext cx="408432" cy="381000"/>
           </a:xfrm>
           <a:prstGeom prst="rect">
@@ -21134,7 +21134,7 @@
         </p:nvSpPr>
         <p:spPr>
           <a:xfrm>
-            <a:off x="7133355" y="2579909"/>
+            <a:off x="7543107" y="2605278"/>
             <a:ext cx="408432" cy="381000"/>
           </a:xfrm>
           <a:prstGeom prst="rect">
@@ -21173,7 +21173,7 @@
         </p:nvSpPr>
         <p:spPr>
           <a:xfrm>
-            <a:off x="5814152" y="2579909"/>
+            <a:off x="6468757" y="2605278"/>
             <a:ext cx="408432" cy="381000"/>
           </a:xfrm>
           <a:prstGeom prst="rect">
@@ -21212,7 +21212,7 @@
         </p:nvSpPr>
         <p:spPr>
           <a:xfrm>
-            <a:off x="9267238" y="1653930"/>
+            <a:off x="9439154" y="1830506"/>
             <a:ext cx="707136" cy="381000"/>
           </a:xfrm>
           <a:prstGeom prst="rect">
@@ -21251,7 +21251,7 @@
         </p:nvSpPr>
         <p:spPr>
           <a:xfrm>
-            <a:off x="8556898" y="2037006"/>
+            <a:off x="8798675" y="2142481"/>
             <a:ext cx="707136" cy="381000"/>
           </a:xfrm>
           <a:prstGeom prst="rect">
@@ -21290,7 +21290,7 @@
         </p:nvSpPr>
         <p:spPr>
           <a:xfrm>
-            <a:off x="10484964" y="2037006"/>
+            <a:off x="10534165" y="2142481"/>
             <a:ext cx="707136" cy="381000"/>
           </a:xfrm>
           <a:prstGeom prst="rect">
@@ -21329,7 +21329,7 @@
         </p:nvSpPr>
         <p:spPr>
           <a:xfrm>
-            <a:off x="8556898" y="2493653"/>
+            <a:off x="8798675" y="2514371"/>
             <a:ext cx="707136" cy="381000"/>
           </a:xfrm>
           <a:prstGeom prst="rect">
@@ -21368,7 +21368,7 @@
         </p:nvSpPr>
         <p:spPr>
           <a:xfrm>
-            <a:off x="10335612" y="2493653"/>
+            <a:off x="10384813" y="2514371"/>
             <a:ext cx="1005840" cy="381000"/>
           </a:xfrm>
           <a:prstGeom prst="rect">
@@ -21407,7 +21407,7 @@
         </p:nvSpPr>
         <p:spPr>
           <a:xfrm>
-            <a:off x="8258194" y="2950300"/>
+            <a:off x="8499971" y="2886262"/>
             <a:ext cx="1304544" cy="381000"/>
           </a:xfrm>
           <a:prstGeom prst="rect">
@@ -21446,7 +21446,7 @@
         </p:nvSpPr>
         <p:spPr>
           <a:xfrm>
-            <a:off x="10484964" y="2950300"/>
+            <a:off x="10534165" y="2886262"/>
             <a:ext cx="707136" cy="381000"/>
           </a:xfrm>
           <a:prstGeom prst="rect">
@@ -21485,7 +21485,7 @@
         </p:nvSpPr>
         <p:spPr>
           <a:xfrm>
-            <a:off x="8706250" y="3406947"/>
+            <a:off x="8948027" y="3258153"/>
             <a:ext cx="408432" cy="381000"/>
           </a:xfrm>
           <a:prstGeom prst="rect">

--- a/dist/초3/사회·역사/지역과공간/초3_사회·역사_지역과공간_02_그림과기호로나타내기_학생용.pptx
+++ b/dist/초3/사회·역사/지역과공간/초3_사회·역사_지역과공간_02_그림과기호로나타내기_학생용.pptx
@@ -120,13 +120,13 @@
   <p:extLst>
     <p:ext uri="{521415D9-36F7-43E2-AB2F-B90AF26B5E84}">
       <p14:sectionLst xmlns:p14="http://schemas.microsoft.com/office/powerpoint/2010/main">
-        <p14:section name="도입" id="{91508586-537e-f47b-3460-bc1d6cbee6a8}">
+        <p14:section name="도입" id="{90c810a2-9634-b4d7-b154-5c39e20d71f7}">
           <p14:sldIdLst>
             <p14:sldId id="256"/>
             <p14:sldId id="257"/>
           </p14:sldIdLst>
         </p14:section>
-        <p14:section name="개념" id="{522e87c9-a762-b778-411c-70e762e55b7a}">
+        <p14:section name="개념" id="{606458be-889f-37c9-6a2f-723235fdf736}">
           <p14:sldIdLst>
             <p14:sldId id="258"/>
             <p14:sldId id="259"/>
@@ -134,7 +134,7 @@
             <p14:sldId id="263"/>
           </p14:sldIdLst>
         </p14:section>
-        <p14:section name="연습" id="{d6eb29f0-27cc-33ce-c91d-0e0ee86e7534}">
+        <p14:section name="연습" id="{1310f6d1-4178-9ce9-d20b-a429637bca1e}">
           <p14:sldIdLst>
             <p14:sldId id="260"/>
             <p14:sldId id="261"/>
@@ -142,24 +142,24 @@
             <p14:sldId id="265"/>
           </p14:sldIdLst>
         </p14:section>
-        <p14:section name="개념" id="{98c39451-00e0-91bd-eade-1e7d82f85929}">
+        <p14:section name="개념" id="{9674d444-999c-3689-0604-6e65c877d705}">
           <p14:sldIdLst/>
         </p14:section>
-        <p14:section name="연습" id="{4af59148-69d0-b314-bfc9-43a7dfdfbe6a}">
+        <p14:section name="연습" id="{5e0ec145-afbd-ce50-c366-afcc6cfd6403}">
           <p14:sldIdLst/>
         </p14:section>
-        <p14:section name="확인" id="{b494bd0b-822d-d0b8-72db-0d9a7042e054}">
+        <p14:section name="확인" id="{ff1fc1ca-0da9-a085-035e-78669a55e316}">
           <p14:sldIdLst>
             <p14:sldId id="266"/>
             <p14:sldId id="267"/>
           </p14:sldIdLst>
         </p14:section>
-        <p14:section name="정리" id="{e271db91-d810-bb68-e4de-680071af044e}">
+        <p14:section name="정리" id="{be60061c-7d49-0a6d-4b36-1bcbe6c3800c}">
           <p14:sldIdLst>
             <p14:sldId id="268"/>
           </p14:sldIdLst>
         </p14:section>
-        <p14:section name="보충" id="{b17c545d-5843-632a-c876-9a677fd5a1fa}">
+        <p14:section name="보충" id="{922402ef-210e-2231-2c81-652a2e84c0d5}">
           <p14:sldIdLst>
             <p14:sldId id="269"/>
           </p14:sldIdLst>
@@ -5972,7 +5972,7 @@
         </p:nvSpPr>
         <p:spPr>
           <a:xfrm>
-            <a:off x="548640" y="2237232"/>
+            <a:off x="548640" y="2427732"/>
             <a:ext cx="548640" cy="548640"/>
           </a:xfrm>
           <a:prstGeom prst="ellipse">
@@ -6017,7 +6017,7 @@
         </p:nvSpPr>
         <p:spPr>
           <a:xfrm>
-            <a:off x="1325880" y="2237232"/>
+            <a:off x="1325880" y="2427732"/>
             <a:ext cx="5122012" cy="548640"/>
           </a:xfrm>
           <a:prstGeom prst="rect">
@@ -6056,7 +6056,7 @@
         </p:nvSpPr>
         <p:spPr>
           <a:xfrm>
-            <a:off x="548640" y="2996184"/>
+            <a:off x="548640" y="3140964"/>
             <a:ext cx="548640" cy="548640"/>
           </a:xfrm>
           <a:prstGeom prst="ellipse">
@@ -6101,8 +6101,8 @@
         </p:nvSpPr>
         <p:spPr>
           <a:xfrm>
-            <a:off x="1325880" y="2950464"/>
-            <a:ext cx="5122012" cy="929640"/>
+            <a:off x="1325880" y="3140964"/>
+            <a:ext cx="5122012" cy="548640"/>
           </a:xfrm>
           <a:prstGeom prst="rect">
             <a:avLst/>
@@ -6126,7 +6126,7 @@
                 <a:ea typeface="맑은 고딕" pitchFamily="34" charset="-122"/>
                 <a:cs typeface="맑은 고딕" pitchFamily="34" charset="-120"/>
               </a:rPr>
-              <a:t>큰길과 우리 집을 먼저 그려요.</a:t>
+              <a:t>큰길과 우리 집을 그려요.</a:t>
             </a:r>
             <a:endParaRPr lang="ko-KR" sz="3000" dirty="0"/>
           </a:p>
@@ -6140,7 +6140,7 @@
         </p:nvSpPr>
         <p:spPr>
           <a:xfrm>
-            <a:off x="548640" y="4044696"/>
+            <a:off x="548640" y="3854196"/>
             <a:ext cx="548640" cy="548640"/>
           </a:xfrm>
           <a:prstGeom prst="ellipse">
@@ -6185,7 +6185,7 @@
         </p:nvSpPr>
         <p:spPr>
           <a:xfrm>
-            <a:off x="1325880" y="4044696"/>
+            <a:off x="1325880" y="3854196"/>
             <a:ext cx="5122012" cy="548640"/>
           </a:xfrm>
           <a:prstGeom prst="rect">
@@ -6224,7 +6224,7 @@
         </p:nvSpPr>
         <p:spPr>
           <a:xfrm>
-            <a:off x="548640" y="4757928"/>
+            <a:off x="548640" y="4567428"/>
             <a:ext cx="548640" cy="548640"/>
           </a:xfrm>
           <a:prstGeom prst="ellipse">
@@ -6269,7 +6269,7 @@
         </p:nvSpPr>
         <p:spPr>
           <a:xfrm>
-            <a:off x="1325880" y="4757928"/>
+            <a:off x="1325880" y="4567428"/>
             <a:ext cx="5122012" cy="548640"/>
           </a:xfrm>
           <a:prstGeom prst="rect">

--- a/dist/초3/사회·역사/지역과공간/초3_사회·역사_지역과공간_02_그림과기호로나타내기_학생용.pptx
+++ b/dist/초3/사회·역사/지역과공간/초3_사회·역사_지역과공간_02_그림과기호로나타내기_학생용.pptx
@@ -120,13 +120,13 @@
   <p:extLst>
     <p:ext uri="{521415D9-36F7-43E2-AB2F-B90AF26B5E84}">
       <p14:sectionLst xmlns:p14="http://schemas.microsoft.com/office/powerpoint/2010/main">
-        <p14:section name="도입" id="{90c810a2-9634-b4d7-b154-5c39e20d71f7}">
+        <p14:section name="도입" id="{c444b24c-841a-7d73-c315-65b0d3b68005}">
           <p14:sldIdLst>
             <p14:sldId id="256"/>
             <p14:sldId id="257"/>
           </p14:sldIdLst>
         </p14:section>
-        <p14:section name="개념" id="{606458be-889f-37c9-6a2f-723235fdf736}">
+        <p14:section name="개념" id="{5d0a0351-6e46-c208-c78b-289da3208cc7}">
           <p14:sldIdLst>
             <p14:sldId id="258"/>
             <p14:sldId id="259"/>
@@ -134,7 +134,7 @@
             <p14:sldId id="263"/>
           </p14:sldIdLst>
         </p14:section>
-        <p14:section name="연습" id="{1310f6d1-4178-9ce9-d20b-a429637bca1e}">
+        <p14:section name="연습" id="{dea4a7a5-0f94-493d-449c-5f59a8e5fd3a}">
           <p14:sldIdLst>
             <p14:sldId id="260"/>
             <p14:sldId id="261"/>
@@ -142,24 +142,24 @@
             <p14:sldId id="265"/>
           </p14:sldIdLst>
         </p14:section>
-        <p14:section name="개념" id="{9674d444-999c-3689-0604-6e65c877d705}">
+        <p14:section name="개념" id="{ad90a8b9-c511-a330-f804-de17c84c1b4c}">
           <p14:sldIdLst/>
         </p14:section>
-        <p14:section name="연습" id="{5e0ec145-afbd-ce50-c366-afcc6cfd6403}">
+        <p14:section name="연습" id="{040414c3-887f-1130-4045-c4dd89ac73ce}">
           <p14:sldIdLst/>
         </p14:section>
-        <p14:section name="확인" id="{ff1fc1ca-0da9-a085-035e-78669a55e316}">
+        <p14:section name="확인" id="{e4b2bdf4-f529-4266-1a83-03c596a62596}">
           <p14:sldIdLst>
             <p14:sldId id="266"/>
             <p14:sldId id="267"/>
           </p14:sldIdLst>
         </p14:section>
-        <p14:section name="정리" id="{be60061c-7d49-0a6d-4b36-1bcbe6c3800c}">
+        <p14:section name="정리" id="{8b0b62cb-f7b5-9cbc-f0bd-8a952f6e1bd5}">
           <p14:sldIdLst>
             <p14:sldId id="268"/>
           </p14:sldIdLst>
         </p14:section>
-        <p14:section name="보충" id="{922402ef-210e-2231-2c81-652a2e84c0d5}">
+        <p14:section name="보충" id="{55bcd967-a086-270d-f73c-ebfbbc7b703c}">
           <p14:sldIdLst>
             <p14:sldId id="269"/>
           </p14:sldIdLst>
